--- a/assets/downloads/cpp-fundamentals/Module-4-Functions-Organizing-Your-Code.pptx
+++ b/assets/downloads/cpp-fundamentals/Module-4-Functions-Organizing-Your-Code.pptx
@@ -18,6 +18,7 @@
     <p:sldId id="266" r:id="rId17"/>
     <p:sldId id="267" r:id="rId18"/>
     <p:sldId id="268" r:id="rId19"/>
+    <p:sldId id="269" r:id="rId20"/>
   </p:sldIdLst>
   <p:sldSz cx="12191695" cy="6858000" type="screen4x3"/>
   <p:notesSz cx="6858000" cy="9144000"/>
@@ -3558,7 +3559,7 @@
                 </a:solidFill>
                 <a:latin typeface="Calibri"/>
               </a:rPr>
-              <a:t>WHERE VARIABLES LIVE</a:t>
+              <a:t>OPTIONAL INPUTS</a:t>
             </a:r>
           </a:p>
         </p:txBody>
@@ -3593,140 +3594,27 @@
                 </a:solidFill>
                 <a:latin typeface="Consolas"/>
               </a:rPr>
-              <a:t>Variable Scope: Local vs. Global</a:t>
-            </a:r>
-          </a:p>
-        </p:txBody>
-      </p:sp>
-      <p:sp>
-        <p:nvSpPr>
-          <p:cNvPr id="5" name="TextBox 4"/>
-          <p:cNvSpPr txBox="1"/>
-          <p:nvPr/>
-        </p:nvSpPr>
-        <p:spPr>
-          <a:xfrm>
-            <a:off x="548640" y="1691640"/>
-            <a:ext cx="6583680" cy="4480560"/>
-          </a:xfrm>
-          <a:prstGeom prst="rect">
-            <a:avLst/>
-          </a:prstGeom>
-          <a:noFill/>
-        </p:spPr>
-        <p:txBody>
-          <a:bodyPr wrap="square" anchor="t" lIns="0" rIns="0" tIns="0" bIns="0">
-            <a:spAutoFit/>
-          </a:bodyPr>
-          <a:lstStyle/>
-          <a:p>
-            <a:pPr marL="228600" indent="-228600">
-              <a:spcAft>
-                <a:spcPts val="1400"/>
-              </a:spcAft>
-              <a:buSzPct val="100000"/>
-              <a:buChar char="•"/>
-            </a:pPr>
-            <a:r>
-              <a:rPr sz="1700" b="0" i="0">
-                <a:solidFill>
-                  <a:srgbClr val="1E1E2E"/>
-                </a:solidFill>
-                <a:latin typeface="Calibri"/>
-              </a:rPr>
-              <a:t>Local variables live inside the function (or block) where they're declared.</a:t>
-            </a:r>
-          </a:p>
-          <a:p>
-            <a:pPr marL="228600" indent="-228600">
-              <a:spcAft>
-                <a:spcPts val="1400"/>
-              </a:spcAft>
-              <a:buSzPct val="100000"/>
-              <a:buChar char="•"/>
-            </a:pPr>
-            <a:r>
-              <a:rPr sz="1700" b="0" i="0">
-                <a:solidFill>
-                  <a:srgbClr val="1E1E2E"/>
-                </a:solidFill>
-                <a:latin typeface="Calibri"/>
-              </a:rPr>
-              <a:t>Two different functions can each safely use a variable named total.</a:t>
-            </a:r>
-          </a:p>
-          <a:p>
-            <a:pPr marL="228600" indent="-228600">
-              <a:spcAft>
-                <a:spcPts val="1400"/>
-              </a:spcAft>
-              <a:buSzPct val="100000"/>
-              <a:buChar char="•"/>
-            </a:pPr>
-            <a:r>
-              <a:rPr sz="1700" b="0" i="0">
-                <a:solidFill>
-                  <a:srgbClr val="1E1E2E"/>
-                </a:solidFill>
-                <a:latin typeface="Calibri"/>
-              </a:rPr>
-              <a:t>Global variables are declared outside every function — visible everywhere.</a:t>
-            </a:r>
-          </a:p>
-          <a:p>
-            <a:pPr marL="228600" indent="-228600">
-              <a:spcAft>
-                <a:spcPts val="1400"/>
-              </a:spcAft>
-              <a:buSzPct val="100000"/>
-              <a:buChar char="•"/>
-            </a:pPr>
-            <a:r>
-              <a:rPr sz="1700" b="0" i="0">
-                <a:solidFill>
-                  <a:srgbClr val="1E1E2E"/>
-                </a:solidFill>
-                <a:latin typeface="Calibri"/>
-              </a:rPr>
-              <a:t>Globals make bugs harder to trace since any function could change them.</a:t>
-            </a:r>
-          </a:p>
-          <a:p>
-            <a:pPr marL="228600" indent="-228600">
-              <a:spcAft>
-                <a:spcPts val="1400"/>
-              </a:spcAft>
-              <a:buSzPct val="100000"/>
-              <a:buChar char="•"/>
-            </a:pPr>
-            <a:r>
-              <a:rPr sz="1700" b="0" i="0">
-                <a:solidFill>
-                  <a:srgbClr val="1E1E2E"/>
-                </a:solidFill>
-                <a:latin typeface="Calibri"/>
-              </a:rPr>
-              <a:t>Prefer locals: pass data in as parameters, hand results back with return.</a:t>
-            </a:r>
-          </a:p>
-        </p:txBody>
-      </p:sp>
-      <p:sp>
-        <p:nvSpPr>
-          <p:cNvPr id="6" name="Rectangle 5"/>
+              <a:t>Default Parameters</a:t>
+            </a:r>
+          </a:p>
+        </p:txBody>
+      </p:sp>
+      <p:sp>
+        <p:nvSpPr>
+          <p:cNvPr id="5" name="Rectangle 4"/>
           <p:cNvSpPr/>
           <p:nvPr/>
         </p:nvSpPr>
         <p:spPr>
           <a:xfrm>
-            <a:off x="7452360" y="1691640"/>
-            <a:ext cx="3977639" cy="2926080"/>
+            <a:off x="548640" y="1645920"/>
+            <a:ext cx="6858000" cy="3231489"/>
           </a:xfrm>
           <a:prstGeom prst="rect">
             <a:avLst/>
           </a:prstGeom>
           <a:solidFill>
-            <a:srgbClr val="1E1E2E"/>
+            <a:srgbClr val="1E1E1E"/>
           </a:solidFill>
           <a:ln>
             <a:noFill/>
@@ -3757,14 +3645,225 @@
       </p:sp>
       <p:sp>
         <p:nvSpPr>
-          <p:cNvPr id="7" name="TextBox 6"/>
+          <p:cNvPr id="6" name="Rectangle 5"/>
+          <p:cNvSpPr/>
+          <p:nvPr/>
+        </p:nvSpPr>
+        <p:spPr>
+          <a:xfrm>
+            <a:off x="548640" y="1645920"/>
+            <a:ext cx="6858000" cy="292608"/>
+          </a:xfrm>
+          <a:prstGeom prst="rect">
+            <a:avLst/>
+          </a:prstGeom>
+          <a:solidFill>
+            <a:srgbClr val="2D2D30"/>
+          </a:solidFill>
+          <a:ln>
+            <a:noFill/>
+          </a:ln>
+          <a:effectLst/>
+        </p:spPr>
+        <p:style>
+          <a:lnRef idx="1">
+            <a:schemeClr val="accent1"/>
+          </a:lnRef>
+          <a:fillRef idx="3">
+            <a:schemeClr val="accent1"/>
+          </a:fillRef>
+          <a:effectRef idx="2">
+            <a:schemeClr val="accent1"/>
+          </a:effectRef>
+          <a:fontRef idx="minor">
+            <a:schemeClr val="lt1"/>
+          </a:fontRef>
+        </p:style>
+        <p:txBody>
+          <a:bodyPr rtlCol="0" anchor="ctr"/>
+          <a:lstStyle/>
+          <a:p>
+            <a:pPr algn="ctr"/>
+          </a:p>
+        </p:txBody>
+      </p:sp>
+      <p:sp>
+        <p:nvSpPr>
+          <p:cNvPr id="7" name="Oval 6"/>
+          <p:cNvSpPr/>
+          <p:nvPr/>
+        </p:nvSpPr>
+        <p:spPr>
+          <a:xfrm>
+            <a:off x="713232" y="1737360"/>
+            <a:ext cx="109728" cy="109728"/>
+          </a:xfrm>
+          <a:prstGeom prst="ellipse">
+            <a:avLst/>
+          </a:prstGeom>
+          <a:solidFill>
+            <a:srgbClr val="FF5F56"/>
+          </a:solidFill>
+          <a:ln>
+            <a:noFill/>
+          </a:ln>
+          <a:effectLst/>
+        </p:spPr>
+        <p:style>
+          <a:lnRef idx="1">
+            <a:schemeClr val="accent1"/>
+          </a:lnRef>
+          <a:fillRef idx="3">
+            <a:schemeClr val="accent1"/>
+          </a:fillRef>
+          <a:effectRef idx="2">
+            <a:schemeClr val="accent1"/>
+          </a:effectRef>
+          <a:fontRef idx="minor">
+            <a:schemeClr val="lt1"/>
+          </a:fontRef>
+        </p:style>
+        <p:txBody>
+          <a:bodyPr rtlCol="0" anchor="ctr"/>
+          <a:lstStyle/>
+          <a:p>
+            <a:pPr algn="ctr"/>
+          </a:p>
+        </p:txBody>
+      </p:sp>
+      <p:sp>
+        <p:nvSpPr>
+          <p:cNvPr id="8" name="Oval 7"/>
+          <p:cNvSpPr/>
+          <p:nvPr/>
+        </p:nvSpPr>
+        <p:spPr>
+          <a:xfrm>
+            <a:off x="932688" y="1737360"/>
+            <a:ext cx="109728" cy="109728"/>
+          </a:xfrm>
+          <a:prstGeom prst="ellipse">
+            <a:avLst/>
+          </a:prstGeom>
+          <a:solidFill>
+            <a:srgbClr val="FFBD2E"/>
+          </a:solidFill>
+          <a:ln>
+            <a:noFill/>
+          </a:ln>
+          <a:effectLst/>
+        </p:spPr>
+        <p:style>
+          <a:lnRef idx="1">
+            <a:schemeClr val="accent1"/>
+          </a:lnRef>
+          <a:fillRef idx="3">
+            <a:schemeClr val="accent1"/>
+          </a:fillRef>
+          <a:effectRef idx="2">
+            <a:schemeClr val="accent1"/>
+          </a:effectRef>
+          <a:fontRef idx="minor">
+            <a:schemeClr val="lt1"/>
+          </a:fontRef>
+        </p:style>
+        <p:txBody>
+          <a:bodyPr rtlCol="0" anchor="ctr"/>
+          <a:lstStyle/>
+          <a:p>
+            <a:pPr algn="ctr"/>
+          </a:p>
+        </p:txBody>
+      </p:sp>
+      <p:sp>
+        <p:nvSpPr>
+          <p:cNvPr id="9" name="Oval 8"/>
+          <p:cNvSpPr/>
+          <p:nvPr/>
+        </p:nvSpPr>
+        <p:spPr>
+          <a:xfrm>
+            <a:off x="1152144" y="1737360"/>
+            <a:ext cx="109728" cy="109728"/>
+          </a:xfrm>
+          <a:prstGeom prst="ellipse">
+            <a:avLst/>
+          </a:prstGeom>
+          <a:solidFill>
+            <a:srgbClr val="27C93F"/>
+          </a:solidFill>
+          <a:ln>
+            <a:noFill/>
+          </a:ln>
+          <a:effectLst/>
+        </p:spPr>
+        <p:style>
+          <a:lnRef idx="1">
+            <a:schemeClr val="accent1"/>
+          </a:lnRef>
+          <a:fillRef idx="3">
+            <a:schemeClr val="accent1"/>
+          </a:fillRef>
+          <a:effectRef idx="2">
+            <a:schemeClr val="accent1"/>
+          </a:effectRef>
+          <a:fontRef idx="minor">
+            <a:schemeClr val="lt1"/>
+          </a:fontRef>
+        </p:style>
+        <p:txBody>
+          <a:bodyPr rtlCol="0" anchor="ctr"/>
+          <a:lstStyle/>
+          <a:p>
+            <a:pPr algn="ctr"/>
+          </a:p>
+        </p:txBody>
+      </p:sp>
+      <p:sp>
+        <p:nvSpPr>
+          <p:cNvPr id="10" name="TextBox 9"/>
           <p:cNvSpPr txBox="1"/>
           <p:nvPr/>
         </p:nvSpPr>
         <p:spPr>
           <a:xfrm>
-            <a:off x="7726679" y="1874519"/>
-            <a:ext cx="3474720" cy="320040"/>
+            <a:off x="1371600" y="1645920"/>
+            <a:ext cx="5760720" cy="292608"/>
+          </a:xfrm>
+          <a:prstGeom prst="rect">
+            <a:avLst/>
+          </a:prstGeom>
+          <a:noFill/>
+        </p:spPr>
+        <p:txBody>
+          <a:bodyPr wrap="square" anchor="ctr" lIns="0" rIns="0" tIns="0" bIns="0">
+            <a:spAutoFit/>
+          </a:bodyPr>
+          <a:lstStyle/>
+          <a:p>
+            <a:pPr algn="l"/>
+            <a:r>
+              <a:rPr sz="1100" b="0" i="0">
+                <a:solidFill>
+                  <a:srgbClr val="9B9BA3"/>
+                </a:solidFill>
+                <a:latin typeface="Consolas"/>
+              </a:rPr>
+              <a:t>main.cpp</a:t>
+            </a:r>
+          </a:p>
+        </p:txBody>
+      </p:sp>
+      <p:sp>
+        <p:nvSpPr>
+          <p:cNvPr id="11" name="TextBox 10"/>
+          <p:cNvSpPr txBox="1"/>
+          <p:nvPr/>
+        </p:nvSpPr>
+        <p:spPr>
+          <a:xfrm>
+            <a:off x="822959" y="2029968"/>
+            <a:ext cx="6309360" cy="2984601"/>
           </a:xfrm>
           <a:prstGeom prst="rect">
             <a:avLst/>
@@ -3777,29 +3876,821 @@
           </a:bodyPr>
           <a:lstStyle/>
           <a:p>
-            <a:pPr algn="l"/>
-            <a:r>
-              <a:rPr sz="1300" b="1" i="0">
-                <a:solidFill>
-                  <a:srgbClr val="F0A500"/>
-                </a:solidFill>
-                <a:latin typeface="Calibri"/>
-              </a:rPr>
-              <a:t>Rule of Thumb</a:t>
-            </a:r>
-          </a:p>
-        </p:txBody>
-      </p:sp>
-      <p:sp>
-        <p:nvSpPr>
-          <p:cNvPr id="8" name="TextBox 7"/>
+            <a:pPr>
+              <a:lnSpc>
+                <a:spcPts val="1860"/>
+              </a:lnSpc>
+            </a:pPr>
+            <a:r>
+              <a:rPr sz="1400" b="0" i="0">
+                <a:solidFill>
+                  <a:srgbClr val="569CD6"/>
+                </a:solidFill>
+                <a:latin typeface="Consolas"/>
+              </a:rPr>
+              <a:t>char</a:t>
+            </a:r>
+            <a:r>
+              <a:rPr sz="1400" b="0" i="0">
+                <a:solidFill>
+                  <a:srgbClr val="D4D4D4"/>
+                </a:solidFill>
+                <a:latin typeface="Consolas"/>
+              </a:rPr>
+              <a:t> </a:t>
+            </a:r>
+            <a:r>
+              <a:rPr sz="1400" b="0" i="0">
+                <a:solidFill>
+                  <a:srgbClr val="DCDCAA"/>
+                </a:solidFill>
+                <a:latin typeface="Consolas"/>
+              </a:rPr>
+              <a:t>getLetterGrade</a:t>
+            </a:r>
+            <a:r>
+              <a:rPr sz="1400" b="0" i="0">
+                <a:solidFill>
+                  <a:srgbClr val="D4D4D4"/>
+                </a:solidFill>
+                <a:latin typeface="Consolas"/>
+              </a:rPr>
+              <a:t>(</a:t>
+            </a:r>
+          </a:p>
+          <a:p>
+            <a:pPr>
+              <a:lnSpc>
+                <a:spcPts val="1860"/>
+              </a:lnSpc>
+            </a:pPr>
+            <a:r>
+              <a:rPr sz="1400" b="0" i="0">
+                <a:solidFill>
+                  <a:srgbClr val="D4D4D4"/>
+                </a:solidFill>
+                <a:latin typeface="Consolas"/>
+              </a:rPr>
+              <a:t>    </a:t>
+            </a:r>
+            <a:r>
+              <a:rPr sz="1400" b="0" i="0">
+                <a:solidFill>
+                  <a:srgbClr val="569CD6"/>
+                </a:solidFill>
+                <a:latin typeface="Consolas"/>
+              </a:rPr>
+              <a:t>double</a:t>
+            </a:r>
+            <a:r>
+              <a:rPr sz="1400" b="0" i="0">
+                <a:solidFill>
+                  <a:srgbClr val="D4D4D4"/>
+                </a:solidFill>
+                <a:latin typeface="Consolas"/>
+              </a:rPr>
+              <a:t> </a:t>
+            </a:r>
+            <a:r>
+              <a:rPr sz="1400" b="0" i="0">
+                <a:solidFill>
+                  <a:srgbClr val="D4D4D4"/>
+                </a:solidFill>
+                <a:latin typeface="Consolas"/>
+              </a:rPr>
+              <a:t>average</a:t>
+            </a:r>
+            <a:r>
+              <a:rPr sz="1400" b="0" i="0">
+                <a:solidFill>
+                  <a:srgbClr val="D4D4D4"/>
+                </a:solidFill>
+                <a:latin typeface="Consolas"/>
+              </a:rPr>
+              <a:t>,</a:t>
+            </a:r>
+            <a:r>
+              <a:rPr sz="1400" b="0" i="0">
+                <a:solidFill>
+                  <a:srgbClr val="D4D4D4"/>
+                </a:solidFill>
+                <a:latin typeface="Consolas"/>
+              </a:rPr>
+              <a:t> </a:t>
+            </a:r>
+            <a:r>
+              <a:rPr sz="1400" b="0" i="0">
+                <a:solidFill>
+                  <a:srgbClr val="569CD6"/>
+                </a:solidFill>
+                <a:latin typeface="Consolas"/>
+              </a:rPr>
+              <a:t>double</a:t>
+            </a:r>
+            <a:r>
+              <a:rPr sz="1400" b="0" i="0">
+                <a:solidFill>
+                  <a:srgbClr val="D4D4D4"/>
+                </a:solidFill>
+                <a:latin typeface="Consolas"/>
+              </a:rPr>
+              <a:t> </a:t>
+            </a:r>
+            <a:r>
+              <a:rPr sz="1400" b="0" i="0">
+                <a:solidFill>
+                  <a:srgbClr val="D4D4D4"/>
+                </a:solidFill>
+                <a:latin typeface="Consolas"/>
+              </a:rPr>
+              <a:t>curve</a:t>
+            </a:r>
+            <a:r>
+              <a:rPr sz="1400" b="0" i="0">
+                <a:solidFill>
+                  <a:srgbClr val="D4D4D4"/>
+                </a:solidFill>
+                <a:latin typeface="Consolas"/>
+              </a:rPr>
+              <a:t> </a:t>
+            </a:r>
+            <a:r>
+              <a:rPr sz="1400" b="0" i="0">
+                <a:solidFill>
+                  <a:srgbClr val="D4D4D4"/>
+                </a:solidFill>
+                <a:latin typeface="Consolas"/>
+              </a:rPr>
+              <a:t>=</a:t>
+            </a:r>
+            <a:r>
+              <a:rPr sz="1400" b="0" i="0">
+                <a:solidFill>
+                  <a:srgbClr val="D4D4D4"/>
+                </a:solidFill>
+                <a:latin typeface="Consolas"/>
+              </a:rPr>
+              <a:t> </a:t>
+            </a:r>
+            <a:r>
+              <a:rPr sz="1400" b="0" i="0">
+                <a:solidFill>
+                  <a:srgbClr val="B5CEA8"/>
+                </a:solidFill>
+                <a:latin typeface="Consolas"/>
+              </a:rPr>
+              <a:t>0.0</a:t>
+            </a:r>
+            <a:r>
+              <a:rPr sz="1400" b="0" i="0">
+                <a:solidFill>
+                  <a:srgbClr val="D4D4D4"/>
+                </a:solidFill>
+                <a:latin typeface="Consolas"/>
+              </a:rPr>
+              <a:t>)</a:t>
+            </a:r>
+            <a:r>
+              <a:rPr sz="1400" b="0" i="0">
+                <a:solidFill>
+                  <a:srgbClr val="D4D4D4"/>
+                </a:solidFill>
+                <a:latin typeface="Consolas"/>
+              </a:rPr>
+              <a:t> </a:t>
+            </a:r>
+            <a:r>
+              <a:rPr sz="1400" b="0" i="0">
+                <a:solidFill>
+                  <a:srgbClr val="D4D4D4"/>
+                </a:solidFill>
+                <a:latin typeface="Consolas"/>
+              </a:rPr>
+              <a:t>{</a:t>
+            </a:r>
+          </a:p>
+          <a:p>
+            <a:pPr>
+              <a:lnSpc>
+                <a:spcPts val="1860"/>
+              </a:lnSpc>
+            </a:pPr>
+            <a:r>
+              <a:rPr sz="1400" b="0" i="0">
+                <a:solidFill>
+                  <a:srgbClr val="D4D4D4"/>
+                </a:solidFill>
+                <a:latin typeface="Consolas"/>
+              </a:rPr>
+              <a:t>    </a:t>
+            </a:r>
+            <a:r>
+              <a:rPr sz="1400" b="0" i="0">
+                <a:solidFill>
+                  <a:srgbClr val="569CD6"/>
+                </a:solidFill>
+                <a:latin typeface="Consolas"/>
+              </a:rPr>
+              <a:t>double</a:t>
+            </a:r>
+            <a:r>
+              <a:rPr sz="1400" b="0" i="0">
+                <a:solidFill>
+                  <a:srgbClr val="D4D4D4"/>
+                </a:solidFill>
+                <a:latin typeface="Consolas"/>
+              </a:rPr>
+              <a:t> </a:t>
+            </a:r>
+            <a:r>
+              <a:rPr sz="1400" b="0" i="0">
+                <a:solidFill>
+                  <a:srgbClr val="D4D4D4"/>
+                </a:solidFill>
+                <a:latin typeface="Consolas"/>
+              </a:rPr>
+              <a:t>adj</a:t>
+            </a:r>
+            <a:r>
+              <a:rPr sz="1400" b="0" i="0">
+                <a:solidFill>
+                  <a:srgbClr val="D4D4D4"/>
+                </a:solidFill>
+                <a:latin typeface="Consolas"/>
+              </a:rPr>
+              <a:t> </a:t>
+            </a:r>
+            <a:r>
+              <a:rPr sz="1400" b="0" i="0">
+                <a:solidFill>
+                  <a:srgbClr val="D4D4D4"/>
+                </a:solidFill>
+                <a:latin typeface="Consolas"/>
+              </a:rPr>
+              <a:t>=</a:t>
+            </a:r>
+            <a:r>
+              <a:rPr sz="1400" b="0" i="0">
+                <a:solidFill>
+                  <a:srgbClr val="D4D4D4"/>
+                </a:solidFill>
+                <a:latin typeface="Consolas"/>
+              </a:rPr>
+              <a:t> </a:t>
+            </a:r>
+            <a:r>
+              <a:rPr sz="1400" b="0" i="0">
+                <a:solidFill>
+                  <a:srgbClr val="D4D4D4"/>
+                </a:solidFill>
+                <a:latin typeface="Consolas"/>
+              </a:rPr>
+              <a:t>average</a:t>
+            </a:r>
+            <a:r>
+              <a:rPr sz="1400" b="0" i="0">
+                <a:solidFill>
+                  <a:srgbClr val="D4D4D4"/>
+                </a:solidFill>
+                <a:latin typeface="Consolas"/>
+              </a:rPr>
+              <a:t> </a:t>
+            </a:r>
+            <a:r>
+              <a:rPr sz="1400" b="0" i="0">
+                <a:solidFill>
+                  <a:srgbClr val="D4D4D4"/>
+                </a:solidFill>
+                <a:latin typeface="Consolas"/>
+              </a:rPr>
+              <a:t>+</a:t>
+            </a:r>
+            <a:r>
+              <a:rPr sz="1400" b="0" i="0">
+                <a:solidFill>
+                  <a:srgbClr val="D4D4D4"/>
+                </a:solidFill>
+                <a:latin typeface="Consolas"/>
+              </a:rPr>
+              <a:t> </a:t>
+            </a:r>
+            <a:r>
+              <a:rPr sz="1400" b="0" i="0">
+                <a:solidFill>
+                  <a:srgbClr val="D4D4D4"/>
+                </a:solidFill>
+                <a:latin typeface="Consolas"/>
+              </a:rPr>
+              <a:t>curve</a:t>
+            </a:r>
+            <a:r>
+              <a:rPr sz="1400" b="0" i="0">
+                <a:solidFill>
+                  <a:srgbClr val="D4D4D4"/>
+                </a:solidFill>
+                <a:latin typeface="Consolas"/>
+              </a:rPr>
+              <a:t>;</a:t>
+            </a:r>
+          </a:p>
+          <a:p>
+            <a:pPr>
+              <a:lnSpc>
+                <a:spcPts val="1860"/>
+              </a:lnSpc>
+            </a:pPr>
+            <a:r>
+              <a:rPr sz="1400" b="0" i="0">
+                <a:solidFill>
+                  <a:srgbClr val="D4D4D4"/>
+                </a:solidFill>
+                <a:latin typeface="Consolas"/>
+              </a:rPr>
+              <a:t>    </a:t>
+            </a:r>
+            <a:r>
+              <a:rPr sz="1400" b="0" i="0">
+                <a:solidFill>
+                  <a:srgbClr val="569CD6"/>
+                </a:solidFill>
+                <a:latin typeface="Consolas"/>
+              </a:rPr>
+              <a:t>if</a:t>
+            </a:r>
+            <a:r>
+              <a:rPr sz="1400" b="0" i="0">
+                <a:solidFill>
+                  <a:srgbClr val="D4D4D4"/>
+                </a:solidFill>
+                <a:latin typeface="Consolas"/>
+              </a:rPr>
+              <a:t> </a:t>
+            </a:r>
+            <a:r>
+              <a:rPr sz="1400" b="0" i="0">
+                <a:solidFill>
+                  <a:srgbClr val="D4D4D4"/>
+                </a:solidFill>
+                <a:latin typeface="Consolas"/>
+              </a:rPr>
+              <a:t>(</a:t>
+            </a:r>
+            <a:r>
+              <a:rPr sz="1400" b="0" i="0">
+                <a:solidFill>
+                  <a:srgbClr val="D4D4D4"/>
+                </a:solidFill>
+                <a:latin typeface="Consolas"/>
+              </a:rPr>
+              <a:t>adj</a:t>
+            </a:r>
+            <a:r>
+              <a:rPr sz="1400" b="0" i="0">
+                <a:solidFill>
+                  <a:srgbClr val="D4D4D4"/>
+                </a:solidFill>
+                <a:latin typeface="Consolas"/>
+              </a:rPr>
+              <a:t> </a:t>
+            </a:r>
+            <a:r>
+              <a:rPr sz="1400" b="0" i="0">
+                <a:solidFill>
+                  <a:srgbClr val="D4D4D4"/>
+                </a:solidFill>
+                <a:latin typeface="Consolas"/>
+              </a:rPr>
+              <a:t>&gt;=</a:t>
+            </a:r>
+            <a:r>
+              <a:rPr sz="1400" b="0" i="0">
+                <a:solidFill>
+                  <a:srgbClr val="D4D4D4"/>
+                </a:solidFill>
+                <a:latin typeface="Consolas"/>
+              </a:rPr>
+              <a:t> </a:t>
+            </a:r>
+            <a:r>
+              <a:rPr sz="1400" b="0" i="0">
+                <a:solidFill>
+                  <a:srgbClr val="B5CEA8"/>
+                </a:solidFill>
+                <a:latin typeface="Consolas"/>
+              </a:rPr>
+              <a:t>90</a:t>
+            </a:r>
+            <a:r>
+              <a:rPr sz="1400" b="0" i="0">
+                <a:solidFill>
+                  <a:srgbClr val="D4D4D4"/>
+                </a:solidFill>
+                <a:latin typeface="Consolas"/>
+              </a:rPr>
+              <a:t>)</a:t>
+            </a:r>
+            <a:r>
+              <a:rPr sz="1400" b="0" i="0">
+                <a:solidFill>
+                  <a:srgbClr val="D4D4D4"/>
+                </a:solidFill>
+                <a:latin typeface="Consolas"/>
+              </a:rPr>
+              <a:t> </a:t>
+            </a:r>
+            <a:r>
+              <a:rPr sz="1400" b="0" i="0">
+                <a:solidFill>
+                  <a:srgbClr val="569CD6"/>
+                </a:solidFill>
+                <a:latin typeface="Consolas"/>
+              </a:rPr>
+              <a:t>return</a:t>
+            </a:r>
+            <a:r>
+              <a:rPr sz="1400" b="0" i="0">
+                <a:solidFill>
+                  <a:srgbClr val="D4D4D4"/>
+                </a:solidFill>
+                <a:latin typeface="Consolas"/>
+              </a:rPr>
+              <a:t> </a:t>
+            </a:r>
+            <a:r>
+              <a:rPr sz="1400" b="0" i="0">
+                <a:solidFill>
+                  <a:srgbClr val="CE9178"/>
+                </a:solidFill>
+                <a:latin typeface="Consolas"/>
+              </a:rPr>
+              <a:t>'A'</a:t>
+            </a:r>
+            <a:r>
+              <a:rPr sz="1400" b="0" i="0">
+                <a:solidFill>
+                  <a:srgbClr val="D4D4D4"/>
+                </a:solidFill>
+                <a:latin typeface="Consolas"/>
+              </a:rPr>
+              <a:t>;</a:t>
+            </a:r>
+          </a:p>
+          <a:p>
+            <a:pPr>
+              <a:lnSpc>
+                <a:spcPts val="1860"/>
+              </a:lnSpc>
+            </a:pPr>
+            <a:r>
+              <a:rPr sz="1400" b="0" i="0">
+                <a:solidFill>
+                  <a:srgbClr val="D4D4D4"/>
+                </a:solidFill>
+                <a:latin typeface="Consolas"/>
+              </a:rPr>
+              <a:t>    </a:t>
+            </a:r>
+            <a:r>
+              <a:rPr sz="1400" b="0" i="0">
+                <a:solidFill>
+                  <a:srgbClr val="569CD6"/>
+                </a:solidFill>
+                <a:latin typeface="Consolas"/>
+              </a:rPr>
+              <a:t>return</a:t>
+            </a:r>
+            <a:r>
+              <a:rPr sz="1400" b="0" i="0">
+                <a:solidFill>
+                  <a:srgbClr val="D4D4D4"/>
+                </a:solidFill>
+                <a:latin typeface="Consolas"/>
+              </a:rPr>
+              <a:t> </a:t>
+            </a:r>
+            <a:r>
+              <a:rPr sz="1400" b="0" i="0">
+                <a:solidFill>
+                  <a:srgbClr val="CE9178"/>
+                </a:solidFill>
+                <a:latin typeface="Consolas"/>
+              </a:rPr>
+              <a:t>'B'</a:t>
+            </a:r>
+            <a:r>
+              <a:rPr sz="1400" b="0" i="0">
+                <a:solidFill>
+                  <a:srgbClr val="D4D4D4"/>
+                </a:solidFill>
+                <a:latin typeface="Consolas"/>
+              </a:rPr>
+              <a:t>;</a:t>
+            </a:r>
+          </a:p>
+          <a:p>
+            <a:pPr>
+              <a:lnSpc>
+                <a:spcPts val="1860"/>
+              </a:lnSpc>
+            </a:pPr>
+            <a:r>
+              <a:rPr sz="1400" b="0" i="0">
+                <a:solidFill>
+                  <a:srgbClr val="D4D4D4"/>
+                </a:solidFill>
+                <a:latin typeface="Consolas"/>
+              </a:rPr>
+              <a:t>}</a:t>
+            </a:r>
+          </a:p>
+          <a:p>
+            <a:pPr>
+              <a:lnSpc>
+                <a:spcPts val="1860"/>
+              </a:lnSpc>
+            </a:pPr>
+            <a:r>
+              <a:rPr sz="1400" b="0" i="0">
+                <a:solidFill>
+                  <a:srgbClr val="D4D4D4"/>
+                </a:solidFill>
+                <a:latin typeface="Consolas"/>
+              </a:rPr>
+              <a:t> </a:t>
+            </a:r>
+          </a:p>
+          <a:p>
+            <a:pPr>
+              <a:lnSpc>
+                <a:spcPts val="1860"/>
+              </a:lnSpc>
+            </a:pPr>
+            <a:r>
+              <a:rPr sz="1400" b="0" i="0">
+                <a:solidFill>
+                  <a:srgbClr val="569CD6"/>
+                </a:solidFill>
+                <a:latin typeface="Consolas"/>
+              </a:rPr>
+              <a:t>int</a:t>
+            </a:r>
+            <a:r>
+              <a:rPr sz="1400" b="0" i="0">
+                <a:solidFill>
+                  <a:srgbClr val="D4D4D4"/>
+                </a:solidFill>
+                <a:latin typeface="Consolas"/>
+              </a:rPr>
+              <a:t> </a:t>
+            </a:r>
+            <a:r>
+              <a:rPr sz="1400" b="0" i="0">
+                <a:solidFill>
+                  <a:srgbClr val="DCDCAA"/>
+                </a:solidFill>
+                <a:latin typeface="Consolas"/>
+              </a:rPr>
+              <a:t>main</a:t>
+            </a:r>
+            <a:r>
+              <a:rPr sz="1400" b="0" i="0">
+                <a:solidFill>
+                  <a:srgbClr val="D4D4D4"/>
+                </a:solidFill>
+                <a:latin typeface="Consolas"/>
+              </a:rPr>
+              <a:t>()</a:t>
+            </a:r>
+            <a:r>
+              <a:rPr sz="1400" b="0" i="0">
+                <a:solidFill>
+                  <a:srgbClr val="D4D4D4"/>
+                </a:solidFill>
+                <a:latin typeface="Consolas"/>
+              </a:rPr>
+              <a:t> </a:t>
+            </a:r>
+            <a:r>
+              <a:rPr sz="1400" b="0" i="0">
+                <a:solidFill>
+                  <a:srgbClr val="D4D4D4"/>
+                </a:solidFill>
+                <a:latin typeface="Consolas"/>
+              </a:rPr>
+              <a:t>{</a:t>
+            </a:r>
+          </a:p>
+          <a:p>
+            <a:pPr>
+              <a:lnSpc>
+                <a:spcPts val="1860"/>
+              </a:lnSpc>
+            </a:pPr>
+            <a:r>
+              <a:rPr sz="1400" b="0" i="0">
+                <a:solidFill>
+                  <a:srgbClr val="D4D4D4"/>
+                </a:solidFill>
+                <a:latin typeface="Consolas"/>
+              </a:rPr>
+              <a:t>    </a:t>
+            </a:r>
+            <a:r>
+              <a:rPr sz="1400" b="0" i="0">
+                <a:solidFill>
+                  <a:srgbClr val="DCDCAA"/>
+                </a:solidFill>
+                <a:latin typeface="Consolas"/>
+              </a:rPr>
+              <a:t>getLetterGrade</a:t>
+            </a:r>
+            <a:r>
+              <a:rPr sz="1400" b="0" i="0">
+                <a:solidFill>
+                  <a:srgbClr val="D4D4D4"/>
+                </a:solidFill>
+                <a:latin typeface="Consolas"/>
+              </a:rPr>
+              <a:t>(</a:t>
+            </a:r>
+            <a:r>
+              <a:rPr sz="1400" b="0" i="0">
+                <a:solidFill>
+                  <a:srgbClr val="B5CEA8"/>
+                </a:solidFill>
+                <a:latin typeface="Consolas"/>
+              </a:rPr>
+              <a:t>75</a:t>
+            </a:r>
+            <a:r>
+              <a:rPr sz="1400" b="0" i="0">
+                <a:solidFill>
+                  <a:srgbClr val="D4D4D4"/>
+                </a:solidFill>
+                <a:latin typeface="Consolas"/>
+              </a:rPr>
+              <a:t>);</a:t>
+            </a:r>
+          </a:p>
+          <a:p>
+            <a:pPr>
+              <a:lnSpc>
+                <a:spcPts val="1860"/>
+              </a:lnSpc>
+            </a:pPr>
+            <a:r>
+              <a:rPr sz="1400" b="0" i="0">
+                <a:solidFill>
+                  <a:srgbClr val="D4D4D4"/>
+                </a:solidFill>
+                <a:latin typeface="Consolas"/>
+              </a:rPr>
+              <a:t>    </a:t>
+            </a:r>
+            <a:r>
+              <a:rPr sz="1400" b="0" i="0">
+                <a:solidFill>
+                  <a:srgbClr val="DCDCAA"/>
+                </a:solidFill>
+                <a:latin typeface="Consolas"/>
+              </a:rPr>
+              <a:t>getLetterGrade</a:t>
+            </a:r>
+            <a:r>
+              <a:rPr sz="1400" b="0" i="0">
+                <a:solidFill>
+                  <a:srgbClr val="D4D4D4"/>
+                </a:solidFill>
+                <a:latin typeface="Consolas"/>
+              </a:rPr>
+              <a:t>(</a:t>
+            </a:r>
+            <a:r>
+              <a:rPr sz="1400" b="0" i="0">
+                <a:solidFill>
+                  <a:srgbClr val="B5CEA8"/>
+                </a:solidFill>
+                <a:latin typeface="Consolas"/>
+              </a:rPr>
+              <a:t>75</a:t>
+            </a:r>
+            <a:r>
+              <a:rPr sz="1400" b="0" i="0">
+                <a:solidFill>
+                  <a:srgbClr val="D4D4D4"/>
+                </a:solidFill>
+                <a:latin typeface="Consolas"/>
+              </a:rPr>
+              <a:t>,</a:t>
+            </a:r>
+            <a:r>
+              <a:rPr sz="1400" b="0" i="0">
+                <a:solidFill>
+                  <a:srgbClr val="D4D4D4"/>
+                </a:solidFill>
+                <a:latin typeface="Consolas"/>
+              </a:rPr>
+              <a:t> </a:t>
+            </a:r>
+            <a:r>
+              <a:rPr sz="1400" b="0" i="0">
+                <a:solidFill>
+                  <a:srgbClr val="B5CEA8"/>
+                </a:solidFill>
+                <a:latin typeface="Consolas"/>
+              </a:rPr>
+              <a:t>5.0</a:t>
+            </a:r>
+            <a:r>
+              <a:rPr sz="1400" b="0" i="0">
+                <a:solidFill>
+                  <a:srgbClr val="D4D4D4"/>
+                </a:solidFill>
+                <a:latin typeface="Consolas"/>
+              </a:rPr>
+              <a:t>);</a:t>
+            </a:r>
+          </a:p>
+          <a:p>
+            <a:pPr>
+              <a:lnSpc>
+                <a:spcPts val="1860"/>
+              </a:lnSpc>
+            </a:pPr>
+            <a:r>
+              <a:rPr sz="1400" b="0" i="0">
+                <a:solidFill>
+                  <a:srgbClr val="D4D4D4"/>
+                </a:solidFill>
+                <a:latin typeface="Consolas"/>
+              </a:rPr>
+              <a:t>    </a:t>
+            </a:r>
+            <a:r>
+              <a:rPr sz="1400" b="0" i="0">
+                <a:solidFill>
+                  <a:srgbClr val="569CD6"/>
+                </a:solidFill>
+                <a:latin typeface="Consolas"/>
+              </a:rPr>
+              <a:t>return</a:t>
+            </a:r>
+            <a:r>
+              <a:rPr sz="1400" b="0" i="0">
+                <a:solidFill>
+                  <a:srgbClr val="D4D4D4"/>
+                </a:solidFill>
+                <a:latin typeface="Consolas"/>
+              </a:rPr>
+              <a:t> </a:t>
+            </a:r>
+            <a:r>
+              <a:rPr sz="1400" b="0" i="0">
+                <a:solidFill>
+                  <a:srgbClr val="B5CEA8"/>
+                </a:solidFill>
+                <a:latin typeface="Consolas"/>
+              </a:rPr>
+              <a:t>0</a:t>
+            </a:r>
+            <a:r>
+              <a:rPr sz="1400" b="0" i="0">
+                <a:solidFill>
+                  <a:srgbClr val="D4D4D4"/>
+                </a:solidFill>
+                <a:latin typeface="Consolas"/>
+              </a:rPr>
+              <a:t>;</a:t>
+            </a:r>
+          </a:p>
+          <a:p>
+            <a:pPr>
+              <a:lnSpc>
+                <a:spcPts val="1860"/>
+              </a:lnSpc>
+            </a:pPr>
+            <a:r>
+              <a:rPr sz="1400" b="0" i="0">
+                <a:solidFill>
+                  <a:srgbClr val="D4D4D4"/>
+                </a:solidFill>
+                <a:latin typeface="Consolas"/>
+              </a:rPr>
+              <a:t>}</a:t>
+            </a:r>
+          </a:p>
+        </p:txBody>
+      </p:sp>
+      <p:sp>
+        <p:nvSpPr>
+          <p:cNvPr id="12" name="TextBox 11"/>
           <p:cNvSpPr txBox="1"/>
           <p:nvPr/>
         </p:nvSpPr>
         <p:spPr>
           <a:xfrm>
-            <a:off x="7726679" y="2240280"/>
-            <a:ext cx="3474720" cy="2377440"/>
+            <a:off x="7635240" y="1645920"/>
+            <a:ext cx="3977639" cy="4206240"/>
           </a:xfrm>
           <a:prstGeom prst="rect">
             <a:avLst/>
@@ -3812,26 +4703,82 @@
           </a:bodyPr>
           <a:lstStyle/>
           <a:p>
-            <a:pPr>
+            <a:pPr marL="177800" indent="-177800">
               <a:spcAft>
-                <a:spcPts val="1000"/>
+                <a:spcPts val="1200"/>
               </a:spcAft>
+              <a:buSzPct val="100000"/>
+              <a:buChar char="•"/>
             </a:pPr>
             <a:r>
               <a:rPr sz="1400" b="0" i="0">
                 <a:solidFill>
-                  <a:srgbClr val="F2F2F2"/>
+                  <a:srgbClr val="1E1E2E"/>
                 </a:solidFill>
                 <a:latin typeface="Calibri"/>
               </a:rPr>
-              <a:t>If a function needs data, pass it in as a parameter. Reach for a global only when truly necessary.</a:t>
-            </a:r>
-          </a:p>
-        </p:txBody>
-      </p:sp>
-      <p:sp>
-        <p:nvSpPr>
-          <p:cNvPr id="9" name="TextBox 8"/>
+              <a:t>curve = 0.0 is the DEFAULT — used only when the caller omits it.</a:t>
+            </a:r>
+          </a:p>
+          <a:p>
+            <a:pPr marL="177800" indent="-177800">
+              <a:spcAft>
+                <a:spcPts val="1200"/>
+              </a:spcAft>
+              <a:buSzPct val="100000"/>
+              <a:buChar char="•"/>
+            </a:pPr>
+            <a:r>
+              <a:rPr sz="1400" b="0" i="0">
+                <a:solidFill>
+                  <a:srgbClr val="1E1E2E"/>
+                </a:solidFill>
+                <a:latin typeface="Calibri"/>
+              </a:rPr>
+              <a:t>getLetterGrade(75) runs with curve automatically set to 0.0.</a:t>
+            </a:r>
+          </a:p>
+          <a:p>
+            <a:pPr marL="177800" indent="-177800">
+              <a:spcAft>
+                <a:spcPts val="1200"/>
+              </a:spcAft>
+              <a:buSzPct val="100000"/>
+              <a:buChar char="•"/>
+            </a:pPr>
+            <a:r>
+              <a:rPr sz="1400" b="0" i="0">
+                <a:solidFill>
+                  <a:srgbClr val="1E1E2E"/>
+                </a:solidFill>
+                <a:latin typeface="Calibri"/>
+              </a:rPr>
+              <a:t>getLetterGrade(75, 5.0) overrides the default with a 5-point curve.</a:t>
+            </a:r>
+          </a:p>
+          <a:p>
+            <a:pPr marL="177800" indent="-177800">
+              <a:spcAft>
+                <a:spcPts val="1200"/>
+              </a:spcAft>
+              <a:buSzPct val="100000"/>
+              <a:buChar char="•"/>
+            </a:pPr>
+            <a:r>
+              <a:rPr sz="1400" b="0" i="0">
+                <a:solidFill>
+                  <a:srgbClr val="1E1E2E"/>
+                </a:solidFill>
+                <a:latin typeface="Calibri"/>
+              </a:rPr>
+              <a:t>Default parameters must come after any required parameters in the list.</a:t>
+            </a:r>
+          </a:p>
+        </p:txBody>
+      </p:sp>
+      <p:sp>
+        <p:nvSpPr>
+          <p:cNvPr id="13" name="TextBox 12"/>
           <p:cNvSpPr txBox="1"/>
           <p:nvPr/>
         </p:nvSpPr>
@@ -3866,7 +4813,7 @@
       </p:sp>
       <p:sp>
         <p:nvSpPr>
-          <p:cNvPr id="10" name="TextBox 9"/>
+          <p:cNvPr id="14" name="TextBox 13"/>
           <p:cNvSpPr txBox="1"/>
           <p:nvPr/>
         </p:nvSpPr>
@@ -3980,20 +4927,203 @@
       </p:sp>
       <p:sp>
         <p:nvSpPr>
-          <p:cNvPr id="3" name="Rounded Rectangle 2"/>
+          <p:cNvPr id="3" name="TextBox 2"/>
+          <p:cNvSpPr txBox="1"/>
+          <p:nvPr/>
+        </p:nvSpPr>
+        <p:spPr>
+          <a:xfrm>
+            <a:off x="548640" y="365760"/>
+            <a:ext cx="7315200" cy="320040"/>
+          </a:xfrm>
+          <a:prstGeom prst="rect">
+            <a:avLst/>
+          </a:prstGeom>
+          <a:noFill/>
+        </p:spPr>
+        <p:txBody>
+          <a:bodyPr wrap="square" anchor="t" lIns="0" rIns="0" tIns="0" bIns="0">
+            <a:spAutoFit/>
+          </a:bodyPr>
+          <a:lstStyle/>
+          <a:p>
+            <a:pPr algn="l"/>
+            <a:r>
+              <a:rPr sz="1300" b="1" i="0">
+                <a:solidFill>
+                  <a:srgbClr val="0E7C7B"/>
+                </a:solidFill>
+                <a:latin typeface="Calibri"/>
+              </a:rPr>
+              <a:t>WHERE VARIABLES LIVE</a:t>
+            </a:r>
+          </a:p>
+        </p:txBody>
+      </p:sp>
+      <p:sp>
+        <p:nvSpPr>
+          <p:cNvPr id="4" name="TextBox 3"/>
+          <p:cNvSpPr txBox="1"/>
+          <p:nvPr/>
+        </p:nvSpPr>
+        <p:spPr>
+          <a:xfrm>
+            <a:off x="548640" y="658368"/>
+            <a:ext cx="10789920" cy="822960"/>
+          </a:xfrm>
+          <a:prstGeom prst="rect">
+            <a:avLst/>
+          </a:prstGeom>
+          <a:noFill/>
+        </p:spPr>
+        <p:txBody>
+          <a:bodyPr wrap="square" anchor="t" lIns="0" rIns="0" tIns="0" bIns="0">
+            <a:spAutoFit/>
+          </a:bodyPr>
+          <a:lstStyle/>
+          <a:p>
+            <a:pPr algn="l"/>
+            <a:r>
+              <a:rPr sz="3200" b="1" i="0">
+                <a:solidFill>
+                  <a:srgbClr val="1E1E2E"/>
+                </a:solidFill>
+                <a:latin typeface="Consolas"/>
+              </a:rPr>
+              <a:t>Variable Scope: Local vs. Global</a:t>
+            </a:r>
+          </a:p>
+        </p:txBody>
+      </p:sp>
+      <p:sp>
+        <p:nvSpPr>
+          <p:cNvPr id="5" name="TextBox 4"/>
+          <p:cNvSpPr txBox="1"/>
+          <p:nvPr/>
+        </p:nvSpPr>
+        <p:spPr>
+          <a:xfrm>
+            <a:off x="548640" y="1691640"/>
+            <a:ext cx="6583680" cy="4480560"/>
+          </a:xfrm>
+          <a:prstGeom prst="rect">
+            <a:avLst/>
+          </a:prstGeom>
+          <a:noFill/>
+        </p:spPr>
+        <p:txBody>
+          <a:bodyPr wrap="square" anchor="t" lIns="0" rIns="0" tIns="0" bIns="0">
+            <a:spAutoFit/>
+          </a:bodyPr>
+          <a:lstStyle/>
+          <a:p>
+            <a:pPr marL="228600" indent="-228600">
+              <a:spcAft>
+                <a:spcPts val="1400"/>
+              </a:spcAft>
+              <a:buSzPct val="100000"/>
+              <a:buChar char="•"/>
+            </a:pPr>
+            <a:r>
+              <a:rPr sz="1700" b="0" i="0">
+                <a:solidFill>
+                  <a:srgbClr val="1E1E2E"/>
+                </a:solidFill>
+                <a:latin typeface="Calibri"/>
+              </a:rPr>
+              <a:t>Local variables live inside the function (or block) where they're declared.</a:t>
+            </a:r>
+          </a:p>
+          <a:p>
+            <a:pPr marL="228600" indent="-228600">
+              <a:spcAft>
+                <a:spcPts val="1400"/>
+              </a:spcAft>
+              <a:buSzPct val="100000"/>
+              <a:buChar char="•"/>
+            </a:pPr>
+            <a:r>
+              <a:rPr sz="1700" b="0" i="0">
+                <a:solidFill>
+                  <a:srgbClr val="1E1E2E"/>
+                </a:solidFill>
+                <a:latin typeface="Calibri"/>
+              </a:rPr>
+              <a:t>Two different functions can each safely use a variable named total.</a:t>
+            </a:r>
+          </a:p>
+          <a:p>
+            <a:pPr marL="228600" indent="-228600">
+              <a:spcAft>
+                <a:spcPts val="1400"/>
+              </a:spcAft>
+              <a:buSzPct val="100000"/>
+              <a:buChar char="•"/>
+            </a:pPr>
+            <a:r>
+              <a:rPr sz="1700" b="0" i="0">
+                <a:solidFill>
+                  <a:srgbClr val="1E1E2E"/>
+                </a:solidFill>
+                <a:latin typeface="Calibri"/>
+              </a:rPr>
+              <a:t>Global variables are declared outside every function — visible everywhere.</a:t>
+            </a:r>
+          </a:p>
+          <a:p>
+            <a:pPr marL="228600" indent="-228600">
+              <a:spcAft>
+                <a:spcPts val="1400"/>
+              </a:spcAft>
+              <a:buSzPct val="100000"/>
+              <a:buChar char="•"/>
+            </a:pPr>
+            <a:r>
+              <a:rPr sz="1700" b="0" i="0">
+                <a:solidFill>
+                  <a:srgbClr val="1E1E2E"/>
+                </a:solidFill>
+                <a:latin typeface="Calibri"/>
+              </a:rPr>
+              <a:t>Globals make bugs harder to trace since any function could change them.</a:t>
+            </a:r>
+          </a:p>
+          <a:p>
+            <a:pPr marL="228600" indent="-228600">
+              <a:spcAft>
+                <a:spcPts val="1400"/>
+              </a:spcAft>
+              <a:buSzPct val="100000"/>
+              <a:buChar char="•"/>
+            </a:pPr>
+            <a:r>
+              <a:rPr sz="1700" b="0" i="0">
+                <a:solidFill>
+                  <a:srgbClr val="1E1E2E"/>
+                </a:solidFill>
+                <a:latin typeface="Calibri"/>
+              </a:rPr>
+              <a:t>Prefer locals: pass data in as parameters, hand results back with return.</a:t>
+            </a:r>
+          </a:p>
+        </p:txBody>
+      </p:sp>
+      <p:sp>
+        <p:nvSpPr>
+          <p:cNvPr id="6" name="Rectangle 5"/>
           <p:cNvSpPr/>
           <p:nvPr/>
         </p:nvSpPr>
         <p:spPr>
           <a:xfrm>
-            <a:off x="548640" y="365760"/>
-            <a:ext cx="2834640" cy="365760"/>
-          </a:xfrm>
-          <a:prstGeom prst="roundRect">
+            <a:off x="7452360" y="1691640"/>
+            <a:ext cx="3977639" cy="2926080"/>
+          </a:xfrm>
+          <a:prstGeom prst="rect">
             <a:avLst/>
           </a:prstGeom>
           <a:solidFill>
-            <a:srgbClr val="F0A500"/>
+            <a:srgbClr val="1E1E2E"/>
           </a:solidFill>
           <a:ln>
             <a:noFill/>
@@ -4015,32 +5145,23 @@
           </a:fontRef>
         </p:style>
         <p:txBody>
-          <a:bodyPr rtlCol="0" anchor="ctr" rIns="0" tIns="0" bIns="0"/>
+          <a:bodyPr rtlCol="0" anchor="ctr"/>
           <a:lstStyle/>
           <a:p>
             <a:pPr algn="ctr"/>
-            <a:r>
-              <a:rPr sz="1300" b="1" i="0">
-                <a:solidFill>
-                  <a:srgbClr val="1E1E2E"/>
-                </a:solidFill>
-                <a:latin typeface="Calibri"/>
-              </a:rPr>
-              <a:t>PROJECT BUILD</a:t>
-            </a:r>
-          </a:p>
-        </p:txBody>
-      </p:sp>
-      <p:sp>
-        <p:nvSpPr>
-          <p:cNvPr id="4" name="TextBox 3"/>
+          </a:p>
+        </p:txBody>
+      </p:sp>
+      <p:sp>
+        <p:nvSpPr>
+          <p:cNvPr id="7" name="TextBox 6"/>
           <p:cNvSpPr txBox="1"/>
           <p:nvPr/>
         </p:nvSpPr>
         <p:spPr>
           <a:xfrm>
-            <a:off x="548640" y="868680"/>
-            <a:ext cx="10789920" cy="822960"/>
+            <a:off x="7726679" y="1874519"/>
+            <a:ext cx="3474720" cy="320040"/>
           </a:xfrm>
           <a:prstGeom prst="rect">
             <a:avLst/>
@@ -4055,282 +5176,27 @@
           <a:p>
             <a:pPr algn="l"/>
             <a:r>
-              <a:rPr sz="3200" b="1" i="0">
-                <a:solidFill>
-                  <a:srgbClr val="1E1E2E"/>
-                </a:solidFill>
-                <a:latin typeface="Consolas"/>
-              </a:rPr>
-              <a:t>Project Build: Refactoring main() Into Functions</a:t>
-            </a:r>
-          </a:p>
-        </p:txBody>
-      </p:sp>
-      <p:sp>
-        <p:nvSpPr>
-          <p:cNvPr id="5" name="Rectangle 4"/>
-          <p:cNvSpPr/>
-          <p:nvPr/>
-        </p:nvSpPr>
-        <p:spPr>
-          <a:xfrm>
-            <a:off x="548640" y="1783080"/>
-            <a:ext cx="6858000" cy="3583533"/>
-          </a:xfrm>
-          <a:prstGeom prst="rect">
-            <a:avLst/>
-          </a:prstGeom>
-          <a:solidFill>
-            <a:srgbClr val="1E1E1E"/>
-          </a:solidFill>
-          <a:ln>
-            <a:noFill/>
-          </a:ln>
-          <a:effectLst/>
-        </p:spPr>
-        <p:style>
-          <a:lnRef idx="1">
-            <a:schemeClr val="accent1"/>
-          </a:lnRef>
-          <a:fillRef idx="3">
-            <a:schemeClr val="accent1"/>
-          </a:fillRef>
-          <a:effectRef idx="2">
-            <a:schemeClr val="accent1"/>
-          </a:effectRef>
-          <a:fontRef idx="minor">
-            <a:schemeClr val="lt1"/>
-          </a:fontRef>
-        </p:style>
-        <p:txBody>
-          <a:bodyPr rtlCol="0" anchor="ctr"/>
-          <a:lstStyle/>
-          <a:p>
-            <a:pPr algn="ctr"/>
-          </a:p>
-        </p:txBody>
-      </p:sp>
-      <p:sp>
-        <p:nvSpPr>
-          <p:cNvPr id="6" name="Rectangle 5"/>
-          <p:cNvSpPr/>
-          <p:nvPr/>
-        </p:nvSpPr>
-        <p:spPr>
-          <a:xfrm>
-            <a:off x="548640" y="1783080"/>
-            <a:ext cx="6858000" cy="292608"/>
-          </a:xfrm>
-          <a:prstGeom prst="rect">
-            <a:avLst/>
-          </a:prstGeom>
-          <a:solidFill>
-            <a:srgbClr val="2D2D30"/>
-          </a:solidFill>
-          <a:ln>
-            <a:noFill/>
-          </a:ln>
-          <a:effectLst/>
-        </p:spPr>
-        <p:style>
-          <a:lnRef idx="1">
-            <a:schemeClr val="accent1"/>
-          </a:lnRef>
-          <a:fillRef idx="3">
-            <a:schemeClr val="accent1"/>
-          </a:fillRef>
-          <a:effectRef idx="2">
-            <a:schemeClr val="accent1"/>
-          </a:effectRef>
-          <a:fontRef idx="minor">
-            <a:schemeClr val="lt1"/>
-          </a:fontRef>
-        </p:style>
-        <p:txBody>
-          <a:bodyPr rtlCol="0" anchor="ctr"/>
-          <a:lstStyle/>
-          <a:p>
-            <a:pPr algn="ctr"/>
-          </a:p>
-        </p:txBody>
-      </p:sp>
-      <p:sp>
-        <p:nvSpPr>
-          <p:cNvPr id="7" name="Oval 6"/>
-          <p:cNvSpPr/>
-          <p:nvPr/>
-        </p:nvSpPr>
-        <p:spPr>
-          <a:xfrm>
-            <a:off x="713232" y="1874519"/>
-            <a:ext cx="109728" cy="109728"/>
-          </a:xfrm>
-          <a:prstGeom prst="ellipse">
-            <a:avLst/>
-          </a:prstGeom>
-          <a:solidFill>
-            <a:srgbClr val="FF5F56"/>
-          </a:solidFill>
-          <a:ln>
-            <a:noFill/>
-          </a:ln>
-          <a:effectLst/>
-        </p:spPr>
-        <p:style>
-          <a:lnRef idx="1">
-            <a:schemeClr val="accent1"/>
-          </a:lnRef>
-          <a:fillRef idx="3">
-            <a:schemeClr val="accent1"/>
-          </a:fillRef>
-          <a:effectRef idx="2">
-            <a:schemeClr val="accent1"/>
-          </a:effectRef>
-          <a:fontRef idx="minor">
-            <a:schemeClr val="lt1"/>
-          </a:fontRef>
-        </p:style>
-        <p:txBody>
-          <a:bodyPr rtlCol="0" anchor="ctr"/>
-          <a:lstStyle/>
-          <a:p>
-            <a:pPr algn="ctr"/>
-          </a:p>
-        </p:txBody>
-      </p:sp>
-      <p:sp>
-        <p:nvSpPr>
-          <p:cNvPr id="8" name="Oval 7"/>
-          <p:cNvSpPr/>
-          <p:nvPr/>
-        </p:nvSpPr>
-        <p:spPr>
-          <a:xfrm>
-            <a:off x="932688" y="1874519"/>
-            <a:ext cx="109728" cy="109728"/>
-          </a:xfrm>
-          <a:prstGeom prst="ellipse">
-            <a:avLst/>
-          </a:prstGeom>
-          <a:solidFill>
-            <a:srgbClr val="FFBD2E"/>
-          </a:solidFill>
-          <a:ln>
-            <a:noFill/>
-          </a:ln>
-          <a:effectLst/>
-        </p:spPr>
-        <p:style>
-          <a:lnRef idx="1">
-            <a:schemeClr val="accent1"/>
-          </a:lnRef>
-          <a:fillRef idx="3">
-            <a:schemeClr val="accent1"/>
-          </a:fillRef>
-          <a:effectRef idx="2">
-            <a:schemeClr val="accent1"/>
-          </a:effectRef>
-          <a:fontRef idx="minor">
-            <a:schemeClr val="lt1"/>
-          </a:fontRef>
-        </p:style>
-        <p:txBody>
-          <a:bodyPr rtlCol="0" anchor="ctr"/>
-          <a:lstStyle/>
-          <a:p>
-            <a:pPr algn="ctr"/>
-          </a:p>
-        </p:txBody>
-      </p:sp>
-      <p:sp>
-        <p:nvSpPr>
-          <p:cNvPr id="9" name="Oval 8"/>
-          <p:cNvSpPr/>
-          <p:nvPr/>
-        </p:nvSpPr>
-        <p:spPr>
-          <a:xfrm>
-            <a:off x="1152144" y="1874519"/>
-            <a:ext cx="109728" cy="109728"/>
-          </a:xfrm>
-          <a:prstGeom prst="ellipse">
-            <a:avLst/>
-          </a:prstGeom>
-          <a:solidFill>
-            <a:srgbClr val="27C93F"/>
-          </a:solidFill>
-          <a:ln>
-            <a:noFill/>
-          </a:ln>
-          <a:effectLst/>
-        </p:spPr>
-        <p:style>
-          <a:lnRef idx="1">
-            <a:schemeClr val="accent1"/>
-          </a:lnRef>
-          <a:fillRef idx="3">
-            <a:schemeClr val="accent1"/>
-          </a:fillRef>
-          <a:effectRef idx="2">
-            <a:schemeClr val="accent1"/>
-          </a:effectRef>
-          <a:fontRef idx="minor">
-            <a:schemeClr val="lt1"/>
-          </a:fontRef>
-        </p:style>
-        <p:txBody>
-          <a:bodyPr rtlCol="0" anchor="ctr"/>
-          <a:lstStyle/>
-          <a:p>
-            <a:pPr algn="ctr"/>
-          </a:p>
-        </p:txBody>
-      </p:sp>
-      <p:sp>
-        <p:nvSpPr>
-          <p:cNvPr id="10" name="TextBox 9"/>
+              <a:rPr sz="1300" b="1" i="0">
+                <a:solidFill>
+                  <a:srgbClr val="F0A500"/>
+                </a:solidFill>
+                <a:latin typeface="Calibri"/>
+              </a:rPr>
+              <a:t>Rule of Thumb</a:t>
+            </a:r>
+          </a:p>
+        </p:txBody>
+      </p:sp>
+      <p:sp>
+        <p:nvSpPr>
+          <p:cNvPr id="8" name="TextBox 7"/>
           <p:cNvSpPr txBox="1"/>
           <p:nvPr/>
         </p:nvSpPr>
         <p:spPr>
           <a:xfrm>
-            <a:off x="1371600" y="1783080"/>
-            <a:ext cx="5760720" cy="292608"/>
-          </a:xfrm>
-          <a:prstGeom prst="rect">
-            <a:avLst/>
-          </a:prstGeom>
-          <a:noFill/>
-        </p:spPr>
-        <p:txBody>
-          <a:bodyPr wrap="square" anchor="ctr" lIns="0" rIns="0" tIns="0" bIns="0">
-            <a:spAutoFit/>
-          </a:bodyPr>
-          <a:lstStyle/>
-          <a:p>
-            <a:pPr algn="l"/>
-            <a:r>
-              <a:rPr sz="1100" b="0" i="0">
-                <a:solidFill>
-                  <a:srgbClr val="9B9BA3"/>
-                </a:solidFill>
-                <a:latin typeface="Consolas"/>
-              </a:rPr>
-              <a:t>main.cpp</a:t>
-            </a:r>
-          </a:p>
-        </p:txBody>
-      </p:sp>
-      <p:sp>
-        <p:nvSpPr>
-          <p:cNvPr id="11" name="TextBox 10"/>
-          <p:cNvSpPr txBox="1"/>
-          <p:nvPr/>
-        </p:nvSpPr>
-        <p:spPr>
-          <a:xfrm>
-            <a:off x="822959" y="2167128"/>
-            <a:ext cx="6309360" cy="3336645"/>
+            <a:off x="7726679" y="2240280"/>
+            <a:ext cx="3474720" cy="2377440"/>
           </a:xfrm>
           <a:prstGeom prst="rect">
             <a:avLst/>
@@ -4344,1827 +5210,32 @@
           <a:lstStyle/>
           <a:p>
             <a:pPr>
-              <a:lnSpc>
-                <a:spcPts val="1360"/>
-              </a:lnSpc>
+              <a:spcAft>
+                <a:spcPts val="1000"/>
+              </a:spcAft>
             </a:pPr>
             <a:r>
-              <a:rPr sz="900" b="0" i="0">
-                <a:solidFill>
-                  <a:srgbClr val="569CD6"/>
-                </a:solidFill>
-                <a:latin typeface="Consolas"/>
-              </a:rPr>
-              <a:t>double</a:t>
-            </a:r>
-            <a:r>
-              <a:rPr sz="900" b="0" i="0">
-                <a:solidFill>
-                  <a:srgbClr val="D4D4D4"/>
-                </a:solidFill>
-                <a:latin typeface="Consolas"/>
-              </a:rPr>
-              <a:t> </a:t>
-            </a:r>
-            <a:r>
-              <a:rPr sz="900" b="0" i="0">
-                <a:solidFill>
-                  <a:srgbClr val="DCDCAA"/>
-                </a:solidFill>
-                <a:latin typeface="Consolas"/>
-              </a:rPr>
-              <a:t>calculateAverage</a:t>
-            </a:r>
-            <a:r>
-              <a:rPr sz="900" b="0" i="0">
-                <a:solidFill>
-                  <a:srgbClr val="D4D4D4"/>
-                </a:solidFill>
-                <a:latin typeface="Consolas"/>
-              </a:rPr>
-              <a:t>(</a:t>
-            </a:r>
-            <a:r>
-              <a:rPr sz="900" b="0" i="0">
-                <a:solidFill>
-                  <a:srgbClr val="569CD6"/>
-                </a:solidFill>
-                <a:latin typeface="Consolas"/>
-              </a:rPr>
-              <a:t>double</a:t>
-            </a:r>
-            <a:r>
-              <a:rPr sz="900" b="0" i="0">
-                <a:solidFill>
-                  <a:srgbClr val="D4D4D4"/>
-                </a:solidFill>
-                <a:latin typeface="Consolas"/>
-              </a:rPr>
-              <a:t> </a:t>
-            </a:r>
-            <a:r>
-              <a:rPr sz="900" b="0" i="0">
-                <a:solidFill>
-                  <a:srgbClr val="D4D4D4"/>
-                </a:solidFill>
-                <a:latin typeface="Consolas"/>
-              </a:rPr>
-              <a:t>grades</a:t>
-            </a:r>
-            <a:r>
-              <a:rPr sz="900" b="0" i="0">
-                <a:solidFill>
-                  <a:srgbClr val="D4D4D4"/>
-                </a:solidFill>
-                <a:latin typeface="Consolas"/>
-              </a:rPr>
-              <a:t>[],</a:t>
-            </a:r>
-            <a:r>
-              <a:rPr sz="900" b="0" i="0">
-                <a:solidFill>
-                  <a:srgbClr val="D4D4D4"/>
-                </a:solidFill>
-                <a:latin typeface="Consolas"/>
-              </a:rPr>
-              <a:t> </a:t>
-            </a:r>
-            <a:r>
-              <a:rPr sz="900" b="0" i="0">
-                <a:solidFill>
-                  <a:srgbClr val="569CD6"/>
-                </a:solidFill>
-                <a:latin typeface="Consolas"/>
-              </a:rPr>
-              <a:t>int</a:t>
-            </a:r>
-            <a:r>
-              <a:rPr sz="900" b="0" i="0">
-                <a:solidFill>
-                  <a:srgbClr val="D4D4D4"/>
-                </a:solidFill>
-                <a:latin typeface="Consolas"/>
-              </a:rPr>
-              <a:t> </a:t>
-            </a:r>
-            <a:r>
-              <a:rPr sz="900" b="0" i="0">
-                <a:solidFill>
-                  <a:srgbClr val="D4D4D4"/>
-                </a:solidFill>
-                <a:latin typeface="Consolas"/>
-              </a:rPr>
-              <a:t>n</a:t>
-            </a:r>
-            <a:r>
-              <a:rPr sz="900" b="0" i="0">
-                <a:solidFill>
-                  <a:srgbClr val="D4D4D4"/>
-                </a:solidFill>
-                <a:latin typeface="Consolas"/>
-              </a:rPr>
-              <a:t>)</a:t>
-            </a:r>
-            <a:r>
-              <a:rPr sz="900" b="0" i="0">
-                <a:solidFill>
-                  <a:srgbClr val="D4D4D4"/>
-                </a:solidFill>
-                <a:latin typeface="Consolas"/>
-              </a:rPr>
-              <a:t> </a:t>
-            </a:r>
-            <a:r>
-              <a:rPr sz="900" b="0" i="0">
-                <a:solidFill>
-                  <a:srgbClr val="D4D4D4"/>
-                </a:solidFill>
-                <a:latin typeface="Consolas"/>
-              </a:rPr>
-              <a:t>{</a:t>
-            </a:r>
-          </a:p>
-          <a:p>
-            <a:pPr>
-              <a:lnSpc>
-                <a:spcPts val="1360"/>
-              </a:lnSpc>
-            </a:pPr>
-            <a:r>
-              <a:rPr sz="900" b="0" i="0">
-                <a:solidFill>
-                  <a:srgbClr val="D4D4D4"/>
-                </a:solidFill>
-                <a:latin typeface="Consolas"/>
-              </a:rPr>
-              <a:t>    </a:t>
-            </a:r>
-            <a:r>
-              <a:rPr sz="900" b="0" i="0">
-                <a:solidFill>
-                  <a:srgbClr val="569CD6"/>
-                </a:solidFill>
-                <a:latin typeface="Consolas"/>
-              </a:rPr>
-              <a:t>double</a:t>
-            </a:r>
-            <a:r>
-              <a:rPr sz="900" b="0" i="0">
-                <a:solidFill>
-                  <a:srgbClr val="D4D4D4"/>
-                </a:solidFill>
-                <a:latin typeface="Consolas"/>
-              </a:rPr>
-              <a:t> </a:t>
-            </a:r>
-            <a:r>
-              <a:rPr sz="900" b="0" i="0">
-                <a:solidFill>
-                  <a:srgbClr val="D4D4D4"/>
-                </a:solidFill>
-                <a:latin typeface="Consolas"/>
-              </a:rPr>
-              <a:t>sum</a:t>
-            </a:r>
-            <a:r>
-              <a:rPr sz="900" b="0" i="0">
-                <a:solidFill>
-                  <a:srgbClr val="D4D4D4"/>
-                </a:solidFill>
-                <a:latin typeface="Consolas"/>
-              </a:rPr>
-              <a:t> </a:t>
-            </a:r>
-            <a:r>
-              <a:rPr sz="900" b="0" i="0">
-                <a:solidFill>
-                  <a:srgbClr val="D4D4D4"/>
-                </a:solidFill>
-                <a:latin typeface="Consolas"/>
-              </a:rPr>
-              <a:t>=</a:t>
-            </a:r>
-            <a:r>
-              <a:rPr sz="900" b="0" i="0">
-                <a:solidFill>
-                  <a:srgbClr val="D4D4D4"/>
-                </a:solidFill>
-                <a:latin typeface="Consolas"/>
-              </a:rPr>
-              <a:t> </a:t>
-            </a:r>
-            <a:r>
-              <a:rPr sz="900" b="0" i="0">
-                <a:solidFill>
-                  <a:srgbClr val="B5CEA8"/>
-                </a:solidFill>
-                <a:latin typeface="Consolas"/>
-              </a:rPr>
-              <a:t>0</a:t>
-            </a:r>
-            <a:r>
-              <a:rPr sz="900" b="0" i="0">
-                <a:solidFill>
-                  <a:srgbClr val="D4D4D4"/>
-                </a:solidFill>
-                <a:latin typeface="Consolas"/>
-              </a:rPr>
-              <a:t>;</a:t>
-            </a:r>
-          </a:p>
-          <a:p>
-            <a:pPr>
-              <a:lnSpc>
-                <a:spcPts val="1360"/>
-              </a:lnSpc>
-            </a:pPr>
-            <a:r>
-              <a:rPr sz="900" b="0" i="0">
-                <a:solidFill>
-                  <a:srgbClr val="D4D4D4"/>
-                </a:solidFill>
-                <a:latin typeface="Consolas"/>
-              </a:rPr>
-              <a:t>    </a:t>
-            </a:r>
-            <a:r>
-              <a:rPr sz="900" b="0" i="0">
-                <a:solidFill>
-                  <a:srgbClr val="569CD6"/>
-                </a:solidFill>
-                <a:latin typeface="Consolas"/>
-              </a:rPr>
-              <a:t>for</a:t>
-            </a:r>
-            <a:r>
-              <a:rPr sz="900" b="0" i="0">
-                <a:solidFill>
-                  <a:srgbClr val="D4D4D4"/>
-                </a:solidFill>
-                <a:latin typeface="Consolas"/>
-              </a:rPr>
-              <a:t> </a:t>
-            </a:r>
-            <a:r>
-              <a:rPr sz="900" b="0" i="0">
-                <a:solidFill>
-                  <a:srgbClr val="D4D4D4"/>
-                </a:solidFill>
-                <a:latin typeface="Consolas"/>
-              </a:rPr>
-              <a:t>(</a:t>
-            </a:r>
-            <a:r>
-              <a:rPr sz="900" b="0" i="0">
-                <a:solidFill>
-                  <a:srgbClr val="569CD6"/>
-                </a:solidFill>
-                <a:latin typeface="Consolas"/>
-              </a:rPr>
-              <a:t>int</a:t>
-            </a:r>
-            <a:r>
-              <a:rPr sz="900" b="0" i="0">
-                <a:solidFill>
-                  <a:srgbClr val="D4D4D4"/>
-                </a:solidFill>
-                <a:latin typeface="Consolas"/>
-              </a:rPr>
-              <a:t> </a:t>
-            </a:r>
-            <a:r>
-              <a:rPr sz="900" b="0" i="0">
-                <a:solidFill>
-                  <a:srgbClr val="D4D4D4"/>
-                </a:solidFill>
-                <a:latin typeface="Consolas"/>
-              </a:rPr>
-              <a:t>i</a:t>
-            </a:r>
-            <a:r>
-              <a:rPr sz="900" b="0" i="0">
-                <a:solidFill>
-                  <a:srgbClr val="D4D4D4"/>
-                </a:solidFill>
-                <a:latin typeface="Consolas"/>
-              </a:rPr>
-              <a:t> </a:t>
-            </a:r>
-            <a:r>
-              <a:rPr sz="900" b="0" i="0">
-                <a:solidFill>
-                  <a:srgbClr val="D4D4D4"/>
-                </a:solidFill>
-                <a:latin typeface="Consolas"/>
-              </a:rPr>
-              <a:t>=</a:t>
-            </a:r>
-            <a:r>
-              <a:rPr sz="900" b="0" i="0">
-                <a:solidFill>
-                  <a:srgbClr val="D4D4D4"/>
-                </a:solidFill>
-                <a:latin typeface="Consolas"/>
-              </a:rPr>
-              <a:t> </a:t>
-            </a:r>
-            <a:r>
-              <a:rPr sz="900" b="0" i="0">
-                <a:solidFill>
-                  <a:srgbClr val="B5CEA8"/>
-                </a:solidFill>
-                <a:latin typeface="Consolas"/>
-              </a:rPr>
-              <a:t>0</a:t>
-            </a:r>
-            <a:r>
-              <a:rPr sz="900" b="0" i="0">
-                <a:solidFill>
-                  <a:srgbClr val="D4D4D4"/>
-                </a:solidFill>
-                <a:latin typeface="Consolas"/>
-              </a:rPr>
-              <a:t>;</a:t>
-            </a:r>
-            <a:r>
-              <a:rPr sz="900" b="0" i="0">
-                <a:solidFill>
-                  <a:srgbClr val="D4D4D4"/>
-                </a:solidFill>
-                <a:latin typeface="Consolas"/>
-              </a:rPr>
-              <a:t> </a:t>
-            </a:r>
-            <a:r>
-              <a:rPr sz="900" b="0" i="0">
-                <a:solidFill>
-                  <a:srgbClr val="D4D4D4"/>
-                </a:solidFill>
-                <a:latin typeface="Consolas"/>
-              </a:rPr>
-              <a:t>i</a:t>
-            </a:r>
-            <a:r>
-              <a:rPr sz="900" b="0" i="0">
-                <a:solidFill>
-                  <a:srgbClr val="D4D4D4"/>
-                </a:solidFill>
-                <a:latin typeface="Consolas"/>
-              </a:rPr>
-              <a:t> </a:t>
-            </a:r>
-            <a:r>
-              <a:rPr sz="900" b="0" i="0">
-                <a:solidFill>
-                  <a:srgbClr val="D4D4D4"/>
-                </a:solidFill>
-                <a:latin typeface="Consolas"/>
-              </a:rPr>
-              <a:t>&lt;</a:t>
-            </a:r>
-            <a:r>
-              <a:rPr sz="900" b="0" i="0">
-                <a:solidFill>
-                  <a:srgbClr val="D4D4D4"/>
-                </a:solidFill>
-                <a:latin typeface="Consolas"/>
-              </a:rPr>
-              <a:t> </a:t>
-            </a:r>
-            <a:r>
-              <a:rPr sz="900" b="0" i="0">
-                <a:solidFill>
-                  <a:srgbClr val="D4D4D4"/>
-                </a:solidFill>
-                <a:latin typeface="Consolas"/>
-              </a:rPr>
-              <a:t>n</a:t>
-            </a:r>
-            <a:r>
-              <a:rPr sz="900" b="0" i="0">
-                <a:solidFill>
-                  <a:srgbClr val="D4D4D4"/>
-                </a:solidFill>
-                <a:latin typeface="Consolas"/>
-              </a:rPr>
-              <a:t>;</a:t>
-            </a:r>
-            <a:r>
-              <a:rPr sz="900" b="0" i="0">
-                <a:solidFill>
-                  <a:srgbClr val="D4D4D4"/>
-                </a:solidFill>
-                <a:latin typeface="Consolas"/>
-              </a:rPr>
-              <a:t> </a:t>
-            </a:r>
-            <a:r>
-              <a:rPr sz="900" b="0" i="0">
-                <a:solidFill>
-                  <a:srgbClr val="D4D4D4"/>
-                </a:solidFill>
-                <a:latin typeface="Consolas"/>
-              </a:rPr>
-              <a:t>i</a:t>
-            </a:r>
-            <a:r>
-              <a:rPr sz="900" b="0" i="0">
-                <a:solidFill>
-                  <a:srgbClr val="D4D4D4"/>
-                </a:solidFill>
-                <a:latin typeface="Consolas"/>
-              </a:rPr>
-              <a:t>++)</a:t>
-            </a:r>
-            <a:r>
-              <a:rPr sz="900" b="0" i="0">
-                <a:solidFill>
-                  <a:srgbClr val="D4D4D4"/>
-                </a:solidFill>
-                <a:latin typeface="Consolas"/>
-              </a:rPr>
-              <a:t> </a:t>
-            </a:r>
-            <a:r>
-              <a:rPr sz="900" b="0" i="0">
-                <a:solidFill>
-                  <a:srgbClr val="D4D4D4"/>
-                </a:solidFill>
-                <a:latin typeface="Consolas"/>
-              </a:rPr>
-              <a:t>sum</a:t>
-            </a:r>
-            <a:r>
-              <a:rPr sz="900" b="0" i="0">
-                <a:solidFill>
-                  <a:srgbClr val="D4D4D4"/>
-                </a:solidFill>
-                <a:latin typeface="Consolas"/>
-              </a:rPr>
-              <a:t> </a:t>
-            </a:r>
-            <a:r>
-              <a:rPr sz="900" b="0" i="0">
-                <a:solidFill>
-                  <a:srgbClr val="D4D4D4"/>
-                </a:solidFill>
-                <a:latin typeface="Consolas"/>
-              </a:rPr>
-              <a:t>+=</a:t>
-            </a:r>
-            <a:r>
-              <a:rPr sz="900" b="0" i="0">
-                <a:solidFill>
-                  <a:srgbClr val="D4D4D4"/>
-                </a:solidFill>
-                <a:latin typeface="Consolas"/>
-              </a:rPr>
-              <a:t> </a:t>
-            </a:r>
-            <a:r>
-              <a:rPr sz="900" b="0" i="0">
-                <a:solidFill>
-                  <a:srgbClr val="D4D4D4"/>
-                </a:solidFill>
-                <a:latin typeface="Consolas"/>
-              </a:rPr>
-              <a:t>grades</a:t>
-            </a:r>
-            <a:r>
-              <a:rPr sz="900" b="0" i="0">
-                <a:solidFill>
-                  <a:srgbClr val="D4D4D4"/>
-                </a:solidFill>
-                <a:latin typeface="Consolas"/>
-              </a:rPr>
-              <a:t>[</a:t>
-            </a:r>
-            <a:r>
-              <a:rPr sz="900" b="0" i="0">
-                <a:solidFill>
-                  <a:srgbClr val="D4D4D4"/>
-                </a:solidFill>
-                <a:latin typeface="Consolas"/>
-              </a:rPr>
-              <a:t>i</a:t>
-            </a:r>
-            <a:r>
-              <a:rPr sz="900" b="0" i="0">
-                <a:solidFill>
-                  <a:srgbClr val="D4D4D4"/>
-                </a:solidFill>
-                <a:latin typeface="Consolas"/>
-              </a:rPr>
-              <a:t>];</a:t>
-            </a:r>
-          </a:p>
-          <a:p>
-            <a:pPr>
-              <a:lnSpc>
-                <a:spcPts val="1360"/>
-              </a:lnSpc>
-            </a:pPr>
-            <a:r>
-              <a:rPr sz="900" b="0" i="0">
-                <a:solidFill>
-                  <a:srgbClr val="D4D4D4"/>
-                </a:solidFill>
-                <a:latin typeface="Consolas"/>
-              </a:rPr>
-              <a:t>    </a:t>
-            </a:r>
-            <a:r>
-              <a:rPr sz="900" b="0" i="0">
-                <a:solidFill>
-                  <a:srgbClr val="569CD6"/>
-                </a:solidFill>
-                <a:latin typeface="Consolas"/>
-              </a:rPr>
-              <a:t>return</a:t>
-            </a:r>
-            <a:r>
-              <a:rPr sz="900" b="0" i="0">
-                <a:solidFill>
-                  <a:srgbClr val="D4D4D4"/>
-                </a:solidFill>
-                <a:latin typeface="Consolas"/>
-              </a:rPr>
-              <a:t> </a:t>
-            </a:r>
-            <a:r>
-              <a:rPr sz="900" b="0" i="0">
-                <a:solidFill>
-                  <a:srgbClr val="D4D4D4"/>
-                </a:solidFill>
-                <a:latin typeface="Consolas"/>
-              </a:rPr>
-              <a:t>sum</a:t>
-            </a:r>
-            <a:r>
-              <a:rPr sz="900" b="0" i="0">
-                <a:solidFill>
-                  <a:srgbClr val="D4D4D4"/>
-                </a:solidFill>
-                <a:latin typeface="Consolas"/>
-              </a:rPr>
-              <a:t> </a:t>
-            </a:r>
-            <a:r>
-              <a:rPr sz="900" b="0" i="0">
-                <a:solidFill>
-                  <a:srgbClr val="D4D4D4"/>
-                </a:solidFill>
-                <a:latin typeface="Consolas"/>
-              </a:rPr>
-              <a:t>/</a:t>
-            </a:r>
-            <a:r>
-              <a:rPr sz="900" b="0" i="0">
-                <a:solidFill>
-                  <a:srgbClr val="D4D4D4"/>
-                </a:solidFill>
-                <a:latin typeface="Consolas"/>
-              </a:rPr>
-              <a:t> </a:t>
-            </a:r>
-            <a:r>
-              <a:rPr sz="900" b="0" i="0">
-                <a:solidFill>
-                  <a:srgbClr val="D4D4D4"/>
-                </a:solidFill>
-                <a:latin typeface="Consolas"/>
-              </a:rPr>
-              <a:t>n</a:t>
-            </a:r>
-            <a:r>
-              <a:rPr sz="900" b="0" i="0">
-                <a:solidFill>
-                  <a:srgbClr val="D4D4D4"/>
-                </a:solidFill>
-                <a:latin typeface="Consolas"/>
-              </a:rPr>
-              <a:t>;</a:t>
-            </a:r>
-          </a:p>
-          <a:p>
-            <a:pPr>
-              <a:lnSpc>
-                <a:spcPts val="1360"/>
-              </a:lnSpc>
-            </a:pPr>
-            <a:r>
-              <a:rPr sz="900" b="0" i="0">
-                <a:solidFill>
-                  <a:srgbClr val="D4D4D4"/>
-                </a:solidFill>
-                <a:latin typeface="Consolas"/>
-              </a:rPr>
-              <a:t>}</a:t>
-            </a:r>
-          </a:p>
-          <a:p>
-            <a:pPr>
-              <a:lnSpc>
-                <a:spcPts val="1360"/>
-              </a:lnSpc>
-            </a:pPr>
-            <a:r>
-              <a:rPr sz="900" b="0" i="0">
-                <a:solidFill>
-                  <a:srgbClr val="569CD6"/>
-                </a:solidFill>
-                <a:latin typeface="Consolas"/>
-              </a:rPr>
-              <a:t>char</a:t>
-            </a:r>
-            <a:r>
-              <a:rPr sz="900" b="0" i="0">
-                <a:solidFill>
-                  <a:srgbClr val="D4D4D4"/>
-                </a:solidFill>
-                <a:latin typeface="Consolas"/>
-              </a:rPr>
-              <a:t> </a:t>
-            </a:r>
-            <a:r>
-              <a:rPr sz="900" b="0" i="0">
-                <a:solidFill>
-                  <a:srgbClr val="DCDCAA"/>
-                </a:solidFill>
-                <a:latin typeface="Consolas"/>
-              </a:rPr>
-              <a:t>getLetterGrade</a:t>
-            </a:r>
-            <a:r>
-              <a:rPr sz="900" b="0" i="0">
-                <a:solidFill>
-                  <a:srgbClr val="D4D4D4"/>
-                </a:solidFill>
-                <a:latin typeface="Consolas"/>
-              </a:rPr>
-              <a:t>(</a:t>
-            </a:r>
-            <a:r>
-              <a:rPr sz="900" b="0" i="0">
-                <a:solidFill>
-                  <a:srgbClr val="569CD6"/>
-                </a:solidFill>
-                <a:latin typeface="Consolas"/>
-              </a:rPr>
-              <a:t>double</a:t>
-            </a:r>
-            <a:r>
-              <a:rPr sz="900" b="0" i="0">
-                <a:solidFill>
-                  <a:srgbClr val="D4D4D4"/>
-                </a:solidFill>
-                <a:latin typeface="Consolas"/>
-              </a:rPr>
-              <a:t> </a:t>
-            </a:r>
-            <a:r>
-              <a:rPr sz="900" b="0" i="0">
-                <a:solidFill>
-                  <a:srgbClr val="D4D4D4"/>
-                </a:solidFill>
-                <a:latin typeface="Consolas"/>
-              </a:rPr>
-              <a:t>avg</a:t>
-            </a:r>
-            <a:r>
-              <a:rPr sz="900" b="0" i="0">
-                <a:solidFill>
-                  <a:srgbClr val="D4D4D4"/>
-                </a:solidFill>
-                <a:latin typeface="Consolas"/>
-              </a:rPr>
-              <a:t>)</a:t>
-            </a:r>
-            <a:r>
-              <a:rPr sz="900" b="0" i="0">
-                <a:solidFill>
-                  <a:srgbClr val="D4D4D4"/>
-                </a:solidFill>
-                <a:latin typeface="Consolas"/>
-              </a:rPr>
-              <a:t> </a:t>
-            </a:r>
-            <a:r>
-              <a:rPr sz="900" b="0" i="0">
-                <a:solidFill>
-                  <a:srgbClr val="D4D4D4"/>
-                </a:solidFill>
-                <a:latin typeface="Consolas"/>
-              </a:rPr>
-              <a:t>{</a:t>
-            </a:r>
-          </a:p>
-          <a:p>
-            <a:pPr>
-              <a:lnSpc>
-                <a:spcPts val="1360"/>
-              </a:lnSpc>
-            </a:pPr>
-            <a:r>
-              <a:rPr sz="900" b="0" i="0">
-                <a:solidFill>
-                  <a:srgbClr val="D4D4D4"/>
-                </a:solidFill>
-                <a:latin typeface="Consolas"/>
-              </a:rPr>
-              <a:t>    </a:t>
-            </a:r>
-            <a:r>
-              <a:rPr sz="900" b="0" i="0">
-                <a:solidFill>
-                  <a:srgbClr val="569CD6"/>
-                </a:solidFill>
-                <a:latin typeface="Consolas"/>
-              </a:rPr>
-              <a:t>if</a:t>
-            </a:r>
-            <a:r>
-              <a:rPr sz="900" b="0" i="0">
-                <a:solidFill>
-                  <a:srgbClr val="D4D4D4"/>
-                </a:solidFill>
-                <a:latin typeface="Consolas"/>
-              </a:rPr>
-              <a:t> </a:t>
-            </a:r>
-            <a:r>
-              <a:rPr sz="900" b="0" i="0">
-                <a:solidFill>
-                  <a:srgbClr val="D4D4D4"/>
-                </a:solidFill>
-                <a:latin typeface="Consolas"/>
-              </a:rPr>
-              <a:t>(</a:t>
-            </a:r>
-            <a:r>
-              <a:rPr sz="900" b="0" i="0">
-                <a:solidFill>
-                  <a:srgbClr val="D4D4D4"/>
-                </a:solidFill>
-                <a:latin typeface="Consolas"/>
-              </a:rPr>
-              <a:t>avg</a:t>
-            </a:r>
-            <a:r>
-              <a:rPr sz="900" b="0" i="0">
-                <a:solidFill>
-                  <a:srgbClr val="D4D4D4"/>
-                </a:solidFill>
-                <a:latin typeface="Consolas"/>
-              </a:rPr>
-              <a:t> </a:t>
-            </a:r>
-            <a:r>
-              <a:rPr sz="900" b="0" i="0">
-                <a:solidFill>
-                  <a:srgbClr val="D4D4D4"/>
-                </a:solidFill>
-                <a:latin typeface="Consolas"/>
-              </a:rPr>
-              <a:t>&gt;=</a:t>
-            </a:r>
-            <a:r>
-              <a:rPr sz="900" b="0" i="0">
-                <a:solidFill>
-                  <a:srgbClr val="D4D4D4"/>
-                </a:solidFill>
-                <a:latin typeface="Consolas"/>
-              </a:rPr>
-              <a:t> </a:t>
-            </a:r>
-            <a:r>
-              <a:rPr sz="900" b="0" i="0">
-                <a:solidFill>
-                  <a:srgbClr val="B5CEA8"/>
-                </a:solidFill>
-                <a:latin typeface="Consolas"/>
-              </a:rPr>
-              <a:t>90</a:t>
-            </a:r>
-            <a:r>
-              <a:rPr sz="900" b="0" i="0">
-                <a:solidFill>
-                  <a:srgbClr val="D4D4D4"/>
-                </a:solidFill>
-                <a:latin typeface="Consolas"/>
-              </a:rPr>
-              <a:t>)</a:t>
-            </a:r>
-            <a:r>
-              <a:rPr sz="900" b="0" i="0">
-                <a:solidFill>
-                  <a:srgbClr val="D4D4D4"/>
-                </a:solidFill>
-                <a:latin typeface="Consolas"/>
-              </a:rPr>
-              <a:t> </a:t>
-            </a:r>
-            <a:r>
-              <a:rPr sz="900" b="0" i="0">
-                <a:solidFill>
-                  <a:srgbClr val="569CD6"/>
-                </a:solidFill>
-                <a:latin typeface="Consolas"/>
-              </a:rPr>
-              <a:t>return</a:t>
-            </a:r>
-            <a:r>
-              <a:rPr sz="900" b="0" i="0">
-                <a:solidFill>
-                  <a:srgbClr val="D4D4D4"/>
-                </a:solidFill>
-                <a:latin typeface="Consolas"/>
-              </a:rPr>
-              <a:t> </a:t>
-            </a:r>
-            <a:r>
-              <a:rPr sz="900" b="0" i="0">
-                <a:solidFill>
-                  <a:srgbClr val="CE9178"/>
-                </a:solidFill>
-                <a:latin typeface="Consolas"/>
-              </a:rPr>
-              <a:t>'A'</a:t>
-            </a:r>
-            <a:r>
-              <a:rPr sz="900" b="0" i="0">
-                <a:solidFill>
-                  <a:srgbClr val="D4D4D4"/>
-                </a:solidFill>
-                <a:latin typeface="Consolas"/>
-              </a:rPr>
-              <a:t>;</a:t>
-            </a:r>
-          </a:p>
-          <a:p>
-            <a:pPr>
-              <a:lnSpc>
-                <a:spcPts val="1360"/>
-              </a:lnSpc>
-            </a:pPr>
-            <a:r>
-              <a:rPr sz="900" b="0" i="0">
-                <a:solidFill>
-                  <a:srgbClr val="D4D4D4"/>
-                </a:solidFill>
-                <a:latin typeface="Consolas"/>
-              </a:rPr>
-              <a:t>    </a:t>
-            </a:r>
-            <a:r>
-              <a:rPr sz="900" b="0" i="0">
-                <a:solidFill>
-                  <a:srgbClr val="569CD6"/>
-                </a:solidFill>
-                <a:latin typeface="Consolas"/>
-              </a:rPr>
-              <a:t>if</a:t>
-            </a:r>
-            <a:r>
-              <a:rPr sz="900" b="0" i="0">
-                <a:solidFill>
-                  <a:srgbClr val="D4D4D4"/>
-                </a:solidFill>
-                <a:latin typeface="Consolas"/>
-              </a:rPr>
-              <a:t> </a:t>
-            </a:r>
-            <a:r>
-              <a:rPr sz="900" b="0" i="0">
-                <a:solidFill>
-                  <a:srgbClr val="D4D4D4"/>
-                </a:solidFill>
-                <a:latin typeface="Consolas"/>
-              </a:rPr>
-              <a:t>(</a:t>
-            </a:r>
-            <a:r>
-              <a:rPr sz="900" b="0" i="0">
-                <a:solidFill>
-                  <a:srgbClr val="D4D4D4"/>
-                </a:solidFill>
-                <a:latin typeface="Consolas"/>
-              </a:rPr>
-              <a:t>avg</a:t>
-            </a:r>
-            <a:r>
-              <a:rPr sz="900" b="0" i="0">
-                <a:solidFill>
-                  <a:srgbClr val="D4D4D4"/>
-                </a:solidFill>
-                <a:latin typeface="Consolas"/>
-              </a:rPr>
-              <a:t> </a:t>
-            </a:r>
-            <a:r>
-              <a:rPr sz="900" b="0" i="0">
-                <a:solidFill>
-                  <a:srgbClr val="D4D4D4"/>
-                </a:solidFill>
-                <a:latin typeface="Consolas"/>
-              </a:rPr>
-              <a:t>&gt;=</a:t>
-            </a:r>
-            <a:r>
-              <a:rPr sz="900" b="0" i="0">
-                <a:solidFill>
-                  <a:srgbClr val="D4D4D4"/>
-                </a:solidFill>
-                <a:latin typeface="Consolas"/>
-              </a:rPr>
-              <a:t> </a:t>
-            </a:r>
-            <a:r>
-              <a:rPr sz="900" b="0" i="0">
-                <a:solidFill>
-                  <a:srgbClr val="B5CEA8"/>
-                </a:solidFill>
-                <a:latin typeface="Consolas"/>
-              </a:rPr>
-              <a:t>80</a:t>
-            </a:r>
-            <a:r>
-              <a:rPr sz="900" b="0" i="0">
-                <a:solidFill>
-                  <a:srgbClr val="D4D4D4"/>
-                </a:solidFill>
-                <a:latin typeface="Consolas"/>
-              </a:rPr>
-              <a:t>)</a:t>
-            </a:r>
-            <a:r>
-              <a:rPr sz="900" b="0" i="0">
-                <a:solidFill>
-                  <a:srgbClr val="D4D4D4"/>
-                </a:solidFill>
-                <a:latin typeface="Consolas"/>
-              </a:rPr>
-              <a:t> </a:t>
-            </a:r>
-            <a:r>
-              <a:rPr sz="900" b="0" i="0">
-                <a:solidFill>
-                  <a:srgbClr val="569CD6"/>
-                </a:solidFill>
-                <a:latin typeface="Consolas"/>
-              </a:rPr>
-              <a:t>return</a:t>
-            </a:r>
-            <a:r>
-              <a:rPr sz="900" b="0" i="0">
-                <a:solidFill>
-                  <a:srgbClr val="D4D4D4"/>
-                </a:solidFill>
-                <a:latin typeface="Consolas"/>
-              </a:rPr>
-              <a:t> </a:t>
-            </a:r>
-            <a:r>
-              <a:rPr sz="900" b="0" i="0">
-                <a:solidFill>
-                  <a:srgbClr val="CE9178"/>
-                </a:solidFill>
-                <a:latin typeface="Consolas"/>
-              </a:rPr>
-              <a:t>'B'</a:t>
-            </a:r>
-            <a:r>
-              <a:rPr sz="900" b="0" i="0">
-                <a:solidFill>
-                  <a:srgbClr val="D4D4D4"/>
-                </a:solidFill>
-                <a:latin typeface="Consolas"/>
-              </a:rPr>
-              <a:t>;</a:t>
-            </a:r>
-          </a:p>
-          <a:p>
-            <a:pPr>
-              <a:lnSpc>
-                <a:spcPts val="1360"/>
-              </a:lnSpc>
-            </a:pPr>
-            <a:r>
-              <a:rPr sz="900" b="0" i="0">
-                <a:solidFill>
-                  <a:srgbClr val="D4D4D4"/>
-                </a:solidFill>
-                <a:latin typeface="Consolas"/>
-              </a:rPr>
-              <a:t>    </a:t>
-            </a:r>
-            <a:r>
-              <a:rPr sz="900" b="0" i="0">
-                <a:solidFill>
-                  <a:srgbClr val="569CD6"/>
-                </a:solidFill>
-                <a:latin typeface="Consolas"/>
-              </a:rPr>
-              <a:t>if</a:t>
-            </a:r>
-            <a:r>
-              <a:rPr sz="900" b="0" i="0">
-                <a:solidFill>
-                  <a:srgbClr val="D4D4D4"/>
-                </a:solidFill>
-                <a:latin typeface="Consolas"/>
-              </a:rPr>
-              <a:t> </a:t>
-            </a:r>
-            <a:r>
-              <a:rPr sz="900" b="0" i="0">
-                <a:solidFill>
-                  <a:srgbClr val="D4D4D4"/>
-                </a:solidFill>
-                <a:latin typeface="Consolas"/>
-              </a:rPr>
-              <a:t>(</a:t>
-            </a:r>
-            <a:r>
-              <a:rPr sz="900" b="0" i="0">
-                <a:solidFill>
-                  <a:srgbClr val="D4D4D4"/>
-                </a:solidFill>
-                <a:latin typeface="Consolas"/>
-              </a:rPr>
-              <a:t>avg</a:t>
-            </a:r>
-            <a:r>
-              <a:rPr sz="900" b="0" i="0">
-                <a:solidFill>
-                  <a:srgbClr val="D4D4D4"/>
-                </a:solidFill>
-                <a:latin typeface="Consolas"/>
-              </a:rPr>
-              <a:t> </a:t>
-            </a:r>
-            <a:r>
-              <a:rPr sz="900" b="0" i="0">
-                <a:solidFill>
-                  <a:srgbClr val="D4D4D4"/>
-                </a:solidFill>
-                <a:latin typeface="Consolas"/>
-              </a:rPr>
-              <a:t>&gt;=</a:t>
-            </a:r>
-            <a:r>
-              <a:rPr sz="900" b="0" i="0">
-                <a:solidFill>
-                  <a:srgbClr val="D4D4D4"/>
-                </a:solidFill>
-                <a:latin typeface="Consolas"/>
-              </a:rPr>
-              <a:t> </a:t>
-            </a:r>
-            <a:r>
-              <a:rPr sz="900" b="0" i="0">
-                <a:solidFill>
-                  <a:srgbClr val="B5CEA8"/>
-                </a:solidFill>
-                <a:latin typeface="Consolas"/>
-              </a:rPr>
-              <a:t>70</a:t>
-            </a:r>
-            <a:r>
-              <a:rPr sz="900" b="0" i="0">
-                <a:solidFill>
-                  <a:srgbClr val="D4D4D4"/>
-                </a:solidFill>
-                <a:latin typeface="Consolas"/>
-              </a:rPr>
-              <a:t>)</a:t>
-            </a:r>
-            <a:r>
-              <a:rPr sz="900" b="0" i="0">
-                <a:solidFill>
-                  <a:srgbClr val="D4D4D4"/>
-                </a:solidFill>
-                <a:latin typeface="Consolas"/>
-              </a:rPr>
-              <a:t> </a:t>
-            </a:r>
-            <a:r>
-              <a:rPr sz="900" b="0" i="0">
-                <a:solidFill>
-                  <a:srgbClr val="569CD6"/>
-                </a:solidFill>
-                <a:latin typeface="Consolas"/>
-              </a:rPr>
-              <a:t>return</a:t>
-            </a:r>
-            <a:r>
-              <a:rPr sz="900" b="0" i="0">
-                <a:solidFill>
-                  <a:srgbClr val="D4D4D4"/>
-                </a:solidFill>
-                <a:latin typeface="Consolas"/>
-              </a:rPr>
-              <a:t> </a:t>
-            </a:r>
-            <a:r>
-              <a:rPr sz="900" b="0" i="0">
-                <a:solidFill>
-                  <a:srgbClr val="CE9178"/>
-                </a:solidFill>
-                <a:latin typeface="Consolas"/>
-              </a:rPr>
-              <a:t>'C'</a:t>
-            </a:r>
-            <a:r>
-              <a:rPr sz="900" b="0" i="0">
-                <a:solidFill>
-                  <a:srgbClr val="D4D4D4"/>
-                </a:solidFill>
-                <a:latin typeface="Consolas"/>
-              </a:rPr>
-              <a:t>;</a:t>
-            </a:r>
-          </a:p>
-          <a:p>
-            <a:pPr>
-              <a:lnSpc>
-                <a:spcPts val="1360"/>
-              </a:lnSpc>
-            </a:pPr>
-            <a:r>
-              <a:rPr sz="900" b="0" i="0">
-                <a:solidFill>
-                  <a:srgbClr val="D4D4D4"/>
-                </a:solidFill>
-                <a:latin typeface="Consolas"/>
-              </a:rPr>
-              <a:t>    </a:t>
-            </a:r>
-            <a:r>
-              <a:rPr sz="900" b="0" i="0">
-                <a:solidFill>
-                  <a:srgbClr val="569CD6"/>
-                </a:solidFill>
-                <a:latin typeface="Consolas"/>
-              </a:rPr>
-              <a:t>return</a:t>
-            </a:r>
-            <a:r>
-              <a:rPr sz="900" b="0" i="0">
-                <a:solidFill>
-                  <a:srgbClr val="D4D4D4"/>
-                </a:solidFill>
-                <a:latin typeface="Consolas"/>
-              </a:rPr>
-              <a:t> </a:t>
-            </a:r>
-            <a:r>
-              <a:rPr sz="900" b="0" i="0">
-                <a:solidFill>
-                  <a:srgbClr val="CE9178"/>
-                </a:solidFill>
-                <a:latin typeface="Consolas"/>
-              </a:rPr>
-              <a:t>'F'</a:t>
-            </a:r>
-            <a:r>
-              <a:rPr sz="900" b="0" i="0">
-                <a:solidFill>
-                  <a:srgbClr val="D4D4D4"/>
-                </a:solidFill>
-                <a:latin typeface="Consolas"/>
-              </a:rPr>
-              <a:t>;</a:t>
-            </a:r>
-          </a:p>
-          <a:p>
-            <a:pPr>
-              <a:lnSpc>
-                <a:spcPts val="1360"/>
-              </a:lnSpc>
-            </a:pPr>
-            <a:r>
-              <a:rPr sz="900" b="0" i="0">
-                <a:solidFill>
-                  <a:srgbClr val="D4D4D4"/>
-                </a:solidFill>
-                <a:latin typeface="Consolas"/>
-              </a:rPr>
-              <a:t>}</a:t>
-            </a:r>
-          </a:p>
-          <a:p>
-            <a:pPr>
-              <a:lnSpc>
-                <a:spcPts val="1360"/>
-              </a:lnSpc>
-            </a:pPr>
-            <a:r>
-              <a:rPr sz="900" b="0" i="0">
-                <a:solidFill>
-                  <a:srgbClr val="569CD6"/>
-                </a:solidFill>
-                <a:latin typeface="Consolas"/>
-              </a:rPr>
-              <a:t>int</a:t>
-            </a:r>
-            <a:r>
-              <a:rPr sz="900" b="0" i="0">
-                <a:solidFill>
-                  <a:srgbClr val="D4D4D4"/>
-                </a:solidFill>
-                <a:latin typeface="Consolas"/>
-              </a:rPr>
-              <a:t> </a:t>
-            </a:r>
-            <a:r>
-              <a:rPr sz="900" b="0" i="0">
-                <a:solidFill>
-                  <a:srgbClr val="DCDCAA"/>
-                </a:solidFill>
-                <a:latin typeface="Consolas"/>
-              </a:rPr>
-              <a:t>main</a:t>
-            </a:r>
-            <a:r>
-              <a:rPr sz="900" b="0" i="0">
-                <a:solidFill>
-                  <a:srgbClr val="D4D4D4"/>
-                </a:solidFill>
-                <a:latin typeface="Consolas"/>
-              </a:rPr>
-              <a:t>()</a:t>
-            </a:r>
-            <a:r>
-              <a:rPr sz="900" b="0" i="0">
-                <a:solidFill>
-                  <a:srgbClr val="D4D4D4"/>
-                </a:solidFill>
-                <a:latin typeface="Consolas"/>
-              </a:rPr>
-              <a:t> </a:t>
-            </a:r>
-            <a:r>
-              <a:rPr sz="900" b="0" i="0">
-                <a:solidFill>
-                  <a:srgbClr val="D4D4D4"/>
-                </a:solidFill>
-                <a:latin typeface="Consolas"/>
-              </a:rPr>
-              <a:t>{</a:t>
-            </a:r>
-          </a:p>
-          <a:p>
-            <a:pPr>
-              <a:lnSpc>
-                <a:spcPts val="1360"/>
-              </a:lnSpc>
-            </a:pPr>
-            <a:r>
-              <a:rPr sz="900" b="0" i="0">
-                <a:solidFill>
-                  <a:srgbClr val="D4D4D4"/>
-                </a:solidFill>
-                <a:latin typeface="Consolas"/>
-              </a:rPr>
-              <a:t>    </a:t>
-            </a:r>
-            <a:r>
-              <a:rPr sz="900" b="0" i="0">
-                <a:solidFill>
-                  <a:srgbClr val="569CD6"/>
-                </a:solidFill>
-                <a:latin typeface="Consolas"/>
-              </a:rPr>
-              <a:t>double</a:t>
-            </a:r>
-            <a:r>
-              <a:rPr sz="900" b="0" i="0">
-                <a:solidFill>
-                  <a:srgbClr val="D4D4D4"/>
-                </a:solidFill>
-                <a:latin typeface="Consolas"/>
-              </a:rPr>
-              <a:t> </a:t>
-            </a:r>
-            <a:r>
-              <a:rPr sz="900" b="0" i="0">
-                <a:solidFill>
-                  <a:srgbClr val="D4D4D4"/>
-                </a:solidFill>
-                <a:latin typeface="Consolas"/>
-              </a:rPr>
-              <a:t>grades</a:t>
-            </a:r>
-            <a:r>
-              <a:rPr sz="900" b="0" i="0">
-                <a:solidFill>
-                  <a:srgbClr val="D4D4D4"/>
-                </a:solidFill>
-                <a:latin typeface="Consolas"/>
-              </a:rPr>
-              <a:t>[</a:t>
-            </a:r>
-            <a:r>
-              <a:rPr sz="900" b="0" i="0">
-                <a:solidFill>
-                  <a:srgbClr val="B5CEA8"/>
-                </a:solidFill>
-                <a:latin typeface="Consolas"/>
-              </a:rPr>
-              <a:t>3</a:t>
-            </a:r>
-            <a:r>
-              <a:rPr sz="900" b="0" i="0">
-                <a:solidFill>
-                  <a:srgbClr val="D4D4D4"/>
-                </a:solidFill>
-                <a:latin typeface="Consolas"/>
-              </a:rPr>
-              <a:t>]</a:t>
-            </a:r>
-            <a:r>
-              <a:rPr sz="900" b="0" i="0">
-                <a:solidFill>
-                  <a:srgbClr val="D4D4D4"/>
-                </a:solidFill>
-                <a:latin typeface="Consolas"/>
-              </a:rPr>
-              <a:t> </a:t>
-            </a:r>
-            <a:r>
-              <a:rPr sz="900" b="0" i="0">
-                <a:solidFill>
-                  <a:srgbClr val="D4D4D4"/>
-                </a:solidFill>
-                <a:latin typeface="Consolas"/>
-              </a:rPr>
-              <a:t>=</a:t>
-            </a:r>
-            <a:r>
-              <a:rPr sz="900" b="0" i="0">
-                <a:solidFill>
-                  <a:srgbClr val="D4D4D4"/>
-                </a:solidFill>
-                <a:latin typeface="Consolas"/>
-              </a:rPr>
-              <a:t> </a:t>
-            </a:r>
-            <a:r>
-              <a:rPr sz="900" b="0" i="0">
-                <a:solidFill>
-                  <a:srgbClr val="D4D4D4"/>
-                </a:solidFill>
-                <a:latin typeface="Consolas"/>
-              </a:rPr>
-              <a:t>{</a:t>
-            </a:r>
-            <a:r>
-              <a:rPr sz="900" b="0" i="0">
-                <a:solidFill>
-                  <a:srgbClr val="B5CEA8"/>
-                </a:solidFill>
-                <a:latin typeface="Consolas"/>
-              </a:rPr>
-              <a:t>88</a:t>
-            </a:r>
-            <a:r>
-              <a:rPr sz="900" b="0" i="0">
-                <a:solidFill>
-                  <a:srgbClr val="D4D4D4"/>
-                </a:solidFill>
-                <a:latin typeface="Consolas"/>
-              </a:rPr>
-              <a:t>,</a:t>
-            </a:r>
-            <a:r>
-              <a:rPr sz="900" b="0" i="0">
-                <a:solidFill>
-                  <a:srgbClr val="D4D4D4"/>
-                </a:solidFill>
-                <a:latin typeface="Consolas"/>
-              </a:rPr>
-              <a:t> </a:t>
-            </a:r>
-            <a:r>
-              <a:rPr sz="900" b="0" i="0">
-                <a:solidFill>
-                  <a:srgbClr val="B5CEA8"/>
-                </a:solidFill>
-                <a:latin typeface="Consolas"/>
-              </a:rPr>
-              <a:t>92</a:t>
-            </a:r>
-            <a:r>
-              <a:rPr sz="900" b="0" i="0">
-                <a:solidFill>
-                  <a:srgbClr val="D4D4D4"/>
-                </a:solidFill>
-                <a:latin typeface="Consolas"/>
-              </a:rPr>
-              <a:t>,</a:t>
-            </a:r>
-            <a:r>
-              <a:rPr sz="900" b="0" i="0">
-                <a:solidFill>
-                  <a:srgbClr val="D4D4D4"/>
-                </a:solidFill>
-                <a:latin typeface="Consolas"/>
-              </a:rPr>
-              <a:t> </a:t>
-            </a:r>
-            <a:r>
-              <a:rPr sz="900" b="0" i="0">
-                <a:solidFill>
-                  <a:srgbClr val="B5CEA8"/>
-                </a:solidFill>
-                <a:latin typeface="Consolas"/>
-              </a:rPr>
-              <a:t>79</a:t>
-            </a:r>
-            <a:r>
-              <a:rPr sz="900" b="0" i="0">
-                <a:solidFill>
-                  <a:srgbClr val="D4D4D4"/>
-                </a:solidFill>
-                <a:latin typeface="Consolas"/>
-              </a:rPr>
-              <a:t>};</a:t>
-            </a:r>
-          </a:p>
-          <a:p>
-            <a:pPr>
-              <a:lnSpc>
-                <a:spcPts val="1360"/>
-              </a:lnSpc>
-            </a:pPr>
-            <a:r>
-              <a:rPr sz="900" b="0" i="0">
-                <a:solidFill>
-                  <a:srgbClr val="D4D4D4"/>
-                </a:solidFill>
-                <a:latin typeface="Consolas"/>
-              </a:rPr>
-              <a:t>    </a:t>
-            </a:r>
-            <a:r>
-              <a:rPr sz="900" b="0" i="0">
-                <a:solidFill>
-                  <a:srgbClr val="569CD6"/>
-                </a:solidFill>
-                <a:latin typeface="Consolas"/>
-              </a:rPr>
-              <a:t>double</a:t>
-            </a:r>
-            <a:r>
-              <a:rPr sz="900" b="0" i="0">
-                <a:solidFill>
-                  <a:srgbClr val="D4D4D4"/>
-                </a:solidFill>
-                <a:latin typeface="Consolas"/>
-              </a:rPr>
-              <a:t> </a:t>
-            </a:r>
-            <a:r>
-              <a:rPr sz="900" b="0" i="0">
-                <a:solidFill>
-                  <a:srgbClr val="D4D4D4"/>
-                </a:solidFill>
-                <a:latin typeface="Consolas"/>
-              </a:rPr>
-              <a:t>avg</a:t>
-            </a:r>
-            <a:r>
-              <a:rPr sz="900" b="0" i="0">
-                <a:solidFill>
-                  <a:srgbClr val="D4D4D4"/>
-                </a:solidFill>
-                <a:latin typeface="Consolas"/>
-              </a:rPr>
-              <a:t> </a:t>
-            </a:r>
-            <a:r>
-              <a:rPr sz="900" b="0" i="0">
-                <a:solidFill>
-                  <a:srgbClr val="D4D4D4"/>
-                </a:solidFill>
-                <a:latin typeface="Consolas"/>
-              </a:rPr>
-              <a:t>=</a:t>
-            </a:r>
-            <a:r>
-              <a:rPr sz="900" b="0" i="0">
-                <a:solidFill>
-                  <a:srgbClr val="D4D4D4"/>
-                </a:solidFill>
-                <a:latin typeface="Consolas"/>
-              </a:rPr>
-              <a:t> </a:t>
-            </a:r>
-            <a:r>
-              <a:rPr sz="900" b="0" i="0">
-                <a:solidFill>
-                  <a:srgbClr val="DCDCAA"/>
-                </a:solidFill>
-                <a:latin typeface="Consolas"/>
-              </a:rPr>
-              <a:t>calculateAverage</a:t>
-            </a:r>
-            <a:r>
-              <a:rPr sz="900" b="0" i="0">
-                <a:solidFill>
-                  <a:srgbClr val="D4D4D4"/>
-                </a:solidFill>
-                <a:latin typeface="Consolas"/>
-              </a:rPr>
-              <a:t>(</a:t>
-            </a:r>
-            <a:r>
-              <a:rPr sz="900" b="0" i="0">
-                <a:solidFill>
-                  <a:srgbClr val="D4D4D4"/>
-                </a:solidFill>
-                <a:latin typeface="Consolas"/>
-              </a:rPr>
-              <a:t>grades</a:t>
-            </a:r>
-            <a:r>
-              <a:rPr sz="900" b="0" i="0">
-                <a:solidFill>
-                  <a:srgbClr val="D4D4D4"/>
-                </a:solidFill>
-                <a:latin typeface="Consolas"/>
-              </a:rPr>
-              <a:t>,</a:t>
-            </a:r>
-            <a:r>
-              <a:rPr sz="900" b="0" i="0">
-                <a:solidFill>
-                  <a:srgbClr val="D4D4D4"/>
-                </a:solidFill>
-                <a:latin typeface="Consolas"/>
-              </a:rPr>
-              <a:t> </a:t>
-            </a:r>
-            <a:r>
-              <a:rPr sz="900" b="0" i="0">
-                <a:solidFill>
-                  <a:srgbClr val="B5CEA8"/>
-                </a:solidFill>
-                <a:latin typeface="Consolas"/>
-              </a:rPr>
-              <a:t>3</a:t>
-            </a:r>
-            <a:r>
-              <a:rPr sz="900" b="0" i="0">
-                <a:solidFill>
-                  <a:srgbClr val="D4D4D4"/>
-                </a:solidFill>
-                <a:latin typeface="Consolas"/>
-              </a:rPr>
-              <a:t>);</a:t>
-            </a:r>
-          </a:p>
-          <a:p>
-            <a:pPr>
-              <a:lnSpc>
-                <a:spcPts val="1360"/>
-              </a:lnSpc>
-            </a:pPr>
-            <a:r>
-              <a:rPr sz="900" b="0" i="0">
-                <a:solidFill>
-                  <a:srgbClr val="D4D4D4"/>
-                </a:solidFill>
-                <a:latin typeface="Consolas"/>
-              </a:rPr>
-              <a:t>    </a:t>
-            </a:r>
-            <a:r>
-              <a:rPr sz="900" b="0" i="0">
-                <a:solidFill>
-                  <a:srgbClr val="D4D4D4"/>
-                </a:solidFill>
-                <a:latin typeface="Consolas"/>
-              </a:rPr>
-              <a:t>cout</a:t>
-            </a:r>
-            <a:r>
-              <a:rPr sz="900" b="0" i="0">
-                <a:solidFill>
-                  <a:srgbClr val="D4D4D4"/>
-                </a:solidFill>
-                <a:latin typeface="Consolas"/>
-              </a:rPr>
-              <a:t> </a:t>
-            </a:r>
-            <a:r>
-              <a:rPr sz="900" b="0" i="0">
-                <a:solidFill>
-                  <a:srgbClr val="D4D4D4"/>
-                </a:solidFill>
-                <a:latin typeface="Consolas"/>
-              </a:rPr>
-              <a:t>&lt;&lt;</a:t>
-            </a:r>
-            <a:r>
-              <a:rPr sz="900" b="0" i="0">
-                <a:solidFill>
-                  <a:srgbClr val="D4D4D4"/>
-                </a:solidFill>
-                <a:latin typeface="Consolas"/>
-              </a:rPr>
-              <a:t> </a:t>
-            </a:r>
-            <a:r>
-              <a:rPr sz="900" b="0" i="0">
-                <a:solidFill>
-                  <a:srgbClr val="D4D4D4"/>
-                </a:solidFill>
-                <a:latin typeface="Consolas"/>
-              </a:rPr>
-              <a:t>avg</a:t>
-            </a:r>
-            <a:r>
-              <a:rPr sz="900" b="0" i="0">
-                <a:solidFill>
-                  <a:srgbClr val="D4D4D4"/>
-                </a:solidFill>
-                <a:latin typeface="Consolas"/>
-              </a:rPr>
-              <a:t> </a:t>
-            </a:r>
-            <a:r>
-              <a:rPr sz="900" b="0" i="0">
-                <a:solidFill>
-                  <a:srgbClr val="D4D4D4"/>
-                </a:solidFill>
-                <a:latin typeface="Consolas"/>
-              </a:rPr>
-              <a:t>&lt;&lt;</a:t>
-            </a:r>
-            <a:r>
-              <a:rPr sz="900" b="0" i="0">
-                <a:solidFill>
-                  <a:srgbClr val="D4D4D4"/>
-                </a:solidFill>
-                <a:latin typeface="Consolas"/>
-              </a:rPr>
-              <a:t> </a:t>
-            </a:r>
-            <a:r>
-              <a:rPr sz="900" b="0" i="0">
-                <a:solidFill>
-                  <a:srgbClr val="CE9178"/>
-                </a:solidFill>
-                <a:latin typeface="Consolas"/>
-              </a:rPr>
-              <a:t>" "</a:t>
-            </a:r>
-            <a:r>
-              <a:rPr sz="900" b="0" i="0">
-                <a:solidFill>
-                  <a:srgbClr val="D4D4D4"/>
-                </a:solidFill>
-                <a:latin typeface="Consolas"/>
-              </a:rPr>
-              <a:t> </a:t>
-            </a:r>
-            <a:r>
-              <a:rPr sz="900" b="0" i="0">
-                <a:solidFill>
-                  <a:srgbClr val="D4D4D4"/>
-                </a:solidFill>
-                <a:latin typeface="Consolas"/>
-              </a:rPr>
-              <a:t>&lt;&lt;</a:t>
-            </a:r>
-            <a:r>
-              <a:rPr sz="900" b="0" i="0">
-                <a:solidFill>
-                  <a:srgbClr val="D4D4D4"/>
-                </a:solidFill>
-                <a:latin typeface="Consolas"/>
-              </a:rPr>
-              <a:t> </a:t>
-            </a:r>
-            <a:r>
-              <a:rPr sz="900" b="0" i="0">
-                <a:solidFill>
-                  <a:srgbClr val="DCDCAA"/>
-                </a:solidFill>
-                <a:latin typeface="Consolas"/>
-              </a:rPr>
-              <a:t>getLetterGrade</a:t>
-            </a:r>
-            <a:r>
-              <a:rPr sz="900" b="0" i="0">
-                <a:solidFill>
-                  <a:srgbClr val="D4D4D4"/>
-                </a:solidFill>
-                <a:latin typeface="Consolas"/>
-              </a:rPr>
-              <a:t>(</a:t>
-            </a:r>
-            <a:r>
-              <a:rPr sz="900" b="0" i="0">
-                <a:solidFill>
-                  <a:srgbClr val="D4D4D4"/>
-                </a:solidFill>
-                <a:latin typeface="Consolas"/>
-              </a:rPr>
-              <a:t>avg</a:t>
-            </a:r>
-            <a:r>
-              <a:rPr sz="900" b="0" i="0">
-                <a:solidFill>
-                  <a:srgbClr val="D4D4D4"/>
-                </a:solidFill>
-                <a:latin typeface="Consolas"/>
-              </a:rPr>
-              <a:t>);</a:t>
-            </a:r>
-          </a:p>
-          <a:p>
-            <a:pPr>
-              <a:lnSpc>
-                <a:spcPts val="1360"/>
-              </a:lnSpc>
-            </a:pPr>
-            <a:r>
-              <a:rPr sz="900" b="0" i="0">
-                <a:solidFill>
-                  <a:srgbClr val="D4D4D4"/>
-                </a:solidFill>
-                <a:latin typeface="Consolas"/>
-              </a:rPr>
-              <a:t>    </a:t>
-            </a:r>
-            <a:r>
-              <a:rPr sz="900" b="0" i="0">
-                <a:solidFill>
-                  <a:srgbClr val="569CD6"/>
-                </a:solidFill>
-                <a:latin typeface="Consolas"/>
-              </a:rPr>
-              <a:t>return</a:t>
-            </a:r>
-            <a:r>
-              <a:rPr sz="900" b="0" i="0">
-                <a:solidFill>
-                  <a:srgbClr val="D4D4D4"/>
-                </a:solidFill>
-                <a:latin typeface="Consolas"/>
-              </a:rPr>
-              <a:t> </a:t>
-            </a:r>
-            <a:r>
-              <a:rPr sz="900" b="0" i="0">
-                <a:solidFill>
-                  <a:srgbClr val="B5CEA8"/>
-                </a:solidFill>
-                <a:latin typeface="Consolas"/>
-              </a:rPr>
-              <a:t>0</a:t>
-            </a:r>
-            <a:r>
-              <a:rPr sz="900" b="0" i="0">
-                <a:solidFill>
-                  <a:srgbClr val="D4D4D4"/>
-                </a:solidFill>
-                <a:latin typeface="Consolas"/>
-              </a:rPr>
-              <a:t>;</a:t>
-            </a:r>
-          </a:p>
-          <a:p>
-            <a:pPr>
-              <a:lnSpc>
-                <a:spcPts val="1360"/>
-              </a:lnSpc>
-            </a:pPr>
-            <a:r>
-              <a:rPr sz="900" b="0" i="0">
-                <a:solidFill>
-                  <a:srgbClr val="D4D4D4"/>
-                </a:solidFill>
-                <a:latin typeface="Consolas"/>
-              </a:rPr>
-              <a:t>}</a:t>
-            </a:r>
-          </a:p>
-        </p:txBody>
-      </p:sp>
-      <p:sp>
-        <p:nvSpPr>
-          <p:cNvPr id="12" name="TextBox 11"/>
+              <a:rPr sz="1400" b="0" i="0">
+                <a:solidFill>
+                  <a:srgbClr val="F2F2F2"/>
+                </a:solidFill>
+                <a:latin typeface="Calibri"/>
+              </a:rPr>
+              <a:t>If a function needs data, pass it in as a parameter. Reach for a global only when truly necessary.</a:t>
+            </a:r>
+          </a:p>
+        </p:txBody>
+      </p:sp>
+      <p:sp>
+        <p:nvSpPr>
+          <p:cNvPr id="9" name="TextBox 8"/>
           <p:cNvSpPr txBox="1"/>
           <p:nvPr/>
         </p:nvSpPr>
         <p:spPr>
           <a:xfrm>
-            <a:off x="7635240" y="1783080"/>
-            <a:ext cx="3977639" cy="4114800"/>
+            <a:off x="457200" y="6528816"/>
+            <a:ext cx="6400800" cy="256032"/>
           </a:xfrm>
           <a:prstGeom prst="rect">
             <a:avLst/>
@@ -6177,155 +5248,14 @@
           </a:bodyPr>
           <a:lstStyle/>
           <a:p>
-            <a:pPr marL="177800" indent="-177800">
-              <a:spcAft>
-                <a:spcPts val="1200"/>
-              </a:spcAft>
-              <a:buSzPct val="100000"/>
-              <a:buChar char="•"/>
-            </a:pPr>
-            <a:r>
-              <a:rPr sz="1400" b="0" i="0">
-                <a:solidFill>
-                  <a:srgbClr val="1E1E2E"/>
+            <a:pPr algn="l"/>
+            <a:r>
+              <a:rPr sz="900" b="0" i="0">
+                <a:solidFill>
+                  <a:srgbClr val="9CA3AF"/>
                 </a:solidFill>
                 <a:latin typeface="Calibri"/>
               </a:rPr>
-              <a:t>Same math and grading logic from Module 3, now split into two named functions.</a:t>
-            </a:r>
-          </a:p>
-          <a:p>
-            <a:pPr marL="177800" indent="-177800">
-              <a:spcAft>
-                <a:spcPts val="1200"/>
-              </a:spcAft>
-              <a:buSzPct val="100000"/>
-              <a:buChar char="•"/>
-            </a:pPr>
-            <a:r>
-              <a:rPr sz="1400" b="0" i="0">
-                <a:solidFill>
-                  <a:srgbClr val="1E1E2E"/>
-                </a:solidFill>
-                <a:latin typeface="Calibri"/>
-              </a:rPr>
-              <a:t>calculateAverage does the math; getLetterGrade makes the decision; main() just calls them.</a:t>
-            </a:r>
-          </a:p>
-          <a:p>
-            <a:pPr marL="177800" indent="-177800">
-              <a:spcAft>
-                <a:spcPts val="1200"/>
-              </a:spcAft>
-              <a:buSzPct val="100000"/>
-              <a:buChar char="•"/>
-            </a:pPr>
-            <a:r>
-              <a:rPr sz="1400" b="0" i="0">
-                <a:solidFill>
-                  <a:srgbClr val="1E1E2E"/>
-                </a:solidFill>
-                <a:latin typeface="Calibri"/>
-              </a:rPr>
-              <a:t>Each function can now be tested or reused on its own, independent of the rest.</a:t>
-            </a:r>
-          </a:p>
-        </p:txBody>
-      </p:sp>
-      <p:sp>
-        <p:nvSpPr>
-          <p:cNvPr id="13" name="Rectangle 12"/>
-          <p:cNvSpPr/>
-          <p:nvPr/>
-        </p:nvSpPr>
-        <p:spPr>
-          <a:xfrm>
-            <a:off x="548640" y="5549493"/>
-            <a:ext cx="6858000" cy="658368"/>
-          </a:xfrm>
-          <a:prstGeom prst="rect">
-            <a:avLst/>
-          </a:prstGeom>
-          <a:solidFill>
-            <a:srgbClr val="FFFFFF"/>
-          </a:solidFill>
-          <a:ln>
-            <a:noFill/>
-          </a:ln>
-          <a:effectLst/>
-        </p:spPr>
-        <p:style>
-          <a:lnRef idx="1">
-            <a:schemeClr val="accent1"/>
-          </a:lnRef>
-          <a:fillRef idx="3">
-            <a:schemeClr val="accent1"/>
-          </a:fillRef>
-          <a:effectRef idx="2">
-            <a:schemeClr val="accent1"/>
-          </a:effectRef>
-          <a:fontRef idx="minor">
-            <a:schemeClr val="lt1"/>
-          </a:fontRef>
-        </p:style>
-        <p:txBody>
-          <a:bodyPr rtlCol="0" anchor="ctr" lIns="137160" rIns="137160" tIns="73152" bIns="73152" wrap="square"/>
-          <a:lstStyle/>
-          <a:p>
-            <a:pPr algn="ctr"/>
-            <a:r>
-              <a:rPr sz="1000" b="1" i="0">
-                <a:solidFill>
-                  <a:srgbClr val="0E7C7B"/>
-                </a:solidFill>
-                <a:latin typeface="Calibri"/>
-              </a:rPr>
-              <a:t>OUTPUT</a:t>
-            </a:r>
-          </a:p>
-          <a:p>
-            <a:r>
-              <a:rPr sz="1200" b="0" i="0">
-                <a:solidFill>
-                  <a:srgbClr val="1E1E2E"/>
-                </a:solidFill>
-                <a:latin typeface="Consolas"/>
-              </a:rPr>
-              <a:t>86.3333 B</a:t>
-            </a:r>
-          </a:p>
-        </p:txBody>
-      </p:sp>
-      <p:sp>
-        <p:nvSpPr>
-          <p:cNvPr id="14" name="TextBox 13"/>
-          <p:cNvSpPr txBox="1"/>
-          <p:nvPr/>
-        </p:nvSpPr>
-        <p:spPr>
-          <a:xfrm>
-            <a:off x="457200" y="6528816"/>
-            <a:ext cx="6400800" cy="256032"/>
-          </a:xfrm>
-          <a:prstGeom prst="rect">
-            <a:avLst/>
-          </a:prstGeom>
-          <a:noFill/>
-        </p:spPr>
-        <p:txBody>
-          <a:bodyPr wrap="square" anchor="t" lIns="0" rIns="0" tIns="0" bIns="0">
-            <a:spAutoFit/>
-          </a:bodyPr>
-          <a:lstStyle/>
-          <a:p>
-            <a:pPr algn="l"/>
-            <a:r>
-              <a:rPr sz="900" b="0" i="0">
-                <a:solidFill>
-                  <a:srgbClr val="9CA3AF"/>
-                </a:solidFill>
-                <a:latin typeface="Calibri"/>
-              </a:rPr>
               <a:t>C++ FUNDAMENTALS  ·  MODULE 4</a:t>
             </a:r>
           </a:p>
@@ -6333,7 +5263,7 @@
       </p:sp>
       <p:sp>
         <p:nvSpPr>
-          <p:cNvPr id="15" name="TextBox 14"/>
+          <p:cNvPr id="10" name="TextBox 9"/>
           <p:cNvSpPr txBox="1"/>
           <p:nvPr/>
         </p:nvSpPr>
@@ -6380,7 +5310,7 @@
     <p:bg>
       <p:bgPr>
         <a:solidFill>
-          <a:srgbClr val="1E1E2E"/>
+          <a:srgbClr val="F7F7FA"/>
         </a:solidFill>
         <a:effectLst/>
       </p:bgPr>
@@ -6400,10 +5330,63 @@
         </p:nvSpPr>
         <p:spPr>
           <a:xfrm>
-            <a:off x="0" y="0"/>
-            <a:ext cx="12191695" cy="109728"/>
+            <a:off x="11109960" y="384048"/>
+            <a:ext cx="685800" cy="365760"/>
           </a:xfrm>
           <a:prstGeom prst="rect">
+            <a:avLst/>
+          </a:prstGeom>
+          <a:solidFill>
+            <a:srgbClr val="F7F7FA"/>
+          </a:solidFill>
+          <a:ln>
+            <a:noFill/>
+          </a:ln>
+          <a:effectLst/>
+        </p:spPr>
+        <p:style>
+          <a:lnRef idx="1">
+            <a:schemeClr val="accent1"/>
+          </a:lnRef>
+          <a:fillRef idx="3">
+            <a:schemeClr val="accent1"/>
+          </a:fillRef>
+          <a:effectRef idx="2">
+            <a:schemeClr val="accent1"/>
+          </a:effectRef>
+          <a:fontRef idx="minor">
+            <a:schemeClr val="lt1"/>
+          </a:fontRef>
+        </p:style>
+        <p:txBody>
+          <a:bodyPr rtlCol="0" anchor="ctr" lIns="0" rIns="0" tIns="0" bIns="0"/>
+          <a:lstStyle/>
+          <a:p>
+            <a:pPr algn="ctr"/>
+            <a:r>
+              <a:rPr sz="1400" b="1" i="0">
+                <a:solidFill>
+                  <a:srgbClr val="0E7C7B"/>
+                </a:solidFill>
+                <a:latin typeface="Consolas"/>
+              </a:rPr>
+              <a:t>M4</a:t>
+            </a:r>
+          </a:p>
+        </p:txBody>
+      </p:sp>
+      <p:sp>
+        <p:nvSpPr>
+          <p:cNvPr id="3" name="Rounded Rectangle 2"/>
+          <p:cNvSpPr/>
+          <p:nvPr/>
+        </p:nvSpPr>
+        <p:spPr>
+          <a:xfrm>
+            <a:off x="548640" y="365760"/>
+            <a:ext cx="2834640" cy="365760"/>
+          </a:xfrm>
+          <a:prstGeom prst="roundRect">
             <a:avLst/>
           </a:prstGeom>
           <a:solidFill>
@@ -6429,23 +5412,32 @@
           </a:fontRef>
         </p:style>
         <p:txBody>
-          <a:bodyPr rtlCol="0" anchor="ctr"/>
+          <a:bodyPr rtlCol="0" anchor="ctr" rIns="0" tIns="0" bIns="0"/>
           <a:lstStyle/>
           <a:p>
             <a:pPr algn="ctr"/>
-          </a:p>
-        </p:txBody>
-      </p:sp>
-      <p:sp>
-        <p:nvSpPr>
-          <p:cNvPr id="3" name="TextBox 2"/>
+            <a:r>
+              <a:rPr sz="1300" b="1" i="0">
+                <a:solidFill>
+                  <a:srgbClr val="1E1E2E"/>
+                </a:solidFill>
+                <a:latin typeface="Calibri"/>
+              </a:rPr>
+              <a:t>PROJECT BUILD</a:t>
+            </a:r>
+          </a:p>
+        </p:txBody>
+      </p:sp>
+      <p:sp>
+        <p:nvSpPr>
+          <p:cNvPr id="4" name="TextBox 3"/>
           <p:cNvSpPr txBox="1"/>
           <p:nvPr/>
         </p:nvSpPr>
         <p:spPr>
           <a:xfrm>
-            <a:off x="548640" y="457200"/>
-            <a:ext cx="7315200" cy="320040"/>
+            <a:off x="548640" y="868680"/>
+            <a:ext cx="10789920" cy="822960"/>
           </a:xfrm>
           <a:prstGeom prst="rect">
             <a:avLst/>
@@ -6460,163 +5452,33 @@
           <a:p>
             <a:pPr algn="l"/>
             <a:r>
-              <a:rPr sz="1300" b="1" i="0">
-                <a:solidFill>
-                  <a:srgbClr val="F0A500"/>
-                </a:solidFill>
-                <a:latin typeface="Calibri"/>
-              </a:rPr>
-              <a:t>IN-CLASS EXERCISE</a:t>
-            </a:r>
-          </a:p>
-        </p:txBody>
-      </p:sp>
-      <p:sp>
-        <p:nvSpPr>
-          <p:cNvPr id="4" name="TextBox 3"/>
-          <p:cNvSpPr txBox="1"/>
-          <p:nvPr/>
-        </p:nvSpPr>
-        <p:spPr>
-          <a:xfrm>
-            <a:off x="548640" y="777240"/>
-            <a:ext cx="10972800" cy="822960"/>
-          </a:xfrm>
-          <a:prstGeom prst="rect">
-            <a:avLst/>
-          </a:prstGeom>
-          <a:noFill/>
-        </p:spPr>
-        <p:txBody>
-          <a:bodyPr wrap="square" anchor="t" lIns="0" rIns="0" tIns="0" bIns="0">
-            <a:spAutoFit/>
-          </a:bodyPr>
-          <a:lstStyle/>
-          <a:p>
-            <a:pPr algn="l"/>
-            <a:r>
               <a:rPr sz="3200" b="1" i="0">
                 <a:solidFill>
-                  <a:srgbClr val="F2F2F2"/>
-                </a:solidFill>
-                <a:latin typeface="Consolas"/>
-              </a:rPr>
-              <a:t>Add an isPassing() Function</a:t>
-            </a:r>
-          </a:p>
-        </p:txBody>
-      </p:sp>
-      <p:sp>
-        <p:nvSpPr>
-          <p:cNvPr id="5" name="TextBox 4"/>
-          <p:cNvSpPr txBox="1"/>
-          <p:nvPr/>
-        </p:nvSpPr>
-        <p:spPr>
-          <a:xfrm>
-            <a:off x="548640" y="1828800"/>
-            <a:ext cx="6766560" cy="4114800"/>
-          </a:xfrm>
-          <a:prstGeom prst="rect">
-            <a:avLst/>
-          </a:prstGeom>
-          <a:noFill/>
-        </p:spPr>
-        <p:txBody>
-          <a:bodyPr wrap="square" anchor="t" lIns="0" rIns="0" tIns="0" bIns="0">
-            <a:spAutoFit/>
-          </a:bodyPr>
-          <a:lstStyle/>
-          <a:p>
-            <a:pPr marL="254000" indent="-254000">
-              <a:spcAft>
-                <a:spcPts val="1200"/>
-              </a:spcAft>
-              <a:buSzPct val="100000"/>
-              <a:buChar char="▸"/>
-            </a:pPr>
-            <a:r>
-              <a:rPr sz="1800" b="0" i="0">
-                <a:solidFill>
-                  <a:srgbClr val="F2F2F2"/>
-                </a:solidFill>
-                <a:latin typeface="Calibri"/>
-              </a:rPr>
-              <a:t>Write bool isPassing(double average) that returns true or false.</a:t>
-            </a:r>
-          </a:p>
-          <a:p>
-            <a:pPr marL="254000" indent="-254000">
-              <a:spcAft>
-                <a:spcPts val="1200"/>
-              </a:spcAft>
-              <a:buSzPct val="100000"/>
-              <a:buChar char="▸"/>
-            </a:pPr>
-            <a:r>
-              <a:rPr sz="1800" b="0" i="0">
-                <a:solidFill>
-                  <a:srgbClr val="F2F2F2"/>
-                </a:solidFill>
-                <a:latin typeface="Calibri"/>
-              </a:rPr>
-              <a:t>Return true when average is 60 or higher, false otherwise.</a:t>
-            </a:r>
-          </a:p>
-          <a:p>
-            <a:pPr marL="254000" indent="-254000">
-              <a:spcAft>
-                <a:spcPts val="1200"/>
-              </a:spcAft>
-              <a:buSzPct val="100000"/>
-              <a:buChar char="▸"/>
-            </a:pPr>
-            <a:r>
-              <a:rPr sz="1800" b="0" i="0">
-                <a:solidFill>
-                  <a:srgbClr val="F2F2F2"/>
-                </a:solidFill>
-                <a:latin typeface="Calibri"/>
-              </a:rPr>
-              <a:t>Call isPassing() from main() right after computing the average.</a:t>
-            </a:r>
-          </a:p>
-          <a:p>
-            <a:pPr marL="254000" indent="-254000">
-              <a:spcAft>
-                <a:spcPts val="1200"/>
-              </a:spcAft>
-              <a:buSzPct val="100000"/>
-              <a:buChar char="▸"/>
-            </a:pPr>
-            <a:r>
-              <a:rPr sz="1800" b="0" i="0">
-                <a:solidFill>
-                  <a:srgbClr val="F2F2F2"/>
-                </a:solidFill>
-                <a:latin typeface="Calibri"/>
-              </a:rPr>
-              <a:t>Print "PASSING" or "NOT PASSING" next to the letter grade.</a:t>
-            </a:r>
-          </a:p>
-        </p:txBody>
-      </p:sp>
-      <p:sp>
-        <p:nvSpPr>
-          <p:cNvPr id="6" name="Rectangle 5"/>
+                  <a:srgbClr val="1E1E2E"/>
+                </a:solidFill>
+                <a:latin typeface="Consolas"/>
+              </a:rPr>
+              <a:t>Project Build: Refactoring main() Into Functions</a:t>
+            </a:r>
+          </a:p>
+        </p:txBody>
+      </p:sp>
+      <p:sp>
+        <p:nvSpPr>
+          <p:cNvPr id="5" name="Rectangle 4"/>
           <p:cNvSpPr/>
           <p:nvPr/>
         </p:nvSpPr>
         <p:spPr>
           <a:xfrm>
-            <a:off x="7635240" y="1828800"/>
-            <a:ext cx="3977639" cy="2743200"/>
+            <a:off x="548640" y="1783080"/>
+            <a:ext cx="6858000" cy="3583533"/>
           </a:xfrm>
           <a:prstGeom prst="rect">
             <a:avLst/>
           </a:prstGeom>
           <a:solidFill>
-            <a:srgbClr val="2A2A3D"/>
+            <a:srgbClr val="1E1E1E"/>
           </a:solidFill>
           <a:ln>
             <a:noFill/>
@@ -6647,14 +5509,225 @@
       </p:sp>
       <p:sp>
         <p:nvSpPr>
-          <p:cNvPr id="7" name="TextBox 6"/>
+          <p:cNvPr id="6" name="Rectangle 5"/>
+          <p:cNvSpPr/>
+          <p:nvPr/>
+        </p:nvSpPr>
+        <p:spPr>
+          <a:xfrm>
+            <a:off x="548640" y="1783080"/>
+            <a:ext cx="6858000" cy="292608"/>
+          </a:xfrm>
+          <a:prstGeom prst="rect">
+            <a:avLst/>
+          </a:prstGeom>
+          <a:solidFill>
+            <a:srgbClr val="2D2D30"/>
+          </a:solidFill>
+          <a:ln>
+            <a:noFill/>
+          </a:ln>
+          <a:effectLst/>
+        </p:spPr>
+        <p:style>
+          <a:lnRef idx="1">
+            <a:schemeClr val="accent1"/>
+          </a:lnRef>
+          <a:fillRef idx="3">
+            <a:schemeClr val="accent1"/>
+          </a:fillRef>
+          <a:effectRef idx="2">
+            <a:schemeClr val="accent1"/>
+          </a:effectRef>
+          <a:fontRef idx="minor">
+            <a:schemeClr val="lt1"/>
+          </a:fontRef>
+        </p:style>
+        <p:txBody>
+          <a:bodyPr rtlCol="0" anchor="ctr"/>
+          <a:lstStyle/>
+          <a:p>
+            <a:pPr algn="ctr"/>
+          </a:p>
+        </p:txBody>
+      </p:sp>
+      <p:sp>
+        <p:nvSpPr>
+          <p:cNvPr id="7" name="Oval 6"/>
+          <p:cNvSpPr/>
+          <p:nvPr/>
+        </p:nvSpPr>
+        <p:spPr>
+          <a:xfrm>
+            <a:off x="713232" y="1874519"/>
+            <a:ext cx="109728" cy="109728"/>
+          </a:xfrm>
+          <a:prstGeom prst="ellipse">
+            <a:avLst/>
+          </a:prstGeom>
+          <a:solidFill>
+            <a:srgbClr val="FF5F56"/>
+          </a:solidFill>
+          <a:ln>
+            <a:noFill/>
+          </a:ln>
+          <a:effectLst/>
+        </p:spPr>
+        <p:style>
+          <a:lnRef idx="1">
+            <a:schemeClr val="accent1"/>
+          </a:lnRef>
+          <a:fillRef idx="3">
+            <a:schemeClr val="accent1"/>
+          </a:fillRef>
+          <a:effectRef idx="2">
+            <a:schemeClr val="accent1"/>
+          </a:effectRef>
+          <a:fontRef idx="minor">
+            <a:schemeClr val="lt1"/>
+          </a:fontRef>
+        </p:style>
+        <p:txBody>
+          <a:bodyPr rtlCol="0" anchor="ctr"/>
+          <a:lstStyle/>
+          <a:p>
+            <a:pPr algn="ctr"/>
+          </a:p>
+        </p:txBody>
+      </p:sp>
+      <p:sp>
+        <p:nvSpPr>
+          <p:cNvPr id="8" name="Oval 7"/>
+          <p:cNvSpPr/>
+          <p:nvPr/>
+        </p:nvSpPr>
+        <p:spPr>
+          <a:xfrm>
+            <a:off x="932688" y="1874519"/>
+            <a:ext cx="109728" cy="109728"/>
+          </a:xfrm>
+          <a:prstGeom prst="ellipse">
+            <a:avLst/>
+          </a:prstGeom>
+          <a:solidFill>
+            <a:srgbClr val="FFBD2E"/>
+          </a:solidFill>
+          <a:ln>
+            <a:noFill/>
+          </a:ln>
+          <a:effectLst/>
+        </p:spPr>
+        <p:style>
+          <a:lnRef idx="1">
+            <a:schemeClr val="accent1"/>
+          </a:lnRef>
+          <a:fillRef idx="3">
+            <a:schemeClr val="accent1"/>
+          </a:fillRef>
+          <a:effectRef idx="2">
+            <a:schemeClr val="accent1"/>
+          </a:effectRef>
+          <a:fontRef idx="minor">
+            <a:schemeClr val="lt1"/>
+          </a:fontRef>
+        </p:style>
+        <p:txBody>
+          <a:bodyPr rtlCol="0" anchor="ctr"/>
+          <a:lstStyle/>
+          <a:p>
+            <a:pPr algn="ctr"/>
+          </a:p>
+        </p:txBody>
+      </p:sp>
+      <p:sp>
+        <p:nvSpPr>
+          <p:cNvPr id="9" name="Oval 8"/>
+          <p:cNvSpPr/>
+          <p:nvPr/>
+        </p:nvSpPr>
+        <p:spPr>
+          <a:xfrm>
+            <a:off x="1152144" y="1874519"/>
+            <a:ext cx="109728" cy="109728"/>
+          </a:xfrm>
+          <a:prstGeom prst="ellipse">
+            <a:avLst/>
+          </a:prstGeom>
+          <a:solidFill>
+            <a:srgbClr val="27C93F"/>
+          </a:solidFill>
+          <a:ln>
+            <a:noFill/>
+          </a:ln>
+          <a:effectLst/>
+        </p:spPr>
+        <p:style>
+          <a:lnRef idx="1">
+            <a:schemeClr val="accent1"/>
+          </a:lnRef>
+          <a:fillRef idx="3">
+            <a:schemeClr val="accent1"/>
+          </a:fillRef>
+          <a:effectRef idx="2">
+            <a:schemeClr val="accent1"/>
+          </a:effectRef>
+          <a:fontRef idx="minor">
+            <a:schemeClr val="lt1"/>
+          </a:fontRef>
+        </p:style>
+        <p:txBody>
+          <a:bodyPr rtlCol="0" anchor="ctr"/>
+          <a:lstStyle/>
+          <a:p>
+            <a:pPr algn="ctr"/>
+          </a:p>
+        </p:txBody>
+      </p:sp>
+      <p:sp>
+        <p:nvSpPr>
+          <p:cNvPr id="10" name="TextBox 9"/>
           <p:cNvSpPr txBox="1"/>
           <p:nvPr/>
         </p:nvSpPr>
         <p:spPr>
           <a:xfrm>
-            <a:off x="7863840" y="2011680"/>
-            <a:ext cx="3566160" cy="320040"/>
+            <a:off x="1371600" y="1783080"/>
+            <a:ext cx="5760720" cy="292608"/>
+          </a:xfrm>
+          <a:prstGeom prst="rect">
+            <a:avLst/>
+          </a:prstGeom>
+          <a:noFill/>
+        </p:spPr>
+        <p:txBody>
+          <a:bodyPr wrap="square" anchor="ctr" lIns="0" rIns="0" tIns="0" bIns="0">
+            <a:spAutoFit/>
+          </a:bodyPr>
+          <a:lstStyle/>
+          <a:p>
+            <a:pPr algn="l"/>
+            <a:r>
+              <a:rPr sz="1100" b="0" i="0">
+                <a:solidFill>
+                  <a:srgbClr val="9B9BA3"/>
+                </a:solidFill>
+                <a:latin typeface="Consolas"/>
+              </a:rPr>
+              <a:t>main.cpp</a:t>
+            </a:r>
+          </a:p>
+        </p:txBody>
+      </p:sp>
+      <p:sp>
+        <p:nvSpPr>
+          <p:cNvPr id="11" name="TextBox 10"/>
+          <p:cNvSpPr txBox="1"/>
+          <p:nvPr/>
+        </p:nvSpPr>
+        <p:spPr>
+          <a:xfrm>
+            <a:off x="822959" y="2167128"/>
+            <a:ext cx="6309360" cy="3336645"/>
           </a:xfrm>
           <a:prstGeom prst="rect">
             <a:avLst/>
@@ -6667,29 +5740,1828 @@
           </a:bodyPr>
           <a:lstStyle/>
           <a:p>
-            <a:pPr algn="l"/>
-            <a:r>
-              <a:rPr sz="1200" b="1" i="0">
-                <a:solidFill>
-                  <a:srgbClr val="4EC9B0"/>
-                </a:solidFill>
-                <a:latin typeface="Calibri"/>
-              </a:rPr>
-              <a:t>HINTS</a:t>
-            </a:r>
-          </a:p>
-        </p:txBody>
-      </p:sp>
-      <p:sp>
-        <p:nvSpPr>
-          <p:cNvPr id="8" name="TextBox 7"/>
+            <a:pPr>
+              <a:lnSpc>
+                <a:spcPts val="1360"/>
+              </a:lnSpc>
+            </a:pPr>
+            <a:r>
+              <a:rPr sz="900" b="0" i="0">
+                <a:solidFill>
+                  <a:srgbClr val="569CD6"/>
+                </a:solidFill>
+                <a:latin typeface="Consolas"/>
+              </a:rPr>
+              <a:t>double</a:t>
+            </a:r>
+            <a:r>
+              <a:rPr sz="900" b="0" i="0">
+                <a:solidFill>
+                  <a:srgbClr val="D4D4D4"/>
+                </a:solidFill>
+                <a:latin typeface="Consolas"/>
+              </a:rPr>
+              <a:t> </a:t>
+            </a:r>
+            <a:r>
+              <a:rPr sz="900" b="0" i="0">
+                <a:solidFill>
+                  <a:srgbClr val="DCDCAA"/>
+                </a:solidFill>
+                <a:latin typeface="Consolas"/>
+              </a:rPr>
+              <a:t>calculateAverage</a:t>
+            </a:r>
+            <a:r>
+              <a:rPr sz="900" b="0" i="0">
+                <a:solidFill>
+                  <a:srgbClr val="D4D4D4"/>
+                </a:solidFill>
+                <a:latin typeface="Consolas"/>
+              </a:rPr>
+              <a:t>(</a:t>
+            </a:r>
+            <a:r>
+              <a:rPr sz="900" b="0" i="0">
+                <a:solidFill>
+                  <a:srgbClr val="569CD6"/>
+                </a:solidFill>
+                <a:latin typeface="Consolas"/>
+              </a:rPr>
+              <a:t>double</a:t>
+            </a:r>
+            <a:r>
+              <a:rPr sz="900" b="0" i="0">
+                <a:solidFill>
+                  <a:srgbClr val="D4D4D4"/>
+                </a:solidFill>
+                <a:latin typeface="Consolas"/>
+              </a:rPr>
+              <a:t> </a:t>
+            </a:r>
+            <a:r>
+              <a:rPr sz="900" b="0" i="0">
+                <a:solidFill>
+                  <a:srgbClr val="D4D4D4"/>
+                </a:solidFill>
+                <a:latin typeface="Consolas"/>
+              </a:rPr>
+              <a:t>grades</a:t>
+            </a:r>
+            <a:r>
+              <a:rPr sz="900" b="0" i="0">
+                <a:solidFill>
+                  <a:srgbClr val="D4D4D4"/>
+                </a:solidFill>
+                <a:latin typeface="Consolas"/>
+              </a:rPr>
+              <a:t>[],</a:t>
+            </a:r>
+            <a:r>
+              <a:rPr sz="900" b="0" i="0">
+                <a:solidFill>
+                  <a:srgbClr val="D4D4D4"/>
+                </a:solidFill>
+                <a:latin typeface="Consolas"/>
+              </a:rPr>
+              <a:t> </a:t>
+            </a:r>
+            <a:r>
+              <a:rPr sz="900" b="0" i="0">
+                <a:solidFill>
+                  <a:srgbClr val="569CD6"/>
+                </a:solidFill>
+                <a:latin typeface="Consolas"/>
+              </a:rPr>
+              <a:t>int</a:t>
+            </a:r>
+            <a:r>
+              <a:rPr sz="900" b="0" i="0">
+                <a:solidFill>
+                  <a:srgbClr val="D4D4D4"/>
+                </a:solidFill>
+                <a:latin typeface="Consolas"/>
+              </a:rPr>
+              <a:t> </a:t>
+            </a:r>
+            <a:r>
+              <a:rPr sz="900" b="0" i="0">
+                <a:solidFill>
+                  <a:srgbClr val="D4D4D4"/>
+                </a:solidFill>
+                <a:latin typeface="Consolas"/>
+              </a:rPr>
+              <a:t>n</a:t>
+            </a:r>
+            <a:r>
+              <a:rPr sz="900" b="0" i="0">
+                <a:solidFill>
+                  <a:srgbClr val="D4D4D4"/>
+                </a:solidFill>
+                <a:latin typeface="Consolas"/>
+              </a:rPr>
+              <a:t>)</a:t>
+            </a:r>
+            <a:r>
+              <a:rPr sz="900" b="0" i="0">
+                <a:solidFill>
+                  <a:srgbClr val="D4D4D4"/>
+                </a:solidFill>
+                <a:latin typeface="Consolas"/>
+              </a:rPr>
+              <a:t> </a:t>
+            </a:r>
+            <a:r>
+              <a:rPr sz="900" b="0" i="0">
+                <a:solidFill>
+                  <a:srgbClr val="D4D4D4"/>
+                </a:solidFill>
+                <a:latin typeface="Consolas"/>
+              </a:rPr>
+              <a:t>{</a:t>
+            </a:r>
+          </a:p>
+          <a:p>
+            <a:pPr>
+              <a:lnSpc>
+                <a:spcPts val="1360"/>
+              </a:lnSpc>
+            </a:pPr>
+            <a:r>
+              <a:rPr sz="900" b="0" i="0">
+                <a:solidFill>
+                  <a:srgbClr val="D4D4D4"/>
+                </a:solidFill>
+                <a:latin typeface="Consolas"/>
+              </a:rPr>
+              <a:t>    </a:t>
+            </a:r>
+            <a:r>
+              <a:rPr sz="900" b="0" i="0">
+                <a:solidFill>
+                  <a:srgbClr val="569CD6"/>
+                </a:solidFill>
+                <a:latin typeface="Consolas"/>
+              </a:rPr>
+              <a:t>double</a:t>
+            </a:r>
+            <a:r>
+              <a:rPr sz="900" b="0" i="0">
+                <a:solidFill>
+                  <a:srgbClr val="D4D4D4"/>
+                </a:solidFill>
+                <a:latin typeface="Consolas"/>
+              </a:rPr>
+              <a:t> </a:t>
+            </a:r>
+            <a:r>
+              <a:rPr sz="900" b="0" i="0">
+                <a:solidFill>
+                  <a:srgbClr val="D4D4D4"/>
+                </a:solidFill>
+                <a:latin typeface="Consolas"/>
+              </a:rPr>
+              <a:t>sum</a:t>
+            </a:r>
+            <a:r>
+              <a:rPr sz="900" b="0" i="0">
+                <a:solidFill>
+                  <a:srgbClr val="D4D4D4"/>
+                </a:solidFill>
+                <a:latin typeface="Consolas"/>
+              </a:rPr>
+              <a:t> </a:t>
+            </a:r>
+            <a:r>
+              <a:rPr sz="900" b="0" i="0">
+                <a:solidFill>
+                  <a:srgbClr val="D4D4D4"/>
+                </a:solidFill>
+                <a:latin typeface="Consolas"/>
+              </a:rPr>
+              <a:t>=</a:t>
+            </a:r>
+            <a:r>
+              <a:rPr sz="900" b="0" i="0">
+                <a:solidFill>
+                  <a:srgbClr val="D4D4D4"/>
+                </a:solidFill>
+                <a:latin typeface="Consolas"/>
+              </a:rPr>
+              <a:t> </a:t>
+            </a:r>
+            <a:r>
+              <a:rPr sz="900" b="0" i="0">
+                <a:solidFill>
+                  <a:srgbClr val="B5CEA8"/>
+                </a:solidFill>
+                <a:latin typeface="Consolas"/>
+              </a:rPr>
+              <a:t>0</a:t>
+            </a:r>
+            <a:r>
+              <a:rPr sz="900" b="0" i="0">
+                <a:solidFill>
+                  <a:srgbClr val="D4D4D4"/>
+                </a:solidFill>
+                <a:latin typeface="Consolas"/>
+              </a:rPr>
+              <a:t>;</a:t>
+            </a:r>
+          </a:p>
+          <a:p>
+            <a:pPr>
+              <a:lnSpc>
+                <a:spcPts val="1360"/>
+              </a:lnSpc>
+            </a:pPr>
+            <a:r>
+              <a:rPr sz="900" b="0" i="0">
+                <a:solidFill>
+                  <a:srgbClr val="D4D4D4"/>
+                </a:solidFill>
+                <a:latin typeface="Consolas"/>
+              </a:rPr>
+              <a:t>    </a:t>
+            </a:r>
+            <a:r>
+              <a:rPr sz="900" b="0" i="0">
+                <a:solidFill>
+                  <a:srgbClr val="569CD6"/>
+                </a:solidFill>
+                <a:latin typeface="Consolas"/>
+              </a:rPr>
+              <a:t>for</a:t>
+            </a:r>
+            <a:r>
+              <a:rPr sz="900" b="0" i="0">
+                <a:solidFill>
+                  <a:srgbClr val="D4D4D4"/>
+                </a:solidFill>
+                <a:latin typeface="Consolas"/>
+              </a:rPr>
+              <a:t> </a:t>
+            </a:r>
+            <a:r>
+              <a:rPr sz="900" b="0" i="0">
+                <a:solidFill>
+                  <a:srgbClr val="D4D4D4"/>
+                </a:solidFill>
+                <a:latin typeface="Consolas"/>
+              </a:rPr>
+              <a:t>(</a:t>
+            </a:r>
+            <a:r>
+              <a:rPr sz="900" b="0" i="0">
+                <a:solidFill>
+                  <a:srgbClr val="569CD6"/>
+                </a:solidFill>
+                <a:latin typeface="Consolas"/>
+              </a:rPr>
+              <a:t>int</a:t>
+            </a:r>
+            <a:r>
+              <a:rPr sz="900" b="0" i="0">
+                <a:solidFill>
+                  <a:srgbClr val="D4D4D4"/>
+                </a:solidFill>
+                <a:latin typeface="Consolas"/>
+              </a:rPr>
+              <a:t> </a:t>
+            </a:r>
+            <a:r>
+              <a:rPr sz="900" b="0" i="0">
+                <a:solidFill>
+                  <a:srgbClr val="D4D4D4"/>
+                </a:solidFill>
+                <a:latin typeface="Consolas"/>
+              </a:rPr>
+              <a:t>i</a:t>
+            </a:r>
+            <a:r>
+              <a:rPr sz="900" b="0" i="0">
+                <a:solidFill>
+                  <a:srgbClr val="D4D4D4"/>
+                </a:solidFill>
+                <a:latin typeface="Consolas"/>
+              </a:rPr>
+              <a:t> </a:t>
+            </a:r>
+            <a:r>
+              <a:rPr sz="900" b="0" i="0">
+                <a:solidFill>
+                  <a:srgbClr val="D4D4D4"/>
+                </a:solidFill>
+                <a:latin typeface="Consolas"/>
+              </a:rPr>
+              <a:t>=</a:t>
+            </a:r>
+            <a:r>
+              <a:rPr sz="900" b="0" i="0">
+                <a:solidFill>
+                  <a:srgbClr val="D4D4D4"/>
+                </a:solidFill>
+                <a:latin typeface="Consolas"/>
+              </a:rPr>
+              <a:t> </a:t>
+            </a:r>
+            <a:r>
+              <a:rPr sz="900" b="0" i="0">
+                <a:solidFill>
+                  <a:srgbClr val="B5CEA8"/>
+                </a:solidFill>
+                <a:latin typeface="Consolas"/>
+              </a:rPr>
+              <a:t>0</a:t>
+            </a:r>
+            <a:r>
+              <a:rPr sz="900" b="0" i="0">
+                <a:solidFill>
+                  <a:srgbClr val="D4D4D4"/>
+                </a:solidFill>
+                <a:latin typeface="Consolas"/>
+              </a:rPr>
+              <a:t>;</a:t>
+            </a:r>
+            <a:r>
+              <a:rPr sz="900" b="0" i="0">
+                <a:solidFill>
+                  <a:srgbClr val="D4D4D4"/>
+                </a:solidFill>
+                <a:latin typeface="Consolas"/>
+              </a:rPr>
+              <a:t> </a:t>
+            </a:r>
+            <a:r>
+              <a:rPr sz="900" b="0" i="0">
+                <a:solidFill>
+                  <a:srgbClr val="D4D4D4"/>
+                </a:solidFill>
+                <a:latin typeface="Consolas"/>
+              </a:rPr>
+              <a:t>i</a:t>
+            </a:r>
+            <a:r>
+              <a:rPr sz="900" b="0" i="0">
+                <a:solidFill>
+                  <a:srgbClr val="D4D4D4"/>
+                </a:solidFill>
+                <a:latin typeface="Consolas"/>
+              </a:rPr>
+              <a:t> </a:t>
+            </a:r>
+            <a:r>
+              <a:rPr sz="900" b="0" i="0">
+                <a:solidFill>
+                  <a:srgbClr val="D4D4D4"/>
+                </a:solidFill>
+                <a:latin typeface="Consolas"/>
+              </a:rPr>
+              <a:t>&lt;</a:t>
+            </a:r>
+            <a:r>
+              <a:rPr sz="900" b="0" i="0">
+                <a:solidFill>
+                  <a:srgbClr val="D4D4D4"/>
+                </a:solidFill>
+                <a:latin typeface="Consolas"/>
+              </a:rPr>
+              <a:t> </a:t>
+            </a:r>
+            <a:r>
+              <a:rPr sz="900" b="0" i="0">
+                <a:solidFill>
+                  <a:srgbClr val="D4D4D4"/>
+                </a:solidFill>
+                <a:latin typeface="Consolas"/>
+              </a:rPr>
+              <a:t>n</a:t>
+            </a:r>
+            <a:r>
+              <a:rPr sz="900" b="0" i="0">
+                <a:solidFill>
+                  <a:srgbClr val="D4D4D4"/>
+                </a:solidFill>
+                <a:latin typeface="Consolas"/>
+              </a:rPr>
+              <a:t>;</a:t>
+            </a:r>
+            <a:r>
+              <a:rPr sz="900" b="0" i="0">
+                <a:solidFill>
+                  <a:srgbClr val="D4D4D4"/>
+                </a:solidFill>
+                <a:latin typeface="Consolas"/>
+              </a:rPr>
+              <a:t> </a:t>
+            </a:r>
+            <a:r>
+              <a:rPr sz="900" b="0" i="0">
+                <a:solidFill>
+                  <a:srgbClr val="D4D4D4"/>
+                </a:solidFill>
+                <a:latin typeface="Consolas"/>
+              </a:rPr>
+              <a:t>i</a:t>
+            </a:r>
+            <a:r>
+              <a:rPr sz="900" b="0" i="0">
+                <a:solidFill>
+                  <a:srgbClr val="D4D4D4"/>
+                </a:solidFill>
+                <a:latin typeface="Consolas"/>
+              </a:rPr>
+              <a:t>++)</a:t>
+            </a:r>
+            <a:r>
+              <a:rPr sz="900" b="0" i="0">
+                <a:solidFill>
+                  <a:srgbClr val="D4D4D4"/>
+                </a:solidFill>
+                <a:latin typeface="Consolas"/>
+              </a:rPr>
+              <a:t> </a:t>
+            </a:r>
+            <a:r>
+              <a:rPr sz="900" b="0" i="0">
+                <a:solidFill>
+                  <a:srgbClr val="D4D4D4"/>
+                </a:solidFill>
+                <a:latin typeface="Consolas"/>
+              </a:rPr>
+              <a:t>sum</a:t>
+            </a:r>
+            <a:r>
+              <a:rPr sz="900" b="0" i="0">
+                <a:solidFill>
+                  <a:srgbClr val="D4D4D4"/>
+                </a:solidFill>
+                <a:latin typeface="Consolas"/>
+              </a:rPr>
+              <a:t> </a:t>
+            </a:r>
+            <a:r>
+              <a:rPr sz="900" b="0" i="0">
+                <a:solidFill>
+                  <a:srgbClr val="D4D4D4"/>
+                </a:solidFill>
+                <a:latin typeface="Consolas"/>
+              </a:rPr>
+              <a:t>+=</a:t>
+            </a:r>
+            <a:r>
+              <a:rPr sz="900" b="0" i="0">
+                <a:solidFill>
+                  <a:srgbClr val="D4D4D4"/>
+                </a:solidFill>
+                <a:latin typeface="Consolas"/>
+              </a:rPr>
+              <a:t> </a:t>
+            </a:r>
+            <a:r>
+              <a:rPr sz="900" b="0" i="0">
+                <a:solidFill>
+                  <a:srgbClr val="D4D4D4"/>
+                </a:solidFill>
+                <a:latin typeface="Consolas"/>
+              </a:rPr>
+              <a:t>grades</a:t>
+            </a:r>
+            <a:r>
+              <a:rPr sz="900" b="0" i="0">
+                <a:solidFill>
+                  <a:srgbClr val="D4D4D4"/>
+                </a:solidFill>
+                <a:latin typeface="Consolas"/>
+              </a:rPr>
+              <a:t>[</a:t>
+            </a:r>
+            <a:r>
+              <a:rPr sz="900" b="0" i="0">
+                <a:solidFill>
+                  <a:srgbClr val="D4D4D4"/>
+                </a:solidFill>
+                <a:latin typeface="Consolas"/>
+              </a:rPr>
+              <a:t>i</a:t>
+            </a:r>
+            <a:r>
+              <a:rPr sz="900" b="0" i="0">
+                <a:solidFill>
+                  <a:srgbClr val="D4D4D4"/>
+                </a:solidFill>
+                <a:latin typeface="Consolas"/>
+              </a:rPr>
+              <a:t>];</a:t>
+            </a:r>
+          </a:p>
+          <a:p>
+            <a:pPr>
+              <a:lnSpc>
+                <a:spcPts val="1360"/>
+              </a:lnSpc>
+            </a:pPr>
+            <a:r>
+              <a:rPr sz="900" b="0" i="0">
+                <a:solidFill>
+                  <a:srgbClr val="D4D4D4"/>
+                </a:solidFill>
+                <a:latin typeface="Consolas"/>
+              </a:rPr>
+              <a:t>    </a:t>
+            </a:r>
+            <a:r>
+              <a:rPr sz="900" b="0" i="0">
+                <a:solidFill>
+                  <a:srgbClr val="569CD6"/>
+                </a:solidFill>
+                <a:latin typeface="Consolas"/>
+              </a:rPr>
+              <a:t>return</a:t>
+            </a:r>
+            <a:r>
+              <a:rPr sz="900" b="0" i="0">
+                <a:solidFill>
+                  <a:srgbClr val="D4D4D4"/>
+                </a:solidFill>
+                <a:latin typeface="Consolas"/>
+              </a:rPr>
+              <a:t> </a:t>
+            </a:r>
+            <a:r>
+              <a:rPr sz="900" b="0" i="0">
+                <a:solidFill>
+                  <a:srgbClr val="D4D4D4"/>
+                </a:solidFill>
+                <a:latin typeface="Consolas"/>
+              </a:rPr>
+              <a:t>sum</a:t>
+            </a:r>
+            <a:r>
+              <a:rPr sz="900" b="0" i="0">
+                <a:solidFill>
+                  <a:srgbClr val="D4D4D4"/>
+                </a:solidFill>
+                <a:latin typeface="Consolas"/>
+              </a:rPr>
+              <a:t> </a:t>
+            </a:r>
+            <a:r>
+              <a:rPr sz="900" b="0" i="0">
+                <a:solidFill>
+                  <a:srgbClr val="D4D4D4"/>
+                </a:solidFill>
+                <a:latin typeface="Consolas"/>
+              </a:rPr>
+              <a:t>/</a:t>
+            </a:r>
+            <a:r>
+              <a:rPr sz="900" b="0" i="0">
+                <a:solidFill>
+                  <a:srgbClr val="D4D4D4"/>
+                </a:solidFill>
+                <a:latin typeface="Consolas"/>
+              </a:rPr>
+              <a:t> </a:t>
+            </a:r>
+            <a:r>
+              <a:rPr sz="900" b="0" i="0">
+                <a:solidFill>
+                  <a:srgbClr val="D4D4D4"/>
+                </a:solidFill>
+                <a:latin typeface="Consolas"/>
+              </a:rPr>
+              <a:t>n</a:t>
+            </a:r>
+            <a:r>
+              <a:rPr sz="900" b="0" i="0">
+                <a:solidFill>
+                  <a:srgbClr val="D4D4D4"/>
+                </a:solidFill>
+                <a:latin typeface="Consolas"/>
+              </a:rPr>
+              <a:t>;</a:t>
+            </a:r>
+          </a:p>
+          <a:p>
+            <a:pPr>
+              <a:lnSpc>
+                <a:spcPts val="1360"/>
+              </a:lnSpc>
+            </a:pPr>
+            <a:r>
+              <a:rPr sz="900" b="0" i="0">
+                <a:solidFill>
+                  <a:srgbClr val="D4D4D4"/>
+                </a:solidFill>
+                <a:latin typeface="Consolas"/>
+              </a:rPr>
+              <a:t>}</a:t>
+            </a:r>
+          </a:p>
+          <a:p>
+            <a:pPr>
+              <a:lnSpc>
+                <a:spcPts val="1360"/>
+              </a:lnSpc>
+            </a:pPr>
+            <a:r>
+              <a:rPr sz="900" b="0" i="0">
+                <a:solidFill>
+                  <a:srgbClr val="569CD6"/>
+                </a:solidFill>
+                <a:latin typeface="Consolas"/>
+              </a:rPr>
+              <a:t>char</a:t>
+            </a:r>
+            <a:r>
+              <a:rPr sz="900" b="0" i="0">
+                <a:solidFill>
+                  <a:srgbClr val="D4D4D4"/>
+                </a:solidFill>
+                <a:latin typeface="Consolas"/>
+              </a:rPr>
+              <a:t> </a:t>
+            </a:r>
+            <a:r>
+              <a:rPr sz="900" b="0" i="0">
+                <a:solidFill>
+                  <a:srgbClr val="DCDCAA"/>
+                </a:solidFill>
+                <a:latin typeface="Consolas"/>
+              </a:rPr>
+              <a:t>getLetterGrade</a:t>
+            </a:r>
+            <a:r>
+              <a:rPr sz="900" b="0" i="0">
+                <a:solidFill>
+                  <a:srgbClr val="D4D4D4"/>
+                </a:solidFill>
+                <a:latin typeface="Consolas"/>
+              </a:rPr>
+              <a:t>(</a:t>
+            </a:r>
+            <a:r>
+              <a:rPr sz="900" b="0" i="0">
+                <a:solidFill>
+                  <a:srgbClr val="569CD6"/>
+                </a:solidFill>
+                <a:latin typeface="Consolas"/>
+              </a:rPr>
+              <a:t>double</a:t>
+            </a:r>
+            <a:r>
+              <a:rPr sz="900" b="0" i="0">
+                <a:solidFill>
+                  <a:srgbClr val="D4D4D4"/>
+                </a:solidFill>
+                <a:latin typeface="Consolas"/>
+              </a:rPr>
+              <a:t> </a:t>
+            </a:r>
+            <a:r>
+              <a:rPr sz="900" b="0" i="0">
+                <a:solidFill>
+                  <a:srgbClr val="D4D4D4"/>
+                </a:solidFill>
+                <a:latin typeface="Consolas"/>
+              </a:rPr>
+              <a:t>avg</a:t>
+            </a:r>
+            <a:r>
+              <a:rPr sz="900" b="0" i="0">
+                <a:solidFill>
+                  <a:srgbClr val="D4D4D4"/>
+                </a:solidFill>
+                <a:latin typeface="Consolas"/>
+              </a:rPr>
+              <a:t>)</a:t>
+            </a:r>
+            <a:r>
+              <a:rPr sz="900" b="0" i="0">
+                <a:solidFill>
+                  <a:srgbClr val="D4D4D4"/>
+                </a:solidFill>
+                <a:latin typeface="Consolas"/>
+              </a:rPr>
+              <a:t> </a:t>
+            </a:r>
+            <a:r>
+              <a:rPr sz="900" b="0" i="0">
+                <a:solidFill>
+                  <a:srgbClr val="D4D4D4"/>
+                </a:solidFill>
+                <a:latin typeface="Consolas"/>
+              </a:rPr>
+              <a:t>{</a:t>
+            </a:r>
+          </a:p>
+          <a:p>
+            <a:pPr>
+              <a:lnSpc>
+                <a:spcPts val="1360"/>
+              </a:lnSpc>
+            </a:pPr>
+            <a:r>
+              <a:rPr sz="900" b="0" i="0">
+                <a:solidFill>
+                  <a:srgbClr val="D4D4D4"/>
+                </a:solidFill>
+                <a:latin typeface="Consolas"/>
+              </a:rPr>
+              <a:t>    </a:t>
+            </a:r>
+            <a:r>
+              <a:rPr sz="900" b="0" i="0">
+                <a:solidFill>
+                  <a:srgbClr val="569CD6"/>
+                </a:solidFill>
+                <a:latin typeface="Consolas"/>
+              </a:rPr>
+              <a:t>if</a:t>
+            </a:r>
+            <a:r>
+              <a:rPr sz="900" b="0" i="0">
+                <a:solidFill>
+                  <a:srgbClr val="D4D4D4"/>
+                </a:solidFill>
+                <a:latin typeface="Consolas"/>
+              </a:rPr>
+              <a:t> </a:t>
+            </a:r>
+            <a:r>
+              <a:rPr sz="900" b="0" i="0">
+                <a:solidFill>
+                  <a:srgbClr val="D4D4D4"/>
+                </a:solidFill>
+                <a:latin typeface="Consolas"/>
+              </a:rPr>
+              <a:t>(</a:t>
+            </a:r>
+            <a:r>
+              <a:rPr sz="900" b="0" i="0">
+                <a:solidFill>
+                  <a:srgbClr val="D4D4D4"/>
+                </a:solidFill>
+                <a:latin typeface="Consolas"/>
+              </a:rPr>
+              <a:t>avg</a:t>
+            </a:r>
+            <a:r>
+              <a:rPr sz="900" b="0" i="0">
+                <a:solidFill>
+                  <a:srgbClr val="D4D4D4"/>
+                </a:solidFill>
+                <a:latin typeface="Consolas"/>
+              </a:rPr>
+              <a:t> </a:t>
+            </a:r>
+            <a:r>
+              <a:rPr sz="900" b="0" i="0">
+                <a:solidFill>
+                  <a:srgbClr val="D4D4D4"/>
+                </a:solidFill>
+                <a:latin typeface="Consolas"/>
+              </a:rPr>
+              <a:t>&gt;=</a:t>
+            </a:r>
+            <a:r>
+              <a:rPr sz="900" b="0" i="0">
+                <a:solidFill>
+                  <a:srgbClr val="D4D4D4"/>
+                </a:solidFill>
+                <a:latin typeface="Consolas"/>
+              </a:rPr>
+              <a:t> </a:t>
+            </a:r>
+            <a:r>
+              <a:rPr sz="900" b="0" i="0">
+                <a:solidFill>
+                  <a:srgbClr val="B5CEA8"/>
+                </a:solidFill>
+                <a:latin typeface="Consolas"/>
+              </a:rPr>
+              <a:t>90</a:t>
+            </a:r>
+            <a:r>
+              <a:rPr sz="900" b="0" i="0">
+                <a:solidFill>
+                  <a:srgbClr val="D4D4D4"/>
+                </a:solidFill>
+                <a:latin typeface="Consolas"/>
+              </a:rPr>
+              <a:t>)</a:t>
+            </a:r>
+            <a:r>
+              <a:rPr sz="900" b="0" i="0">
+                <a:solidFill>
+                  <a:srgbClr val="D4D4D4"/>
+                </a:solidFill>
+                <a:latin typeface="Consolas"/>
+              </a:rPr>
+              <a:t> </a:t>
+            </a:r>
+            <a:r>
+              <a:rPr sz="900" b="0" i="0">
+                <a:solidFill>
+                  <a:srgbClr val="569CD6"/>
+                </a:solidFill>
+                <a:latin typeface="Consolas"/>
+              </a:rPr>
+              <a:t>return</a:t>
+            </a:r>
+            <a:r>
+              <a:rPr sz="900" b="0" i="0">
+                <a:solidFill>
+                  <a:srgbClr val="D4D4D4"/>
+                </a:solidFill>
+                <a:latin typeface="Consolas"/>
+              </a:rPr>
+              <a:t> </a:t>
+            </a:r>
+            <a:r>
+              <a:rPr sz="900" b="0" i="0">
+                <a:solidFill>
+                  <a:srgbClr val="CE9178"/>
+                </a:solidFill>
+                <a:latin typeface="Consolas"/>
+              </a:rPr>
+              <a:t>'A'</a:t>
+            </a:r>
+            <a:r>
+              <a:rPr sz="900" b="0" i="0">
+                <a:solidFill>
+                  <a:srgbClr val="D4D4D4"/>
+                </a:solidFill>
+                <a:latin typeface="Consolas"/>
+              </a:rPr>
+              <a:t>;</a:t>
+            </a:r>
+          </a:p>
+          <a:p>
+            <a:pPr>
+              <a:lnSpc>
+                <a:spcPts val="1360"/>
+              </a:lnSpc>
+            </a:pPr>
+            <a:r>
+              <a:rPr sz="900" b="0" i="0">
+                <a:solidFill>
+                  <a:srgbClr val="D4D4D4"/>
+                </a:solidFill>
+                <a:latin typeface="Consolas"/>
+              </a:rPr>
+              <a:t>    </a:t>
+            </a:r>
+            <a:r>
+              <a:rPr sz="900" b="0" i="0">
+                <a:solidFill>
+                  <a:srgbClr val="569CD6"/>
+                </a:solidFill>
+                <a:latin typeface="Consolas"/>
+              </a:rPr>
+              <a:t>if</a:t>
+            </a:r>
+            <a:r>
+              <a:rPr sz="900" b="0" i="0">
+                <a:solidFill>
+                  <a:srgbClr val="D4D4D4"/>
+                </a:solidFill>
+                <a:latin typeface="Consolas"/>
+              </a:rPr>
+              <a:t> </a:t>
+            </a:r>
+            <a:r>
+              <a:rPr sz="900" b="0" i="0">
+                <a:solidFill>
+                  <a:srgbClr val="D4D4D4"/>
+                </a:solidFill>
+                <a:latin typeface="Consolas"/>
+              </a:rPr>
+              <a:t>(</a:t>
+            </a:r>
+            <a:r>
+              <a:rPr sz="900" b="0" i="0">
+                <a:solidFill>
+                  <a:srgbClr val="D4D4D4"/>
+                </a:solidFill>
+                <a:latin typeface="Consolas"/>
+              </a:rPr>
+              <a:t>avg</a:t>
+            </a:r>
+            <a:r>
+              <a:rPr sz="900" b="0" i="0">
+                <a:solidFill>
+                  <a:srgbClr val="D4D4D4"/>
+                </a:solidFill>
+                <a:latin typeface="Consolas"/>
+              </a:rPr>
+              <a:t> </a:t>
+            </a:r>
+            <a:r>
+              <a:rPr sz="900" b="0" i="0">
+                <a:solidFill>
+                  <a:srgbClr val="D4D4D4"/>
+                </a:solidFill>
+                <a:latin typeface="Consolas"/>
+              </a:rPr>
+              <a:t>&gt;=</a:t>
+            </a:r>
+            <a:r>
+              <a:rPr sz="900" b="0" i="0">
+                <a:solidFill>
+                  <a:srgbClr val="D4D4D4"/>
+                </a:solidFill>
+                <a:latin typeface="Consolas"/>
+              </a:rPr>
+              <a:t> </a:t>
+            </a:r>
+            <a:r>
+              <a:rPr sz="900" b="0" i="0">
+                <a:solidFill>
+                  <a:srgbClr val="B5CEA8"/>
+                </a:solidFill>
+                <a:latin typeface="Consolas"/>
+              </a:rPr>
+              <a:t>80</a:t>
+            </a:r>
+            <a:r>
+              <a:rPr sz="900" b="0" i="0">
+                <a:solidFill>
+                  <a:srgbClr val="D4D4D4"/>
+                </a:solidFill>
+                <a:latin typeface="Consolas"/>
+              </a:rPr>
+              <a:t>)</a:t>
+            </a:r>
+            <a:r>
+              <a:rPr sz="900" b="0" i="0">
+                <a:solidFill>
+                  <a:srgbClr val="D4D4D4"/>
+                </a:solidFill>
+                <a:latin typeface="Consolas"/>
+              </a:rPr>
+              <a:t> </a:t>
+            </a:r>
+            <a:r>
+              <a:rPr sz="900" b="0" i="0">
+                <a:solidFill>
+                  <a:srgbClr val="569CD6"/>
+                </a:solidFill>
+                <a:latin typeface="Consolas"/>
+              </a:rPr>
+              <a:t>return</a:t>
+            </a:r>
+            <a:r>
+              <a:rPr sz="900" b="0" i="0">
+                <a:solidFill>
+                  <a:srgbClr val="D4D4D4"/>
+                </a:solidFill>
+                <a:latin typeface="Consolas"/>
+              </a:rPr>
+              <a:t> </a:t>
+            </a:r>
+            <a:r>
+              <a:rPr sz="900" b="0" i="0">
+                <a:solidFill>
+                  <a:srgbClr val="CE9178"/>
+                </a:solidFill>
+                <a:latin typeface="Consolas"/>
+              </a:rPr>
+              <a:t>'B'</a:t>
+            </a:r>
+            <a:r>
+              <a:rPr sz="900" b="0" i="0">
+                <a:solidFill>
+                  <a:srgbClr val="D4D4D4"/>
+                </a:solidFill>
+                <a:latin typeface="Consolas"/>
+              </a:rPr>
+              <a:t>;</a:t>
+            </a:r>
+          </a:p>
+          <a:p>
+            <a:pPr>
+              <a:lnSpc>
+                <a:spcPts val="1360"/>
+              </a:lnSpc>
+            </a:pPr>
+            <a:r>
+              <a:rPr sz="900" b="0" i="0">
+                <a:solidFill>
+                  <a:srgbClr val="D4D4D4"/>
+                </a:solidFill>
+                <a:latin typeface="Consolas"/>
+              </a:rPr>
+              <a:t>    </a:t>
+            </a:r>
+            <a:r>
+              <a:rPr sz="900" b="0" i="0">
+                <a:solidFill>
+                  <a:srgbClr val="569CD6"/>
+                </a:solidFill>
+                <a:latin typeface="Consolas"/>
+              </a:rPr>
+              <a:t>if</a:t>
+            </a:r>
+            <a:r>
+              <a:rPr sz="900" b="0" i="0">
+                <a:solidFill>
+                  <a:srgbClr val="D4D4D4"/>
+                </a:solidFill>
+                <a:latin typeface="Consolas"/>
+              </a:rPr>
+              <a:t> </a:t>
+            </a:r>
+            <a:r>
+              <a:rPr sz="900" b="0" i="0">
+                <a:solidFill>
+                  <a:srgbClr val="D4D4D4"/>
+                </a:solidFill>
+                <a:latin typeface="Consolas"/>
+              </a:rPr>
+              <a:t>(</a:t>
+            </a:r>
+            <a:r>
+              <a:rPr sz="900" b="0" i="0">
+                <a:solidFill>
+                  <a:srgbClr val="D4D4D4"/>
+                </a:solidFill>
+                <a:latin typeface="Consolas"/>
+              </a:rPr>
+              <a:t>avg</a:t>
+            </a:r>
+            <a:r>
+              <a:rPr sz="900" b="0" i="0">
+                <a:solidFill>
+                  <a:srgbClr val="D4D4D4"/>
+                </a:solidFill>
+                <a:latin typeface="Consolas"/>
+              </a:rPr>
+              <a:t> </a:t>
+            </a:r>
+            <a:r>
+              <a:rPr sz="900" b="0" i="0">
+                <a:solidFill>
+                  <a:srgbClr val="D4D4D4"/>
+                </a:solidFill>
+                <a:latin typeface="Consolas"/>
+              </a:rPr>
+              <a:t>&gt;=</a:t>
+            </a:r>
+            <a:r>
+              <a:rPr sz="900" b="0" i="0">
+                <a:solidFill>
+                  <a:srgbClr val="D4D4D4"/>
+                </a:solidFill>
+                <a:latin typeface="Consolas"/>
+              </a:rPr>
+              <a:t> </a:t>
+            </a:r>
+            <a:r>
+              <a:rPr sz="900" b="0" i="0">
+                <a:solidFill>
+                  <a:srgbClr val="B5CEA8"/>
+                </a:solidFill>
+                <a:latin typeface="Consolas"/>
+              </a:rPr>
+              <a:t>70</a:t>
+            </a:r>
+            <a:r>
+              <a:rPr sz="900" b="0" i="0">
+                <a:solidFill>
+                  <a:srgbClr val="D4D4D4"/>
+                </a:solidFill>
+                <a:latin typeface="Consolas"/>
+              </a:rPr>
+              <a:t>)</a:t>
+            </a:r>
+            <a:r>
+              <a:rPr sz="900" b="0" i="0">
+                <a:solidFill>
+                  <a:srgbClr val="D4D4D4"/>
+                </a:solidFill>
+                <a:latin typeface="Consolas"/>
+              </a:rPr>
+              <a:t> </a:t>
+            </a:r>
+            <a:r>
+              <a:rPr sz="900" b="0" i="0">
+                <a:solidFill>
+                  <a:srgbClr val="569CD6"/>
+                </a:solidFill>
+                <a:latin typeface="Consolas"/>
+              </a:rPr>
+              <a:t>return</a:t>
+            </a:r>
+            <a:r>
+              <a:rPr sz="900" b="0" i="0">
+                <a:solidFill>
+                  <a:srgbClr val="D4D4D4"/>
+                </a:solidFill>
+                <a:latin typeface="Consolas"/>
+              </a:rPr>
+              <a:t> </a:t>
+            </a:r>
+            <a:r>
+              <a:rPr sz="900" b="0" i="0">
+                <a:solidFill>
+                  <a:srgbClr val="CE9178"/>
+                </a:solidFill>
+                <a:latin typeface="Consolas"/>
+              </a:rPr>
+              <a:t>'C'</a:t>
+            </a:r>
+            <a:r>
+              <a:rPr sz="900" b="0" i="0">
+                <a:solidFill>
+                  <a:srgbClr val="D4D4D4"/>
+                </a:solidFill>
+                <a:latin typeface="Consolas"/>
+              </a:rPr>
+              <a:t>;</a:t>
+            </a:r>
+          </a:p>
+          <a:p>
+            <a:pPr>
+              <a:lnSpc>
+                <a:spcPts val="1360"/>
+              </a:lnSpc>
+            </a:pPr>
+            <a:r>
+              <a:rPr sz="900" b="0" i="0">
+                <a:solidFill>
+                  <a:srgbClr val="D4D4D4"/>
+                </a:solidFill>
+                <a:latin typeface="Consolas"/>
+              </a:rPr>
+              <a:t>    </a:t>
+            </a:r>
+            <a:r>
+              <a:rPr sz="900" b="0" i="0">
+                <a:solidFill>
+                  <a:srgbClr val="569CD6"/>
+                </a:solidFill>
+                <a:latin typeface="Consolas"/>
+              </a:rPr>
+              <a:t>return</a:t>
+            </a:r>
+            <a:r>
+              <a:rPr sz="900" b="0" i="0">
+                <a:solidFill>
+                  <a:srgbClr val="D4D4D4"/>
+                </a:solidFill>
+                <a:latin typeface="Consolas"/>
+              </a:rPr>
+              <a:t> </a:t>
+            </a:r>
+            <a:r>
+              <a:rPr sz="900" b="0" i="0">
+                <a:solidFill>
+                  <a:srgbClr val="CE9178"/>
+                </a:solidFill>
+                <a:latin typeface="Consolas"/>
+              </a:rPr>
+              <a:t>'F'</a:t>
+            </a:r>
+            <a:r>
+              <a:rPr sz="900" b="0" i="0">
+                <a:solidFill>
+                  <a:srgbClr val="D4D4D4"/>
+                </a:solidFill>
+                <a:latin typeface="Consolas"/>
+              </a:rPr>
+              <a:t>;</a:t>
+            </a:r>
+          </a:p>
+          <a:p>
+            <a:pPr>
+              <a:lnSpc>
+                <a:spcPts val="1360"/>
+              </a:lnSpc>
+            </a:pPr>
+            <a:r>
+              <a:rPr sz="900" b="0" i="0">
+                <a:solidFill>
+                  <a:srgbClr val="D4D4D4"/>
+                </a:solidFill>
+                <a:latin typeface="Consolas"/>
+              </a:rPr>
+              <a:t>}</a:t>
+            </a:r>
+          </a:p>
+          <a:p>
+            <a:pPr>
+              <a:lnSpc>
+                <a:spcPts val="1360"/>
+              </a:lnSpc>
+            </a:pPr>
+            <a:r>
+              <a:rPr sz="900" b="0" i="0">
+                <a:solidFill>
+                  <a:srgbClr val="569CD6"/>
+                </a:solidFill>
+                <a:latin typeface="Consolas"/>
+              </a:rPr>
+              <a:t>int</a:t>
+            </a:r>
+            <a:r>
+              <a:rPr sz="900" b="0" i="0">
+                <a:solidFill>
+                  <a:srgbClr val="D4D4D4"/>
+                </a:solidFill>
+                <a:latin typeface="Consolas"/>
+              </a:rPr>
+              <a:t> </a:t>
+            </a:r>
+            <a:r>
+              <a:rPr sz="900" b="0" i="0">
+                <a:solidFill>
+                  <a:srgbClr val="DCDCAA"/>
+                </a:solidFill>
+                <a:latin typeface="Consolas"/>
+              </a:rPr>
+              <a:t>main</a:t>
+            </a:r>
+            <a:r>
+              <a:rPr sz="900" b="0" i="0">
+                <a:solidFill>
+                  <a:srgbClr val="D4D4D4"/>
+                </a:solidFill>
+                <a:latin typeface="Consolas"/>
+              </a:rPr>
+              <a:t>()</a:t>
+            </a:r>
+            <a:r>
+              <a:rPr sz="900" b="0" i="0">
+                <a:solidFill>
+                  <a:srgbClr val="D4D4D4"/>
+                </a:solidFill>
+                <a:latin typeface="Consolas"/>
+              </a:rPr>
+              <a:t> </a:t>
+            </a:r>
+            <a:r>
+              <a:rPr sz="900" b="0" i="0">
+                <a:solidFill>
+                  <a:srgbClr val="D4D4D4"/>
+                </a:solidFill>
+                <a:latin typeface="Consolas"/>
+              </a:rPr>
+              <a:t>{</a:t>
+            </a:r>
+          </a:p>
+          <a:p>
+            <a:pPr>
+              <a:lnSpc>
+                <a:spcPts val="1360"/>
+              </a:lnSpc>
+            </a:pPr>
+            <a:r>
+              <a:rPr sz="900" b="0" i="0">
+                <a:solidFill>
+                  <a:srgbClr val="D4D4D4"/>
+                </a:solidFill>
+                <a:latin typeface="Consolas"/>
+              </a:rPr>
+              <a:t>    </a:t>
+            </a:r>
+            <a:r>
+              <a:rPr sz="900" b="0" i="0">
+                <a:solidFill>
+                  <a:srgbClr val="569CD6"/>
+                </a:solidFill>
+                <a:latin typeface="Consolas"/>
+              </a:rPr>
+              <a:t>double</a:t>
+            </a:r>
+            <a:r>
+              <a:rPr sz="900" b="0" i="0">
+                <a:solidFill>
+                  <a:srgbClr val="D4D4D4"/>
+                </a:solidFill>
+                <a:latin typeface="Consolas"/>
+              </a:rPr>
+              <a:t> </a:t>
+            </a:r>
+            <a:r>
+              <a:rPr sz="900" b="0" i="0">
+                <a:solidFill>
+                  <a:srgbClr val="D4D4D4"/>
+                </a:solidFill>
+                <a:latin typeface="Consolas"/>
+              </a:rPr>
+              <a:t>grades</a:t>
+            </a:r>
+            <a:r>
+              <a:rPr sz="900" b="0" i="0">
+                <a:solidFill>
+                  <a:srgbClr val="D4D4D4"/>
+                </a:solidFill>
+                <a:latin typeface="Consolas"/>
+              </a:rPr>
+              <a:t>[</a:t>
+            </a:r>
+            <a:r>
+              <a:rPr sz="900" b="0" i="0">
+                <a:solidFill>
+                  <a:srgbClr val="B5CEA8"/>
+                </a:solidFill>
+                <a:latin typeface="Consolas"/>
+              </a:rPr>
+              <a:t>3</a:t>
+            </a:r>
+            <a:r>
+              <a:rPr sz="900" b="0" i="0">
+                <a:solidFill>
+                  <a:srgbClr val="D4D4D4"/>
+                </a:solidFill>
+                <a:latin typeface="Consolas"/>
+              </a:rPr>
+              <a:t>]</a:t>
+            </a:r>
+            <a:r>
+              <a:rPr sz="900" b="0" i="0">
+                <a:solidFill>
+                  <a:srgbClr val="D4D4D4"/>
+                </a:solidFill>
+                <a:latin typeface="Consolas"/>
+              </a:rPr>
+              <a:t> </a:t>
+            </a:r>
+            <a:r>
+              <a:rPr sz="900" b="0" i="0">
+                <a:solidFill>
+                  <a:srgbClr val="D4D4D4"/>
+                </a:solidFill>
+                <a:latin typeface="Consolas"/>
+              </a:rPr>
+              <a:t>=</a:t>
+            </a:r>
+            <a:r>
+              <a:rPr sz="900" b="0" i="0">
+                <a:solidFill>
+                  <a:srgbClr val="D4D4D4"/>
+                </a:solidFill>
+                <a:latin typeface="Consolas"/>
+              </a:rPr>
+              <a:t> </a:t>
+            </a:r>
+            <a:r>
+              <a:rPr sz="900" b="0" i="0">
+                <a:solidFill>
+                  <a:srgbClr val="D4D4D4"/>
+                </a:solidFill>
+                <a:latin typeface="Consolas"/>
+              </a:rPr>
+              <a:t>{</a:t>
+            </a:r>
+            <a:r>
+              <a:rPr sz="900" b="0" i="0">
+                <a:solidFill>
+                  <a:srgbClr val="B5CEA8"/>
+                </a:solidFill>
+                <a:latin typeface="Consolas"/>
+              </a:rPr>
+              <a:t>88</a:t>
+            </a:r>
+            <a:r>
+              <a:rPr sz="900" b="0" i="0">
+                <a:solidFill>
+                  <a:srgbClr val="D4D4D4"/>
+                </a:solidFill>
+                <a:latin typeface="Consolas"/>
+              </a:rPr>
+              <a:t>,</a:t>
+            </a:r>
+            <a:r>
+              <a:rPr sz="900" b="0" i="0">
+                <a:solidFill>
+                  <a:srgbClr val="D4D4D4"/>
+                </a:solidFill>
+                <a:latin typeface="Consolas"/>
+              </a:rPr>
+              <a:t> </a:t>
+            </a:r>
+            <a:r>
+              <a:rPr sz="900" b="0" i="0">
+                <a:solidFill>
+                  <a:srgbClr val="B5CEA8"/>
+                </a:solidFill>
+                <a:latin typeface="Consolas"/>
+              </a:rPr>
+              <a:t>92</a:t>
+            </a:r>
+            <a:r>
+              <a:rPr sz="900" b="0" i="0">
+                <a:solidFill>
+                  <a:srgbClr val="D4D4D4"/>
+                </a:solidFill>
+                <a:latin typeface="Consolas"/>
+              </a:rPr>
+              <a:t>,</a:t>
+            </a:r>
+            <a:r>
+              <a:rPr sz="900" b="0" i="0">
+                <a:solidFill>
+                  <a:srgbClr val="D4D4D4"/>
+                </a:solidFill>
+                <a:latin typeface="Consolas"/>
+              </a:rPr>
+              <a:t> </a:t>
+            </a:r>
+            <a:r>
+              <a:rPr sz="900" b="0" i="0">
+                <a:solidFill>
+                  <a:srgbClr val="B5CEA8"/>
+                </a:solidFill>
+                <a:latin typeface="Consolas"/>
+              </a:rPr>
+              <a:t>79</a:t>
+            </a:r>
+            <a:r>
+              <a:rPr sz="900" b="0" i="0">
+                <a:solidFill>
+                  <a:srgbClr val="D4D4D4"/>
+                </a:solidFill>
+                <a:latin typeface="Consolas"/>
+              </a:rPr>
+              <a:t>};</a:t>
+            </a:r>
+          </a:p>
+          <a:p>
+            <a:pPr>
+              <a:lnSpc>
+                <a:spcPts val="1360"/>
+              </a:lnSpc>
+            </a:pPr>
+            <a:r>
+              <a:rPr sz="900" b="0" i="0">
+                <a:solidFill>
+                  <a:srgbClr val="D4D4D4"/>
+                </a:solidFill>
+                <a:latin typeface="Consolas"/>
+              </a:rPr>
+              <a:t>    </a:t>
+            </a:r>
+            <a:r>
+              <a:rPr sz="900" b="0" i="0">
+                <a:solidFill>
+                  <a:srgbClr val="569CD6"/>
+                </a:solidFill>
+                <a:latin typeface="Consolas"/>
+              </a:rPr>
+              <a:t>double</a:t>
+            </a:r>
+            <a:r>
+              <a:rPr sz="900" b="0" i="0">
+                <a:solidFill>
+                  <a:srgbClr val="D4D4D4"/>
+                </a:solidFill>
+                <a:latin typeface="Consolas"/>
+              </a:rPr>
+              <a:t> </a:t>
+            </a:r>
+            <a:r>
+              <a:rPr sz="900" b="0" i="0">
+                <a:solidFill>
+                  <a:srgbClr val="D4D4D4"/>
+                </a:solidFill>
+                <a:latin typeface="Consolas"/>
+              </a:rPr>
+              <a:t>avg</a:t>
+            </a:r>
+            <a:r>
+              <a:rPr sz="900" b="0" i="0">
+                <a:solidFill>
+                  <a:srgbClr val="D4D4D4"/>
+                </a:solidFill>
+                <a:latin typeface="Consolas"/>
+              </a:rPr>
+              <a:t> </a:t>
+            </a:r>
+            <a:r>
+              <a:rPr sz="900" b="0" i="0">
+                <a:solidFill>
+                  <a:srgbClr val="D4D4D4"/>
+                </a:solidFill>
+                <a:latin typeface="Consolas"/>
+              </a:rPr>
+              <a:t>=</a:t>
+            </a:r>
+            <a:r>
+              <a:rPr sz="900" b="0" i="0">
+                <a:solidFill>
+                  <a:srgbClr val="D4D4D4"/>
+                </a:solidFill>
+                <a:latin typeface="Consolas"/>
+              </a:rPr>
+              <a:t> </a:t>
+            </a:r>
+            <a:r>
+              <a:rPr sz="900" b="0" i="0">
+                <a:solidFill>
+                  <a:srgbClr val="DCDCAA"/>
+                </a:solidFill>
+                <a:latin typeface="Consolas"/>
+              </a:rPr>
+              <a:t>calculateAverage</a:t>
+            </a:r>
+            <a:r>
+              <a:rPr sz="900" b="0" i="0">
+                <a:solidFill>
+                  <a:srgbClr val="D4D4D4"/>
+                </a:solidFill>
+                <a:latin typeface="Consolas"/>
+              </a:rPr>
+              <a:t>(</a:t>
+            </a:r>
+            <a:r>
+              <a:rPr sz="900" b="0" i="0">
+                <a:solidFill>
+                  <a:srgbClr val="D4D4D4"/>
+                </a:solidFill>
+                <a:latin typeface="Consolas"/>
+              </a:rPr>
+              <a:t>grades</a:t>
+            </a:r>
+            <a:r>
+              <a:rPr sz="900" b="0" i="0">
+                <a:solidFill>
+                  <a:srgbClr val="D4D4D4"/>
+                </a:solidFill>
+                <a:latin typeface="Consolas"/>
+              </a:rPr>
+              <a:t>,</a:t>
+            </a:r>
+            <a:r>
+              <a:rPr sz="900" b="0" i="0">
+                <a:solidFill>
+                  <a:srgbClr val="D4D4D4"/>
+                </a:solidFill>
+                <a:latin typeface="Consolas"/>
+              </a:rPr>
+              <a:t> </a:t>
+            </a:r>
+            <a:r>
+              <a:rPr sz="900" b="0" i="0">
+                <a:solidFill>
+                  <a:srgbClr val="B5CEA8"/>
+                </a:solidFill>
+                <a:latin typeface="Consolas"/>
+              </a:rPr>
+              <a:t>3</a:t>
+            </a:r>
+            <a:r>
+              <a:rPr sz="900" b="0" i="0">
+                <a:solidFill>
+                  <a:srgbClr val="D4D4D4"/>
+                </a:solidFill>
+                <a:latin typeface="Consolas"/>
+              </a:rPr>
+              <a:t>);</a:t>
+            </a:r>
+          </a:p>
+          <a:p>
+            <a:pPr>
+              <a:lnSpc>
+                <a:spcPts val="1360"/>
+              </a:lnSpc>
+            </a:pPr>
+            <a:r>
+              <a:rPr sz="900" b="0" i="0">
+                <a:solidFill>
+                  <a:srgbClr val="D4D4D4"/>
+                </a:solidFill>
+                <a:latin typeface="Consolas"/>
+              </a:rPr>
+              <a:t>    </a:t>
+            </a:r>
+            <a:r>
+              <a:rPr sz="900" b="0" i="0">
+                <a:solidFill>
+                  <a:srgbClr val="D4D4D4"/>
+                </a:solidFill>
+                <a:latin typeface="Consolas"/>
+              </a:rPr>
+              <a:t>cout</a:t>
+            </a:r>
+            <a:r>
+              <a:rPr sz="900" b="0" i="0">
+                <a:solidFill>
+                  <a:srgbClr val="D4D4D4"/>
+                </a:solidFill>
+                <a:latin typeface="Consolas"/>
+              </a:rPr>
+              <a:t> </a:t>
+            </a:r>
+            <a:r>
+              <a:rPr sz="900" b="0" i="0">
+                <a:solidFill>
+                  <a:srgbClr val="D4D4D4"/>
+                </a:solidFill>
+                <a:latin typeface="Consolas"/>
+              </a:rPr>
+              <a:t>&lt;&lt;</a:t>
+            </a:r>
+            <a:r>
+              <a:rPr sz="900" b="0" i="0">
+                <a:solidFill>
+                  <a:srgbClr val="D4D4D4"/>
+                </a:solidFill>
+                <a:latin typeface="Consolas"/>
+              </a:rPr>
+              <a:t> </a:t>
+            </a:r>
+            <a:r>
+              <a:rPr sz="900" b="0" i="0">
+                <a:solidFill>
+                  <a:srgbClr val="D4D4D4"/>
+                </a:solidFill>
+                <a:latin typeface="Consolas"/>
+              </a:rPr>
+              <a:t>avg</a:t>
+            </a:r>
+            <a:r>
+              <a:rPr sz="900" b="0" i="0">
+                <a:solidFill>
+                  <a:srgbClr val="D4D4D4"/>
+                </a:solidFill>
+                <a:latin typeface="Consolas"/>
+              </a:rPr>
+              <a:t> </a:t>
+            </a:r>
+            <a:r>
+              <a:rPr sz="900" b="0" i="0">
+                <a:solidFill>
+                  <a:srgbClr val="D4D4D4"/>
+                </a:solidFill>
+                <a:latin typeface="Consolas"/>
+              </a:rPr>
+              <a:t>&lt;&lt;</a:t>
+            </a:r>
+            <a:r>
+              <a:rPr sz="900" b="0" i="0">
+                <a:solidFill>
+                  <a:srgbClr val="D4D4D4"/>
+                </a:solidFill>
+                <a:latin typeface="Consolas"/>
+              </a:rPr>
+              <a:t> </a:t>
+            </a:r>
+            <a:r>
+              <a:rPr sz="900" b="0" i="0">
+                <a:solidFill>
+                  <a:srgbClr val="CE9178"/>
+                </a:solidFill>
+                <a:latin typeface="Consolas"/>
+              </a:rPr>
+              <a:t>" "</a:t>
+            </a:r>
+            <a:r>
+              <a:rPr sz="900" b="0" i="0">
+                <a:solidFill>
+                  <a:srgbClr val="D4D4D4"/>
+                </a:solidFill>
+                <a:latin typeface="Consolas"/>
+              </a:rPr>
+              <a:t> </a:t>
+            </a:r>
+            <a:r>
+              <a:rPr sz="900" b="0" i="0">
+                <a:solidFill>
+                  <a:srgbClr val="D4D4D4"/>
+                </a:solidFill>
+                <a:latin typeface="Consolas"/>
+              </a:rPr>
+              <a:t>&lt;&lt;</a:t>
+            </a:r>
+            <a:r>
+              <a:rPr sz="900" b="0" i="0">
+                <a:solidFill>
+                  <a:srgbClr val="D4D4D4"/>
+                </a:solidFill>
+                <a:latin typeface="Consolas"/>
+              </a:rPr>
+              <a:t> </a:t>
+            </a:r>
+            <a:r>
+              <a:rPr sz="900" b="0" i="0">
+                <a:solidFill>
+                  <a:srgbClr val="DCDCAA"/>
+                </a:solidFill>
+                <a:latin typeface="Consolas"/>
+              </a:rPr>
+              <a:t>getLetterGrade</a:t>
+            </a:r>
+            <a:r>
+              <a:rPr sz="900" b="0" i="0">
+                <a:solidFill>
+                  <a:srgbClr val="D4D4D4"/>
+                </a:solidFill>
+                <a:latin typeface="Consolas"/>
+              </a:rPr>
+              <a:t>(</a:t>
+            </a:r>
+            <a:r>
+              <a:rPr sz="900" b="0" i="0">
+                <a:solidFill>
+                  <a:srgbClr val="D4D4D4"/>
+                </a:solidFill>
+                <a:latin typeface="Consolas"/>
+              </a:rPr>
+              <a:t>avg</a:t>
+            </a:r>
+            <a:r>
+              <a:rPr sz="900" b="0" i="0">
+                <a:solidFill>
+                  <a:srgbClr val="D4D4D4"/>
+                </a:solidFill>
+                <a:latin typeface="Consolas"/>
+              </a:rPr>
+              <a:t>);</a:t>
+            </a:r>
+          </a:p>
+          <a:p>
+            <a:pPr>
+              <a:lnSpc>
+                <a:spcPts val="1360"/>
+              </a:lnSpc>
+            </a:pPr>
+            <a:r>
+              <a:rPr sz="900" b="0" i="0">
+                <a:solidFill>
+                  <a:srgbClr val="D4D4D4"/>
+                </a:solidFill>
+                <a:latin typeface="Consolas"/>
+              </a:rPr>
+              <a:t>    </a:t>
+            </a:r>
+            <a:r>
+              <a:rPr sz="900" b="0" i="0">
+                <a:solidFill>
+                  <a:srgbClr val="569CD6"/>
+                </a:solidFill>
+                <a:latin typeface="Consolas"/>
+              </a:rPr>
+              <a:t>return</a:t>
+            </a:r>
+            <a:r>
+              <a:rPr sz="900" b="0" i="0">
+                <a:solidFill>
+                  <a:srgbClr val="D4D4D4"/>
+                </a:solidFill>
+                <a:latin typeface="Consolas"/>
+              </a:rPr>
+              <a:t> </a:t>
+            </a:r>
+            <a:r>
+              <a:rPr sz="900" b="0" i="0">
+                <a:solidFill>
+                  <a:srgbClr val="B5CEA8"/>
+                </a:solidFill>
+                <a:latin typeface="Consolas"/>
+              </a:rPr>
+              <a:t>0</a:t>
+            </a:r>
+            <a:r>
+              <a:rPr sz="900" b="0" i="0">
+                <a:solidFill>
+                  <a:srgbClr val="D4D4D4"/>
+                </a:solidFill>
+                <a:latin typeface="Consolas"/>
+              </a:rPr>
+              <a:t>;</a:t>
+            </a:r>
+          </a:p>
+          <a:p>
+            <a:pPr>
+              <a:lnSpc>
+                <a:spcPts val="1360"/>
+              </a:lnSpc>
+            </a:pPr>
+            <a:r>
+              <a:rPr sz="900" b="0" i="0">
+                <a:solidFill>
+                  <a:srgbClr val="D4D4D4"/>
+                </a:solidFill>
+                <a:latin typeface="Consolas"/>
+              </a:rPr>
+              <a:t>}</a:t>
+            </a:r>
+          </a:p>
+        </p:txBody>
+      </p:sp>
+      <p:sp>
+        <p:nvSpPr>
+          <p:cNvPr id="12" name="TextBox 11"/>
           <p:cNvSpPr txBox="1"/>
           <p:nvPr/>
         </p:nvSpPr>
         <p:spPr>
           <a:xfrm>
-            <a:off x="7863840" y="2423160"/>
-            <a:ext cx="3566160" cy="2286000"/>
+            <a:off x="7635240" y="1783080"/>
+            <a:ext cx="3977639" cy="4114800"/>
           </a:xfrm>
           <a:prstGeom prst="rect">
             <a:avLst/>
@@ -6704,80 +7576,126 @@
           <a:p>
             <a:pPr marL="177800" indent="-177800">
               <a:spcAft>
-                <a:spcPts val="800"/>
+                <a:spcPts val="1200"/>
               </a:spcAft>
               <a:buSzPct val="100000"/>
               <a:buChar char="•"/>
             </a:pPr>
             <a:r>
-              <a:rPr sz="1350" b="0" i="0">
-                <a:solidFill>
-                  <a:srgbClr val="D8D8E8"/>
+              <a:rPr sz="1400" b="0" i="0">
+                <a:solidFill>
+                  <a:srgbClr val="1E1E2E"/>
                 </a:solidFill>
                 <a:latin typeface="Calibri"/>
               </a:rPr>
-              <a:t>bool means the function can only return true or false.</a:t>
+              <a:t>Same math and grading logic from Module 3, now split into two named functions.</a:t>
             </a:r>
           </a:p>
           <a:p>
             <a:pPr marL="177800" indent="-177800">
               <a:spcAft>
-                <a:spcPts val="800"/>
+                <a:spcPts val="1200"/>
               </a:spcAft>
               <a:buSzPct val="100000"/>
               <a:buChar char="•"/>
             </a:pPr>
             <a:r>
-              <a:rPr sz="1350" b="0" i="0">
-                <a:solidFill>
-                  <a:srgbClr val="D8D8E8"/>
+              <a:rPr sz="1400" b="0" i="0">
+                <a:solidFill>
+                  <a:srgbClr val="1E1E2E"/>
                 </a:solidFill>
                 <a:latin typeface="Calibri"/>
               </a:rPr>
-              <a:t>Reuse the &gt;= comparison operator from Modules 2 and 3.</a:t>
+              <a:t>calculateAverage does the math; getLetterGrade makes the decision; main() just calls them.</a:t>
             </a:r>
           </a:p>
           <a:p>
             <a:pPr marL="177800" indent="-177800">
               <a:spcAft>
-                <a:spcPts val="800"/>
+                <a:spcPts val="1200"/>
               </a:spcAft>
               <a:buSzPct val="100000"/>
               <a:buChar char="•"/>
             </a:pPr>
             <a:r>
-              <a:rPr sz="1350" b="0" i="0">
-                <a:solidFill>
-                  <a:srgbClr val="D8D8E8"/>
+              <a:rPr sz="1400" b="0" i="0">
+                <a:solidFill>
+                  <a:srgbClr val="1E1E2E"/>
                 </a:solidFill>
                 <a:latin typeface="Calibri"/>
               </a:rPr>
-              <a:t>Wrap the call in an if: if (isPassing(avg)) { ... } else { ... }</a:t>
-            </a:r>
-          </a:p>
-          <a:p>
-            <a:pPr marL="177800" indent="-177800">
-              <a:spcAft>
-                <a:spcPts val="800"/>
-              </a:spcAft>
-              <a:buSzPct val="100000"/>
-              <a:buChar char="•"/>
-            </a:pPr>
-            <a:r>
-              <a:rPr sz="1350" b="0" i="0">
-                <a:solidFill>
-                  <a:srgbClr val="D8D8E8"/>
+              <a:t>Each function can now be tested or reused on its own, independent of the rest.</a:t>
+            </a:r>
+          </a:p>
+        </p:txBody>
+      </p:sp>
+      <p:sp>
+        <p:nvSpPr>
+          <p:cNvPr id="13" name="Rectangle 12"/>
+          <p:cNvSpPr/>
+          <p:nvPr/>
+        </p:nvSpPr>
+        <p:spPr>
+          <a:xfrm>
+            <a:off x="548640" y="5549493"/>
+            <a:ext cx="6858000" cy="658368"/>
+          </a:xfrm>
+          <a:prstGeom prst="rect">
+            <a:avLst/>
+          </a:prstGeom>
+          <a:solidFill>
+            <a:srgbClr val="FFFFFF"/>
+          </a:solidFill>
+          <a:ln>
+            <a:noFill/>
+          </a:ln>
+          <a:effectLst/>
+        </p:spPr>
+        <p:style>
+          <a:lnRef idx="1">
+            <a:schemeClr val="accent1"/>
+          </a:lnRef>
+          <a:fillRef idx="3">
+            <a:schemeClr val="accent1"/>
+          </a:fillRef>
+          <a:effectRef idx="2">
+            <a:schemeClr val="accent1"/>
+          </a:effectRef>
+          <a:fontRef idx="minor">
+            <a:schemeClr val="lt1"/>
+          </a:fontRef>
+        </p:style>
+        <p:txBody>
+          <a:bodyPr rtlCol="0" anchor="ctr" lIns="137160" rIns="137160" tIns="73152" bIns="73152" wrap="square"/>
+          <a:lstStyle/>
+          <a:p>
+            <a:pPr algn="ctr"/>
+            <a:r>
+              <a:rPr sz="1000" b="1" i="0">
+                <a:solidFill>
+                  <a:srgbClr val="0E7C7B"/>
                 </a:solidFill>
                 <a:latin typeface="Calibri"/>
               </a:rPr>
-              <a:t>Compile with: g++ main.cpp -o tracker &amp;&amp; ./tracker</a:t>
-            </a:r>
-          </a:p>
-        </p:txBody>
-      </p:sp>
-      <p:sp>
-        <p:nvSpPr>
-          <p:cNvPr id="9" name="TextBox 8"/>
+              <a:t>OUTPUT</a:t>
+            </a:r>
+          </a:p>
+          <a:p>
+            <a:r>
+              <a:rPr sz="1200" b="0" i="0">
+                <a:solidFill>
+                  <a:srgbClr val="1E1E2E"/>
+                </a:solidFill>
+                <a:latin typeface="Consolas"/>
+              </a:rPr>
+              <a:t>86.3333 B</a:t>
+            </a:r>
+          </a:p>
+        </p:txBody>
+      </p:sp>
+      <p:sp>
+        <p:nvSpPr>
+          <p:cNvPr id="14" name="TextBox 13"/>
           <p:cNvSpPr txBox="1"/>
           <p:nvPr/>
         </p:nvSpPr>
@@ -6801,7 +7719,7 @@
             <a:r>
               <a:rPr sz="900" b="0" i="0">
                 <a:solidFill>
-                  <a:srgbClr val="8A8AA3"/>
+                  <a:srgbClr val="9CA3AF"/>
                 </a:solidFill>
                 <a:latin typeface="Calibri"/>
               </a:rPr>
@@ -6812,7 +7730,7 @@
       </p:sp>
       <p:sp>
         <p:nvSpPr>
-          <p:cNvPr id="10" name="TextBox 9"/>
+          <p:cNvPr id="15" name="TextBox 14"/>
           <p:cNvSpPr txBox="1"/>
           <p:nvPr/>
         </p:nvSpPr>
@@ -6836,7 +7754,7 @@
             <a:r>
               <a:rPr sz="900" b="0" i="0">
                 <a:solidFill>
-                  <a:srgbClr val="8A8AA3"/>
+                  <a:srgbClr val="9CA3AF"/>
                 </a:solidFill>
                 <a:latin typeface="Calibri"/>
               </a:rPr>
@@ -6873,16 +7791,225 @@
       <p:grpSpPr/>
       <p:sp>
         <p:nvSpPr>
-          <p:cNvPr id="2" name="Oval 1"/>
+          <p:cNvPr id="2" name="Rectangle 1"/>
           <p:cNvSpPr/>
           <p:nvPr/>
         </p:nvSpPr>
         <p:spPr>
           <a:xfrm>
-            <a:off x="-1371600" y="-1371600"/>
-            <a:ext cx="3657600" cy="3657600"/>
-          </a:xfrm>
-          <a:prstGeom prst="ellipse">
+            <a:off x="0" y="0"/>
+            <a:ext cx="12191695" cy="109728"/>
+          </a:xfrm>
+          <a:prstGeom prst="rect">
+            <a:avLst/>
+          </a:prstGeom>
+          <a:solidFill>
+            <a:srgbClr val="F0A500"/>
+          </a:solidFill>
+          <a:ln>
+            <a:noFill/>
+          </a:ln>
+          <a:effectLst/>
+        </p:spPr>
+        <p:style>
+          <a:lnRef idx="1">
+            <a:schemeClr val="accent1"/>
+          </a:lnRef>
+          <a:fillRef idx="3">
+            <a:schemeClr val="accent1"/>
+          </a:fillRef>
+          <a:effectRef idx="2">
+            <a:schemeClr val="accent1"/>
+          </a:effectRef>
+          <a:fontRef idx="minor">
+            <a:schemeClr val="lt1"/>
+          </a:fontRef>
+        </p:style>
+        <p:txBody>
+          <a:bodyPr rtlCol="0" anchor="ctr"/>
+          <a:lstStyle/>
+          <a:p>
+            <a:pPr algn="ctr"/>
+          </a:p>
+        </p:txBody>
+      </p:sp>
+      <p:sp>
+        <p:nvSpPr>
+          <p:cNvPr id="3" name="TextBox 2"/>
+          <p:cNvSpPr txBox="1"/>
+          <p:nvPr/>
+        </p:nvSpPr>
+        <p:spPr>
+          <a:xfrm>
+            <a:off x="548640" y="457200"/>
+            <a:ext cx="7315200" cy="320040"/>
+          </a:xfrm>
+          <a:prstGeom prst="rect">
+            <a:avLst/>
+          </a:prstGeom>
+          <a:noFill/>
+        </p:spPr>
+        <p:txBody>
+          <a:bodyPr wrap="square" anchor="t" lIns="0" rIns="0" tIns="0" bIns="0">
+            <a:spAutoFit/>
+          </a:bodyPr>
+          <a:lstStyle/>
+          <a:p>
+            <a:pPr algn="l"/>
+            <a:r>
+              <a:rPr sz="1300" b="1" i="0">
+                <a:solidFill>
+                  <a:srgbClr val="F0A500"/>
+                </a:solidFill>
+                <a:latin typeface="Calibri"/>
+              </a:rPr>
+              <a:t>IN-CLASS EXERCISE</a:t>
+            </a:r>
+          </a:p>
+        </p:txBody>
+      </p:sp>
+      <p:sp>
+        <p:nvSpPr>
+          <p:cNvPr id="4" name="TextBox 3"/>
+          <p:cNvSpPr txBox="1"/>
+          <p:nvPr/>
+        </p:nvSpPr>
+        <p:spPr>
+          <a:xfrm>
+            <a:off x="548640" y="777240"/>
+            <a:ext cx="10972800" cy="822960"/>
+          </a:xfrm>
+          <a:prstGeom prst="rect">
+            <a:avLst/>
+          </a:prstGeom>
+          <a:noFill/>
+        </p:spPr>
+        <p:txBody>
+          <a:bodyPr wrap="square" anchor="t" lIns="0" rIns="0" tIns="0" bIns="0">
+            <a:spAutoFit/>
+          </a:bodyPr>
+          <a:lstStyle/>
+          <a:p>
+            <a:pPr algn="l"/>
+            <a:r>
+              <a:rPr sz="3200" b="1" i="0">
+                <a:solidFill>
+                  <a:srgbClr val="F2F2F2"/>
+                </a:solidFill>
+                <a:latin typeface="Consolas"/>
+              </a:rPr>
+              <a:t>Add an isPassing() Function</a:t>
+            </a:r>
+          </a:p>
+        </p:txBody>
+      </p:sp>
+      <p:sp>
+        <p:nvSpPr>
+          <p:cNvPr id="5" name="TextBox 4"/>
+          <p:cNvSpPr txBox="1"/>
+          <p:nvPr/>
+        </p:nvSpPr>
+        <p:spPr>
+          <a:xfrm>
+            <a:off x="548640" y="1828800"/>
+            <a:ext cx="6766560" cy="4114800"/>
+          </a:xfrm>
+          <a:prstGeom prst="rect">
+            <a:avLst/>
+          </a:prstGeom>
+          <a:noFill/>
+        </p:spPr>
+        <p:txBody>
+          <a:bodyPr wrap="square" anchor="t" lIns="0" rIns="0" tIns="0" bIns="0">
+            <a:spAutoFit/>
+          </a:bodyPr>
+          <a:lstStyle/>
+          <a:p>
+            <a:pPr marL="254000" indent="-254000">
+              <a:spcAft>
+                <a:spcPts val="1200"/>
+              </a:spcAft>
+              <a:buSzPct val="100000"/>
+              <a:buChar char="▸"/>
+            </a:pPr>
+            <a:r>
+              <a:rPr sz="1800" b="0" i="0">
+                <a:solidFill>
+                  <a:srgbClr val="F2F2F2"/>
+                </a:solidFill>
+                <a:latin typeface="Calibri"/>
+              </a:rPr>
+              <a:t>Write bool isPassing(double average) that returns true or false.</a:t>
+            </a:r>
+          </a:p>
+          <a:p>
+            <a:pPr marL="254000" indent="-254000">
+              <a:spcAft>
+                <a:spcPts val="1200"/>
+              </a:spcAft>
+              <a:buSzPct val="100000"/>
+              <a:buChar char="▸"/>
+            </a:pPr>
+            <a:r>
+              <a:rPr sz="1800" b="0" i="0">
+                <a:solidFill>
+                  <a:srgbClr val="F2F2F2"/>
+                </a:solidFill>
+                <a:latin typeface="Calibri"/>
+              </a:rPr>
+              <a:t>Return true when average is 60 or higher, false otherwise.</a:t>
+            </a:r>
+          </a:p>
+          <a:p>
+            <a:pPr marL="254000" indent="-254000">
+              <a:spcAft>
+                <a:spcPts val="1200"/>
+              </a:spcAft>
+              <a:buSzPct val="100000"/>
+              <a:buChar char="▸"/>
+            </a:pPr>
+            <a:r>
+              <a:rPr sz="1800" b="0" i="0">
+                <a:solidFill>
+                  <a:srgbClr val="F2F2F2"/>
+                </a:solidFill>
+                <a:latin typeface="Calibri"/>
+              </a:rPr>
+              <a:t>Call isPassing() from main() right after computing the average.</a:t>
+            </a:r>
+          </a:p>
+          <a:p>
+            <a:pPr marL="254000" indent="-254000">
+              <a:spcAft>
+                <a:spcPts val="1200"/>
+              </a:spcAft>
+              <a:buSzPct val="100000"/>
+              <a:buChar char="▸"/>
+            </a:pPr>
+            <a:r>
+              <a:rPr sz="1800" b="0" i="0">
+                <a:solidFill>
+                  <a:srgbClr val="F2F2F2"/>
+                </a:solidFill>
+                <a:latin typeface="Calibri"/>
+              </a:rPr>
+              <a:t>Print "PASSING" or "NOT PASSING" next to the letter grade.</a:t>
+            </a:r>
+          </a:p>
+        </p:txBody>
+      </p:sp>
+      <p:sp>
+        <p:nvSpPr>
+          <p:cNvPr id="6" name="Rectangle 5"/>
+          <p:cNvSpPr/>
+          <p:nvPr/>
+        </p:nvSpPr>
+        <p:spPr>
+          <a:xfrm>
+            <a:off x="7635240" y="1828800"/>
+            <a:ext cx="3977639" cy="2743200"/>
+          </a:xfrm>
+          <a:prstGeom prst="rect">
             <a:avLst/>
           </a:prstGeom>
           <a:solidFill>
@@ -6917,6 +8044,276 @@
       </p:sp>
       <p:sp>
         <p:nvSpPr>
+          <p:cNvPr id="7" name="TextBox 6"/>
+          <p:cNvSpPr txBox="1"/>
+          <p:nvPr/>
+        </p:nvSpPr>
+        <p:spPr>
+          <a:xfrm>
+            <a:off x="7863840" y="2011680"/>
+            <a:ext cx="3566160" cy="320040"/>
+          </a:xfrm>
+          <a:prstGeom prst="rect">
+            <a:avLst/>
+          </a:prstGeom>
+          <a:noFill/>
+        </p:spPr>
+        <p:txBody>
+          <a:bodyPr wrap="square" anchor="t" lIns="0" rIns="0" tIns="0" bIns="0">
+            <a:spAutoFit/>
+          </a:bodyPr>
+          <a:lstStyle/>
+          <a:p>
+            <a:pPr algn="l"/>
+            <a:r>
+              <a:rPr sz="1200" b="1" i="0">
+                <a:solidFill>
+                  <a:srgbClr val="4EC9B0"/>
+                </a:solidFill>
+                <a:latin typeface="Calibri"/>
+              </a:rPr>
+              <a:t>HINTS</a:t>
+            </a:r>
+          </a:p>
+        </p:txBody>
+      </p:sp>
+      <p:sp>
+        <p:nvSpPr>
+          <p:cNvPr id="8" name="TextBox 7"/>
+          <p:cNvSpPr txBox="1"/>
+          <p:nvPr/>
+        </p:nvSpPr>
+        <p:spPr>
+          <a:xfrm>
+            <a:off x="7863840" y="2423160"/>
+            <a:ext cx="3566160" cy="2286000"/>
+          </a:xfrm>
+          <a:prstGeom prst="rect">
+            <a:avLst/>
+          </a:prstGeom>
+          <a:noFill/>
+        </p:spPr>
+        <p:txBody>
+          <a:bodyPr wrap="square" anchor="t" lIns="0" rIns="0" tIns="0" bIns="0">
+            <a:spAutoFit/>
+          </a:bodyPr>
+          <a:lstStyle/>
+          <a:p>
+            <a:pPr marL="177800" indent="-177800">
+              <a:spcAft>
+                <a:spcPts val="800"/>
+              </a:spcAft>
+              <a:buSzPct val="100000"/>
+              <a:buChar char="•"/>
+            </a:pPr>
+            <a:r>
+              <a:rPr sz="1350" b="0" i="0">
+                <a:solidFill>
+                  <a:srgbClr val="D8D8E8"/>
+                </a:solidFill>
+                <a:latin typeface="Calibri"/>
+              </a:rPr>
+              <a:t>bool means the function can only return true or false.</a:t>
+            </a:r>
+          </a:p>
+          <a:p>
+            <a:pPr marL="177800" indent="-177800">
+              <a:spcAft>
+                <a:spcPts val="800"/>
+              </a:spcAft>
+              <a:buSzPct val="100000"/>
+              <a:buChar char="•"/>
+            </a:pPr>
+            <a:r>
+              <a:rPr sz="1350" b="0" i="0">
+                <a:solidFill>
+                  <a:srgbClr val="D8D8E8"/>
+                </a:solidFill>
+                <a:latin typeface="Calibri"/>
+              </a:rPr>
+              <a:t>Reuse the &gt;= comparison operator from Modules 2 and 3.</a:t>
+            </a:r>
+          </a:p>
+          <a:p>
+            <a:pPr marL="177800" indent="-177800">
+              <a:spcAft>
+                <a:spcPts val="800"/>
+              </a:spcAft>
+              <a:buSzPct val="100000"/>
+              <a:buChar char="•"/>
+            </a:pPr>
+            <a:r>
+              <a:rPr sz="1350" b="0" i="0">
+                <a:solidFill>
+                  <a:srgbClr val="D8D8E8"/>
+                </a:solidFill>
+                <a:latin typeface="Calibri"/>
+              </a:rPr>
+              <a:t>Wrap the call in an if: if (isPassing(avg)) { ... } else { ... }</a:t>
+            </a:r>
+          </a:p>
+          <a:p>
+            <a:pPr marL="177800" indent="-177800">
+              <a:spcAft>
+                <a:spcPts val="800"/>
+              </a:spcAft>
+              <a:buSzPct val="100000"/>
+              <a:buChar char="•"/>
+            </a:pPr>
+            <a:r>
+              <a:rPr sz="1350" b="0" i="0">
+                <a:solidFill>
+                  <a:srgbClr val="D8D8E8"/>
+                </a:solidFill>
+                <a:latin typeface="Calibri"/>
+              </a:rPr>
+              <a:t>Compile with: g++ main.cpp -o tracker &amp;&amp; ./tracker</a:t>
+            </a:r>
+          </a:p>
+        </p:txBody>
+      </p:sp>
+      <p:sp>
+        <p:nvSpPr>
+          <p:cNvPr id="9" name="TextBox 8"/>
+          <p:cNvSpPr txBox="1"/>
+          <p:nvPr/>
+        </p:nvSpPr>
+        <p:spPr>
+          <a:xfrm>
+            <a:off x="457200" y="6528816"/>
+            <a:ext cx="6400800" cy="256032"/>
+          </a:xfrm>
+          <a:prstGeom prst="rect">
+            <a:avLst/>
+          </a:prstGeom>
+          <a:noFill/>
+        </p:spPr>
+        <p:txBody>
+          <a:bodyPr wrap="square" anchor="t" lIns="0" rIns="0" tIns="0" bIns="0">
+            <a:spAutoFit/>
+          </a:bodyPr>
+          <a:lstStyle/>
+          <a:p>
+            <a:pPr algn="l"/>
+            <a:r>
+              <a:rPr sz="900" b="0" i="0">
+                <a:solidFill>
+                  <a:srgbClr val="8A8AA3"/>
+                </a:solidFill>
+                <a:latin typeface="Calibri"/>
+              </a:rPr>
+              <a:t>C++ FUNDAMENTALS  ·  MODULE 4</a:t>
+            </a:r>
+          </a:p>
+        </p:txBody>
+      </p:sp>
+      <p:sp>
+        <p:nvSpPr>
+          <p:cNvPr id="10" name="TextBox 9"/>
+          <p:cNvSpPr txBox="1"/>
+          <p:nvPr/>
+        </p:nvSpPr>
+        <p:spPr>
+          <a:xfrm>
+            <a:off x="11338560" y="6528816"/>
+            <a:ext cx="548640" cy="256032"/>
+          </a:xfrm>
+          <a:prstGeom prst="rect">
+            <a:avLst/>
+          </a:prstGeom>
+          <a:noFill/>
+        </p:spPr>
+        <p:txBody>
+          <a:bodyPr wrap="square" anchor="t" lIns="0" rIns="0" tIns="0" bIns="0">
+            <a:spAutoFit/>
+          </a:bodyPr>
+          <a:lstStyle/>
+          <a:p>
+            <a:pPr algn="r"/>
+            <a:r>
+              <a:rPr sz="900" b="0" i="0">
+                <a:solidFill>
+                  <a:srgbClr val="8A8AA3"/>
+                </a:solidFill>
+                <a:latin typeface="Calibri"/>
+              </a:rPr>
+              <a:t>13</a:t>
+            </a:r>
+          </a:p>
+        </p:txBody>
+      </p:sp>
+    </p:spTree>
+  </p:cSld>
+  <p:clrMapOvr>
+    <a:masterClrMapping/>
+  </p:clrMapOvr>
+</p:sld>
+</file>
+
+<file path=ppt/slides/slide14.xml><?xml version="1.0" encoding="utf-8"?>
+<p:sld xmlns:a="http://schemas.openxmlformats.org/drawingml/2006/main" xmlns:p="http://schemas.openxmlformats.org/presentationml/2006/main" xmlns:r="http://schemas.openxmlformats.org/officeDocument/2006/relationships">
+  <p:cSld>
+    <p:bg>
+      <p:bgPr>
+        <a:solidFill>
+          <a:srgbClr val="1E1E2E"/>
+        </a:solidFill>
+        <a:effectLst/>
+      </p:bgPr>
+    </p:bg>
+    <p:spTree>
+      <p:nvGrpSpPr>
+        <p:cNvPr id="1" name=""/>
+        <p:cNvGrpSpPr/>
+        <p:nvPr/>
+      </p:nvGrpSpPr>
+      <p:grpSpPr/>
+      <p:sp>
+        <p:nvSpPr>
+          <p:cNvPr id="2" name="Oval 1"/>
+          <p:cNvSpPr/>
+          <p:nvPr/>
+        </p:nvSpPr>
+        <p:spPr>
+          <a:xfrm>
+            <a:off x="-1371600" y="-1371600"/>
+            <a:ext cx="3657600" cy="3657600"/>
+          </a:xfrm>
+          <a:prstGeom prst="ellipse">
+            <a:avLst/>
+          </a:prstGeom>
+          <a:solidFill>
+            <a:srgbClr val="2A2A3D"/>
+          </a:solidFill>
+          <a:ln>
+            <a:noFill/>
+          </a:ln>
+          <a:effectLst/>
+        </p:spPr>
+        <p:style>
+          <a:lnRef idx="1">
+            <a:schemeClr val="accent1"/>
+          </a:lnRef>
+          <a:fillRef idx="3">
+            <a:schemeClr val="accent1"/>
+          </a:fillRef>
+          <a:effectRef idx="2">
+            <a:schemeClr val="accent1"/>
+          </a:effectRef>
+          <a:fontRef idx="minor">
+            <a:schemeClr val="lt1"/>
+          </a:fontRef>
+        </p:style>
+        <p:txBody>
+          <a:bodyPr rtlCol="0" anchor="ctr"/>
+          <a:lstStyle/>
+          <a:p>
+            <a:pPr algn="ctr"/>
+          </a:p>
+        </p:txBody>
+      </p:sp>
+      <p:sp>
+        <p:nvSpPr>
           <p:cNvPr id="3" name="TextBox 2"/>
           <p:cNvSpPr txBox="1"/>
           <p:nvPr/>
@@ -7268,7 +8665,7 @@
                 </a:solidFill>
                 <a:latin typeface="Calibri"/>
               </a:rPr>
-              <a:t>13</a:t>
+              <a:t>14</a:t>
             </a:r>
           </a:p>
         </p:txBody>
@@ -7378,7 +8775,7 @@
         <p:spPr>
           <a:xfrm>
             <a:off x="548640" y="1737360"/>
-            <a:ext cx="332349" cy="332349"/>
+            <a:ext cx="295421" cy="295421"/>
           </a:xfrm>
           <a:prstGeom prst="roundRect">
             <a:avLst/>
@@ -7411,7 +8808,7 @@
           <a:p>
             <a:pPr algn="ctr"/>
             <a:r>
-              <a:rPr sz="1298" b="1" i="0">
+              <a:rPr sz="1153" b="1" i="0">
                 <a:solidFill>
                   <a:srgbClr val="1E1E2E"/>
                 </a:solidFill>
@@ -7430,8 +8827,8 @@
         </p:nvSpPr>
         <p:spPr>
           <a:xfrm>
-            <a:off x="1143000" y="1795584"/>
-            <a:ext cx="10241280" cy="474344"/>
+            <a:off x="1143000" y="1789820"/>
+            <a:ext cx="10241280" cy="411479"/>
           </a:xfrm>
           <a:prstGeom prst="rect">
             <a:avLst/>
@@ -7446,7 +8843,7 @@
           <a:p>
             <a:pPr algn="l"/>
             <a:r>
-              <a:rPr sz="1700" b="0" i="0">
+              <a:rPr sz="1500" b="0" i="0">
                 <a:solidFill>
                   <a:srgbClr val="F2F2F2"/>
                 </a:solidFill>
@@ -7465,7 +8862,7 @@
         </p:nvCxnSpPr>
         <p:spPr>
           <a:xfrm>
-            <a:off x="1143000" y="2211704"/>
+            <a:off x="1143000" y="2148839"/>
             <a:ext cx="9601200" cy="0"/>
           </a:xfrm>
           <a:prstGeom prst="line">
@@ -7500,8 +8897,8 @@
         </p:nvSpPr>
         <p:spPr>
           <a:xfrm>
-            <a:off x="548640" y="2303145"/>
-            <a:ext cx="332349" cy="332349"/>
+            <a:off x="548640" y="2240279"/>
+            <a:ext cx="295421" cy="295421"/>
           </a:xfrm>
           <a:prstGeom prst="roundRect">
             <a:avLst/>
@@ -7534,7 +8931,7 @@
           <a:p>
             <a:pPr algn="ctr"/>
             <a:r>
-              <a:rPr sz="1298" b="1" i="0">
+              <a:rPr sz="1153" b="1" i="0">
                 <a:solidFill>
                   <a:srgbClr val="1E1E2E"/>
                 </a:solidFill>
@@ -7553,8 +8950,8 @@
         </p:nvSpPr>
         <p:spPr>
           <a:xfrm>
-            <a:off x="1143000" y="2361369"/>
-            <a:ext cx="10241280" cy="474344"/>
+            <a:off x="1143000" y="2292740"/>
+            <a:ext cx="10241280" cy="411479"/>
           </a:xfrm>
           <a:prstGeom prst="rect">
             <a:avLst/>
@@ -7569,7 +8966,7 @@
           <a:p>
             <a:pPr algn="l"/>
             <a:r>
-              <a:rPr sz="1700" b="0" i="0">
+              <a:rPr sz="1500" b="0" i="0">
                 <a:solidFill>
                   <a:srgbClr val="F2F2F2"/>
                 </a:solidFill>
@@ -7588,7 +8985,7 @@
         </p:nvCxnSpPr>
         <p:spPr>
           <a:xfrm>
-            <a:off x="1143000" y="2777489"/>
+            <a:off x="1143000" y="2651759"/>
             <a:ext cx="9601200" cy="0"/>
           </a:xfrm>
           <a:prstGeom prst="line">
@@ -7623,8 +9020,8 @@
         </p:nvSpPr>
         <p:spPr>
           <a:xfrm>
-            <a:off x="548640" y="2868929"/>
-            <a:ext cx="332349" cy="332349"/>
+            <a:off x="548640" y="2743199"/>
+            <a:ext cx="295421" cy="295421"/>
           </a:xfrm>
           <a:prstGeom prst="roundRect">
             <a:avLst/>
@@ -7657,7 +9054,7 @@
           <a:p>
             <a:pPr algn="ctr"/>
             <a:r>
-              <a:rPr sz="1298" b="1" i="0">
+              <a:rPr sz="1153" b="1" i="0">
                 <a:solidFill>
                   <a:srgbClr val="1E1E2E"/>
                 </a:solidFill>
@@ -7676,8 +9073,8 @@
         </p:nvSpPr>
         <p:spPr>
           <a:xfrm>
-            <a:off x="1143000" y="2927154"/>
-            <a:ext cx="10241280" cy="474344"/>
+            <a:off x="1143000" y="2795660"/>
+            <a:ext cx="10241280" cy="411479"/>
           </a:xfrm>
           <a:prstGeom prst="rect">
             <a:avLst/>
@@ -7692,7 +9089,7 @@
           <a:p>
             <a:pPr algn="l"/>
             <a:r>
-              <a:rPr sz="1700" b="0" i="0">
+              <a:rPr sz="1500" b="0" i="0">
                 <a:solidFill>
                   <a:srgbClr val="F2F2F2"/>
                 </a:solidFill>
@@ -7711,7 +9108,7 @@
         </p:nvCxnSpPr>
         <p:spPr>
           <a:xfrm>
-            <a:off x="1143000" y="3343274"/>
+            <a:off x="1143000" y="3154679"/>
             <a:ext cx="9601200" cy="0"/>
           </a:xfrm>
           <a:prstGeom prst="line">
@@ -7746,8 +9143,8 @@
         </p:nvSpPr>
         <p:spPr>
           <a:xfrm>
-            <a:off x="548640" y="3434714"/>
-            <a:ext cx="332349" cy="332349"/>
+            <a:off x="548640" y="3246119"/>
+            <a:ext cx="295421" cy="295421"/>
           </a:xfrm>
           <a:prstGeom prst="roundRect">
             <a:avLst/>
@@ -7780,7 +9177,7 @@
           <a:p>
             <a:pPr algn="ctr"/>
             <a:r>
-              <a:rPr sz="1298" b="1" i="0">
+              <a:rPr sz="1153" b="1" i="0">
                 <a:solidFill>
                   <a:srgbClr val="1E1E2E"/>
                 </a:solidFill>
@@ -7799,8 +9196,8 @@
         </p:nvSpPr>
         <p:spPr>
           <a:xfrm>
-            <a:off x="1143000" y="3492939"/>
-            <a:ext cx="10241280" cy="474344"/>
+            <a:off x="1143000" y="3298580"/>
+            <a:ext cx="10241280" cy="411479"/>
           </a:xfrm>
           <a:prstGeom prst="rect">
             <a:avLst/>
@@ -7815,7 +9212,7 @@
           <a:p>
             <a:pPr algn="l"/>
             <a:r>
-              <a:rPr sz="1700" b="0" i="0">
+              <a:rPr sz="1500" b="0" i="0">
                 <a:solidFill>
                   <a:srgbClr val="F2F2F2"/>
                 </a:solidFill>
@@ -7834,7 +9231,7 @@
         </p:nvCxnSpPr>
         <p:spPr>
           <a:xfrm>
-            <a:off x="1143000" y="3909060"/>
+            <a:off x="1143000" y="3657599"/>
             <a:ext cx="9601200" cy="0"/>
           </a:xfrm>
           <a:prstGeom prst="line">
@@ -7869,8 +9266,8 @@
         </p:nvSpPr>
         <p:spPr>
           <a:xfrm>
-            <a:off x="548640" y="4000500"/>
-            <a:ext cx="332349" cy="332349"/>
+            <a:off x="548640" y="3749039"/>
+            <a:ext cx="295421" cy="295421"/>
           </a:xfrm>
           <a:prstGeom prst="roundRect">
             <a:avLst/>
@@ -7903,7 +9300,7 @@
           <a:p>
             <a:pPr algn="ctr"/>
             <a:r>
-              <a:rPr sz="1298" b="1" i="0">
+              <a:rPr sz="1153" b="1" i="0">
                 <a:solidFill>
                   <a:srgbClr val="1E1E2E"/>
                 </a:solidFill>
@@ -7922,8 +9319,8 @@
         </p:nvSpPr>
         <p:spPr>
           <a:xfrm>
-            <a:off x="1143000" y="4058724"/>
-            <a:ext cx="10241280" cy="474344"/>
+            <a:off x="1143000" y="3801500"/>
+            <a:ext cx="10241280" cy="411479"/>
           </a:xfrm>
           <a:prstGeom prst="rect">
             <a:avLst/>
@@ -7938,7 +9335,7 @@
           <a:p>
             <a:pPr algn="l"/>
             <a:r>
-              <a:rPr sz="1700" b="0" i="0">
+              <a:rPr sz="1500" b="0" i="0">
                 <a:solidFill>
                   <a:srgbClr val="F2F2F2"/>
                 </a:solidFill>
@@ -7957,7 +9354,7 @@
         </p:nvCxnSpPr>
         <p:spPr>
           <a:xfrm>
-            <a:off x="1143000" y="4474845"/>
+            <a:off x="1143000" y="4160520"/>
             <a:ext cx="9601200" cy="0"/>
           </a:xfrm>
           <a:prstGeom prst="line">
@@ -7992,8 +9389,8 @@
         </p:nvSpPr>
         <p:spPr>
           <a:xfrm>
-            <a:off x="548640" y="4566285"/>
-            <a:ext cx="332349" cy="332349"/>
+            <a:off x="548640" y="4251959"/>
+            <a:ext cx="295421" cy="295421"/>
           </a:xfrm>
           <a:prstGeom prst="roundRect">
             <a:avLst/>
@@ -8026,7 +9423,7 @@
           <a:p>
             <a:pPr algn="ctr"/>
             <a:r>
-              <a:rPr sz="1298" b="1" i="0">
+              <a:rPr sz="1153" b="1" i="0">
                 <a:solidFill>
                   <a:srgbClr val="1E1E2E"/>
                 </a:solidFill>
@@ -8045,8 +9442,8 @@
         </p:nvSpPr>
         <p:spPr>
           <a:xfrm>
-            <a:off x="1143000" y="4624509"/>
-            <a:ext cx="10241280" cy="474344"/>
+            <a:off x="1143000" y="4304420"/>
+            <a:ext cx="10241280" cy="411479"/>
           </a:xfrm>
           <a:prstGeom prst="rect">
             <a:avLst/>
@@ -8061,7 +9458,7 @@
           <a:p>
             <a:pPr algn="l"/>
             <a:r>
-              <a:rPr sz="1700" b="0" i="0">
+              <a:rPr sz="1500" b="0" i="0">
                 <a:solidFill>
                   <a:srgbClr val="F2F2F2"/>
                 </a:solidFill>
@@ -8080,7 +9477,7 @@
         </p:nvCxnSpPr>
         <p:spPr>
           <a:xfrm>
-            <a:off x="1143000" y="5040630"/>
+            <a:off x="1143000" y="4663440"/>
             <a:ext cx="9601200" cy="0"/>
           </a:xfrm>
           <a:prstGeom prst="line">
@@ -8115,8 +9512,8 @@
         </p:nvSpPr>
         <p:spPr>
           <a:xfrm>
-            <a:off x="548640" y="5132070"/>
-            <a:ext cx="332349" cy="332349"/>
+            <a:off x="548640" y="4754879"/>
+            <a:ext cx="295421" cy="295421"/>
           </a:xfrm>
           <a:prstGeom prst="roundRect">
             <a:avLst/>
@@ -8149,7 +9546,7 @@
           <a:p>
             <a:pPr algn="ctr"/>
             <a:r>
-              <a:rPr sz="1298" b="1" i="0">
+              <a:rPr sz="1153" b="1" i="0">
                 <a:solidFill>
                   <a:srgbClr val="1E1E2E"/>
                 </a:solidFill>
@@ -8168,8 +9565,8 @@
         </p:nvSpPr>
         <p:spPr>
           <a:xfrm>
-            <a:off x="1143000" y="5190294"/>
-            <a:ext cx="10241280" cy="474344"/>
+            <a:off x="1143000" y="4807340"/>
+            <a:ext cx="10241280" cy="411479"/>
           </a:xfrm>
           <a:prstGeom prst="rect">
             <a:avLst/>
@@ -8184,13 +9581,13 @@
           <a:p>
             <a:pPr algn="l"/>
             <a:r>
-              <a:rPr sz="1700" b="0" i="0">
+              <a:rPr sz="1500" b="0" i="0">
                 <a:solidFill>
                   <a:srgbClr val="F2F2F2"/>
                 </a:solidFill>
                 <a:latin typeface="Calibri"/>
               </a:rPr>
-              <a:t>Default parameters</a:t>
+              <a:t>Inline functions: a hint to skip the call</a:t>
             </a:r>
           </a:p>
         </p:txBody>
@@ -8203,7 +9600,7 @@
         </p:nvCxnSpPr>
         <p:spPr>
           <a:xfrm>
-            <a:off x="1143000" y="5606415"/>
+            <a:off x="1143000" y="5166359"/>
             <a:ext cx="9601200" cy="0"/>
           </a:xfrm>
           <a:prstGeom prst="line">
@@ -8238,8 +9635,8 @@
         </p:nvSpPr>
         <p:spPr>
           <a:xfrm>
-            <a:off x="548640" y="5697855"/>
-            <a:ext cx="332349" cy="332349"/>
+            <a:off x="548640" y="5257799"/>
+            <a:ext cx="295421" cy="295421"/>
           </a:xfrm>
           <a:prstGeom prst="roundRect">
             <a:avLst/>
@@ -8272,7 +9669,7 @@
           <a:p>
             <a:pPr algn="ctr"/>
             <a:r>
-              <a:rPr sz="1298" b="1" i="0">
+              <a:rPr sz="1153" b="1" i="0">
                 <a:solidFill>
                   <a:srgbClr val="1E1E2E"/>
                 </a:solidFill>
@@ -8291,8 +9688,8 @@
         </p:nvSpPr>
         <p:spPr>
           <a:xfrm>
-            <a:off x="1143000" y="5756079"/>
-            <a:ext cx="10241280" cy="474344"/>
+            <a:off x="1143000" y="5310260"/>
+            <a:ext cx="10241280" cy="411479"/>
           </a:xfrm>
           <a:prstGeom prst="rect">
             <a:avLst/>
@@ -8307,27 +9704,115 @@
           <a:p>
             <a:pPr algn="l"/>
             <a:r>
-              <a:rPr sz="1700" b="0" i="0">
+              <a:rPr sz="1500" b="0" i="0">
                 <a:solidFill>
                   <a:srgbClr val="F2F2F2"/>
                 </a:solidFill>
                 <a:latin typeface="Calibri"/>
               </a:rPr>
-              <a:t>Variable scope: local vs. global</a:t>
-            </a:r>
-          </a:p>
-        </p:txBody>
-      </p:sp>
-      <p:sp>
-        <p:nvSpPr>
-          <p:cNvPr id="27" name="TextBox 26"/>
+              <a:t>Default parameters</a:t>
+            </a:r>
+          </a:p>
+        </p:txBody>
+      </p:sp>
+      <p:cxnSp>
+        <p:nvCxnSpPr>
+          <p:cNvPr id="27" name="Connector 26"/>
+          <p:cNvCxnSpPr/>
+          <p:nvPr/>
+        </p:nvCxnSpPr>
+        <p:spPr>
+          <a:xfrm>
+            <a:off x="1143000" y="5669279"/>
+            <a:ext cx="9601200" cy="0"/>
+          </a:xfrm>
+          <a:prstGeom prst="line">
+            <a:avLst/>
+          </a:prstGeom>
+          <a:ln w="12700">
+            <a:solidFill>
+              <a:srgbClr val="2A2A3D"/>
+            </a:solidFill>
+          </a:ln>
+        </p:spPr>
+        <p:style>
+          <a:lnRef idx="2">
+            <a:schemeClr val="accent1"/>
+          </a:lnRef>
+          <a:fillRef idx="0">
+            <a:schemeClr val="accent1"/>
+          </a:fillRef>
+          <a:effectRef idx="1">
+            <a:schemeClr val="accent1"/>
+          </a:effectRef>
+          <a:fontRef idx="minor">
+            <a:schemeClr val="tx1"/>
+          </a:fontRef>
+        </p:style>
+      </p:cxnSp>
+      <p:sp>
+        <p:nvSpPr>
+          <p:cNvPr id="28" name="Rounded Rectangle 27"/>
+          <p:cNvSpPr/>
+          <p:nvPr/>
+        </p:nvSpPr>
+        <p:spPr>
+          <a:xfrm>
+            <a:off x="548640" y="5760719"/>
+            <a:ext cx="295421" cy="295421"/>
+          </a:xfrm>
+          <a:prstGeom prst="roundRect">
+            <a:avLst/>
+          </a:prstGeom>
+          <a:solidFill>
+            <a:srgbClr val="4EC9B0"/>
+          </a:solidFill>
+          <a:ln>
+            <a:noFill/>
+          </a:ln>
+          <a:effectLst/>
+        </p:spPr>
+        <p:style>
+          <a:lnRef idx="1">
+            <a:schemeClr val="accent1"/>
+          </a:lnRef>
+          <a:fillRef idx="3">
+            <a:schemeClr val="accent1"/>
+          </a:fillRef>
+          <a:effectRef idx="2">
+            <a:schemeClr val="accent1"/>
+          </a:effectRef>
+          <a:fontRef idx="minor">
+            <a:schemeClr val="lt1"/>
+          </a:fontRef>
+        </p:style>
+        <p:txBody>
+          <a:bodyPr rtlCol="0" anchor="ctr" lIns="0" rIns="0" tIns="0" bIns="0"/>
+          <a:lstStyle/>
+          <a:p>
+            <a:pPr algn="ctr"/>
+            <a:r>
+              <a:rPr sz="1153" b="1" i="0">
+                <a:solidFill>
+                  <a:srgbClr val="1E1E2E"/>
+                </a:solidFill>
+                <a:latin typeface="Consolas"/>
+              </a:rPr>
+              <a:t>9</a:t>
+            </a:r>
+          </a:p>
+        </p:txBody>
+      </p:sp>
+      <p:sp>
+        <p:nvSpPr>
+          <p:cNvPr id="29" name="TextBox 28"/>
           <p:cNvSpPr txBox="1"/>
           <p:nvPr/>
         </p:nvSpPr>
         <p:spPr>
           <a:xfrm>
-            <a:off x="457200" y="6528816"/>
-            <a:ext cx="6400800" cy="256032"/>
+            <a:off x="1143000" y="5813180"/>
+            <a:ext cx="10241280" cy="411479"/>
           </a:xfrm>
           <a:prstGeom prst="rect">
             <a:avLst/>
@@ -8342,6 +9827,41 @@
           <a:p>
             <a:pPr algn="l"/>
             <a:r>
+              <a:rPr sz="1500" b="0" i="0">
+                <a:solidFill>
+                  <a:srgbClr val="F2F2F2"/>
+                </a:solidFill>
+                <a:latin typeface="Calibri"/>
+              </a:rPr>
+              <a:t>Variable scope: local vs. global</a:t>
+            </a:r>
+          </a:p>
+        </p:txBody>
+      </p:sp>
+      <p:sp>
+        <p:nvSpPr>
+          <p:cNvPr id="30" name="TextBox 29"/>
+          <p:cNvSpPr txBox="1"/>
+          <p:nvPr/>
+        </p:nvSpPr>
+        <p:spPr>
+          <a:xfrm>
+            <a:off x="457200" y="6528816"/>
+            <a:ext cx="6400800" cy="256032"/>
+          </a:xfrm>
+          <a:prstGeom prst="rect">
+            <a:avLst/>
+          </a:prstGeom>
+          <a:noFill/>
+        </p:spPr>
+        <p:txBody>
+          <a:bodyPr wrap="square" anchor="t" lIns="0" rIns="0" tIns="0" bIns="0">
+            <a:spAutoFit/>
+          </a:bodyPr>
+          <a:lstStyle/>
+          <a:p>
+            <a:pPr algn="l"/>
+            <a:r>
               <a:rPr sz="900" b="0" i="0">
                 <a:solidFill>
                   <a:srgbClr val="8A8AA3"/>
@@ -8355,7 +9875,7 @@
       </p:sp>
       <p:sp>
         <p:nvSpPr>
-          <p:cNvPr id="28" name="TextBox 27"/>
+          <p:cNvPr id="31" name="TextBox 30"/>
           <p:cNvSpPr txBox="1"/>
           <p:nvPr/>
         </p:nvSpPr>
@@ -14236,7 +15756,7 @@
                 </a:solidFill>
                 <a:latin typeface="Calibri"/>
               </a:rPr>
-              <a:t>OPTIONAL INPUTS</a:t>
+              <a:t>UNDER THE HOOD</a:t>
             </a:r>
           </a:p>
         </p:txBody>
@@ -14271,7 +15791,7 @@
                 </a:solidFill>
                 <a:latin typeface="Consolas"/>
               </a:rPr>
-              <a:t>Default Parameters</a:t>
+              <a:t>Inline Functions: Skip the Jump</a:t>
             </a:r>
           </a:p>
         </p:txBody>
@@ -14285,7 +15805,7 @@
         <p:spPr>
           <a:xfrm>
             <a:off x="548640" y="1645920"/>
-            <a:ext cx="6858000" cy="3231489"/>
+            <a:ext cx="6858000" cy="2779775"/>
           </a:xfrm>
           <a:prstGeom prst="rect">
             <a:avLst/>
@@ -14540,7 +16060,7 @@
         <p:spPr>
           <a:xfrm>
             <a:off x="822959" y="2029968"/>
-            <a:ext cx="6309360" cy="2984601"/>
+            <a:ext cx="6309360" cy="2532887"/>
           </a:xfrm>
           <a:prstGeom prst="rect">
             <a:avLst/>
@@ -14565,7 +16085,25 @@
                 </a:solidFill>
                 <a:latin typeface="Consolas"/>
               </a:rPr>
-              <a:t>char</a:t>
+              <a:t>inline</a:t>
+            </a:r>
+            <a:r>
+              <a:rPr sz="1400" b="0" i="0">
+                <a:solidFill>
+                  <a:srgbClr val="D4D4D4"/>
+                </a:solidFill>
+                <a:latin typeface="Consolas"/>
+              </a:rPr>
+              <a:t> </a:t>
+            </a:r>
+            <a:r>
+              <a:rPr sz="1400" b="0" i="0">
+                <a:solidFill>
+                  <a:srgbClr val="569CD6"/>
+                </a:solidFill>
+                <a:latin typeface="Consolas"/>
+              </a:rPr>
+              <a:t>double</a:t>
             </a:r>
             <a:r>
               <a:rPr sz="1400" b="0" i="0">
@@ -14583,7 +16121,7 @@
                 </a:solidFill>
                 <a:latin typeface="Consolas"/>
               </a:rPr>
-              <a:t>getLetterGrade</a:t>
+              <a:t>square</a:t>
             </a:r>
             <a:r>
               <a:rPr sz="1400" b="0" i="0">
@@ -14593,6 +16131,60 @@
                 <a:latin typeface="Consolas"/>
               </a:rPr>
               <a:t>(</a:t>
+            </a:r>
+            <a:r>
+              <a:rPr sz="1400" b="0" i="0">
+                <a:solidFill>
+                  <a:srgbClr val="569CD6"/>
+                </a:solidFill>
+                <a:latin typeface="Consolas"/>
+              </a:rPr>
+              <a:t>double</a:t>
+            </a:r>
+            <a:r>
+              <a:rPr sz="1400" b="0" i="0">
+                <a:solidFill>
+                  <a:srgbClr val="D4D4D4"/>
+                </a:solidFill>
+                <a:latin typeface="Consolas"/>
+              </a:rPr>
+              <a:t> </a:t>
+            </a:r>
+            <a:r>
+              <a:rPr sz="1400" b="0" i="0">
+                <a:solidFill>
+                  <a:srgbClr val="D4D4D4"/>
+                </a:solidFill>
+                <a:latin typeface="Consolas"/>
+              </a:rPr>
+              <a:t>x</a:t>
+            </a:r>
+            <a:r>
+              <a:rPr sz="1400" b="0" i="0">
+                <a:solidFill>
+                  <a:srgbClr val="D4D4D4"/>
+                </a:solidFill>
+                <a:latin typeface="Consolas"/>
+              </a:rPr>
+              <a:t>)</a:t>
+            </a:r>
+            <a:r>
+              <a:rPr sz="1400" b="0" i="0">
+                <a:solidFill>
+                  <a:srgbClr val="D4D4D4"/>
+                </a:solidFill>
+                <a:latin typeface="Consolas"/>
+              </a:rPr>
+              <a:t> </a:t>
+            </a:r>
+            <a:r>
+              <a:rPr sz="1400" b="0" i="0">
+                <a:solidFill>
+                  <a:srgbClr val="D4D4D4"/>
+                </a:solidFill>
+                <a:latin typeface="Consolas"/>
+              </a:rPr>
+              <a:t>{</a:t>
             </a:r>
           </a:p>
           <a:p>
@@ -14617,133 +16209,70 @@
                 </a:solidFill>
                 <a:latin typeface="Consolas"/>
               </a:rPr>
-              <a:t>double</a:t>
-            </a:r>
-            <a:r>
-              <a:rPr sz="1400" b="0" i="0">
-                <a:solidFill>
-                  <a:srgbClr val="D4D4D4"/>
-                </a:solidFill>
-                <a:latin typeface="Consolas"/>
-              </a:rPr>
-              <a:t> </a:t>
-            </a:r>
-            <a:r>
-              <a:rPr sz="1400" b="0" i="0">
-                <a:solidFill>
-                  <a:srgbClr val="D4D4D4"/>
-                </a:solidFill>
-                <a:latin typeface="Consolas"/>
-              </a:rPr>
-              <a:t>average</a:t>
-            </a:r>
-            <a:r>
-              <a:rPr sz="1400" b="0" i="0">
-                <a:solidFill>
-                  <a:srgbClr val="D4D4D4"/>
-                </a:solidFill>
-                <a:latin typeface="Consolas"/>
-              </a:rPr>
-              <a:t>,</a:t>
-            </a:r>
-            <a:r>
-              <a:rPr sz="1400" b="0" i="0">
-                <a:solidFill>
-                  <a:srgbClr val="D4D4D4"/>
-                </a:solidFill>
-                <a:latin typeface="Consolas"/>
-              </a:rPr>
-              <a:t> </a:t>
-            </a:r>
-            <a:r>
-              <a:rPr sz="1400" b="0" i="0">
-                <a:solidFill>
-                  <a:srgbClr val="569CD6"/>
-                </a:solidFill>
-                <a:latin typeface="Consolas"/>
-              </a:rPr>
-              <a:t>double</a:t>
-            </a:r>
-            <a:r>
-              <a:rPr sz="1400" b="0" i="0">
-                <a:solidFill>
-                  <a:srgbClr val="D4D4D4"/>
-                </a:solidFill>
-                <a:latin typeface="Consolas"/>
-              </a:rPr>
-              <a:t> </a:t>
-            </a:r>
-            <a:r>
-              <a:rPr sz="1400" b="0" i="0">
-                <a:solidFill>
-                  <a:srgbClr val="D4D4D4"/>
-                </a:solidFill>
-                <a:latin typeface="Consolas"/>
-              </a:rPr>
-              <a:t>curve</a:t>
-            </a:r>
-            <a:r>
-              <a:rPr sz="1400" b="0" i="0">
-                <a:solidFill>
-                  <a:srgbClr val="D4D4D4"/>
-                </a:solidFill>
-                <a:latin typeface="Consolas"/>
-              </a:rPr>
-              <a:t> </a:t>
-            </a:r>
-            <a:r>
-              <a:rPr sz="1400" b="0" i="0">
-                <a:solidFill>
-                  <a:srgbClr val="D4D4D4"/>
-                </a:solidFill>
-                <a:latin typeface="Consolas"/>
-              </a:rPr>
-              <a:t>=</a:t>
-            </a:r>
-            <a:r>
-              <a:rPr sz="1400" b="0" i="0">
-                <a:solidFill>
-                  <a:srgbClr val="D4D4D4"/>
-                </a:solidFill>
-                <a:latin typeface="Consolas"/>
-              </a:rPr>
-              <a:t> </a:t>
-            </a:r>
-            <a:r>
-              <a:rPr sz="1400" b="0" i="0">
-                <a:solidFill>
-                  <a:srgbClr val="B5CEA8"/>
-                </a:solidFill>
-                <a:latin typeface="Consolas"/>
-              </a:rPr>
-              <a:t>0.0</a:t>
-            </a:r>
-            <a:r>
-              <a:rPr sz="1400" b="0" i="0">
-                <a:solidFill>
-                  <a:srgbClr val="D4D4D4"/>
-                </a:solidFill>
-                <a:latin typeface="Consolas"/>
-              </a:rPr>
-              <a:t>)</a:t>
-            </a:r>
-            <a:r>
-              <a:rPr sz="1400" b="0" i="0">
-                <a:solidFill>
-                  <a:srgbClr val="D4D4D4"/>
-                </a:solidFill>
-                <a:latin typeface="Consolas"/>
-              </a:rPr>
-              <a:t> </a:t>
-            </a:r>
-            <a:r>
-              <a:rPr sz="1400" b="0" i="0">
-                <a:solidFill>
-                  <a:srgbClr val="D4D4D4"/>
-                </a:solidFill>
-                <a:latin typeface="Consolas"/>
-              </a:rPr>
-              <a:t>{</a:t>
+              <a:t>return</a:t>
+            </a:r>
+            <a:r>
+              <a:rPr sz="1400" b="0" i="0">
+                <a:solidFill>
+                  <a:srgbClr val="D4D4D4"/>
+                </a:solidFill>
+                <a:latin typeface="Consolas"/>
+              </a:rPr>
+              <a:t> </a:t>
+            </a:r>
+            <a:r>
+              <a:rPr sz="1400" b="0" i="0">
+                <a:solidFill>
+                  <a:srgbClr val="D4D4D4"/>
+                </a:solidFill>
+                <a:latin typeface="Consolas"/>
+              </a:rPr>
+              <a:t>x</a:t>
+            </a:r>
+            <a:r>
+              <a:rPr sz="1400" b="0" i="0">
+                <a:solidFill>
+                  <a:srgbClr val="D4D4D4"/>
+                </a:solidFill>
+                <a:latin typeface="Consolas"/>
+              </a:rPr>
+              <a:t> </a:t>
+            </a:r>
+            <a:r>
+              <a:rPr sz="1400" b="0" i="0">
+                <a:solidFill>
+                  <a:srgbClr val="D4D4D4"/>
+                </a:solidFill>
+                <a:latin typeface="Consolas"/>
+              </a:rPr>
+              <a:t>*</a:t>
+            </a:r>
+            <a:r>
+              <a:rPr sz="1400" b="0" i="0">
+                <a:solidFill>
+                  <a:srgbClr val="D4D4D4"/>
+                </a:solidFill>
+                <a:latin typeface="Consolas"/>
+              </a:rPr>
+              <a:t> </a:t>
+            </a:r>
+            <a:r>
+              <a:rPr sz="1400" b="0" i="0">
+                <a:solidFill>
+                  <a:srgbClr val="D4D4D4"/>
+                </a:solidFill>
+                <a:latin typeface="Consolas"/>
+              </a:rPr>
+              <a:t>x</a:t>
+            </a:r>
+            <a:r>
+              <a:rPr sz="1400" b="0" i="0">
+                <a:solidFill>
+                  <a:srgbClr val="D4D4D4"/>
+                </a:solidFill>
+                <a:latin typeface="Consolas"/>
+              </a:rPr>
+              <a:t>;</a:t>
             </a:r>
           </a:p>
           <a:p>
@@ -14759,115 +16288,7 @@
                 </a:solidFill>
                 <a:latin typeface="Consolas"/>
               </a:rPr>
-              <a:t>    </a:t>
-            </a:r>
-            <a:r>
-              <a:rPr sz="1400" b="0" i="0">
-                <a:solidFill>
-                  <a:srgbClr val="569CD6"/>
-                </a:solidFill>
-                <a:latin typeface="Consolas"/>
-              </a:rPr>
-              <a:t>double</a:t>
-            </a:r>
-            <a:r>
-              <a:rPr sz="1400" b="0" i="0">
-                <a:solidFill>
-                  <a:srgbClr val="D4D4D4"/>
-                </a:solidFill>
-                <a:latin typeface="Consolas"/>
-              </a:rPr>
-              <a:t> </a:t>
-            </a:r>
-            <a:r>
-              <a:rPr sz="1400" b="0" i="0">
-                <a:solidFill>
-                  <a:srgbClr val="D4D4D4"/>
-                </a:solidFill>
-                <a:latin typeface="Consolas"/>
-              </a:rPr>
-              <a:t>adj</a:t>
-            </a:r>
-            <a:r>
-              <a:rPr sz="1400" b="0" i="0">
-                <a:solidFill>
-                  <a:srgbClr val="D4D4D4"/>
-                </a:solidFill>
-                <a:latin typeface="Consolas"/>
-              </a:rPr>
-              <a:t> </a:t>
-            </a:r>
-            <a:r>
-              <a:rPr sz="1400" b="0" i="0">
-                <a:solidFill>
-                  <a:srgbClr val="D4D4D4"/>
-                </a:solidFill>
-                <a:latin typeface="Consolas"/>
-              </a:rPr>
-              <a:t>=</a:t>
-            </a:r>
-            <a:r>
-              <a:rPr sz="1400" b="0" i="0">
-                <a:solidFill>
-                  <a:srgbClr val="D4D4D4"/>
-                </a:solidFill>
-                <a:latin typeface="Consolas"/>
-              </a:rPr>
-              <a:t> </a:t>
-            </a:r>
-            <a:r>
-              <a:rPr sz="1400" b="0" i="0">
-                <a:solidFill>
-                  <a:srgbClr val="D4D4D4"/>
-                </a:solidFill>
-                <a:latin typeface="Consolas"/>
-              </a:rPr>
-              <a:t>average</a:t>
-            </a:r>
-            <a:r>
-              <a:rPr sz="1400" b="0" i="0">
-                <a:solidFill>
-                  <a:srgbClr val="D4D4D4"/>
-                </a:solidFill>
-                <a:latin typeface="Consolas"/>
-              </a:rPr>
-              <a:t> </a:t>
-            </a:r>
-            <a:r>
-              <a:rPr sz="1400" b="0" i="0">
-                <a:solidFill>
-                  <a:srgbClr val="D4D4D4"/>
-                </a:solidFill>
-                <a:latin typeface="Consolas"/>
-              </a:rPr>
-              <a:t>+</a:t>
-            </a:r>
-            <a:r>
-              <a:rPr sz="1400" b="0" i="0">
-                <a:solidFill>
-                  <a:srgbClr val="D4D4D4"/>
-                </a:solidFill>
-                <a:latin typeface="Consolas"/>
-              </a:rPr>
-              <a:t> </a:t>
-            </a:r>
-            <a:r>
-              <a:rPr sz="1400" b="0" i="0">
-                <a:solidFill>
-                  <a:srgbClr val="D4D4D4"/>
-                </a:solidFill>
-                <a:latin typeface="Consolas"/>
-              </a:rPr>
-              <a:t>curve</a:t>
-            </a:r>
-            <a:r>
-              <a:rPr sz="1400" b="0" i="0">
-                <a:solidFill>
-                  <a:srgbClr val="D4D4D4"/>
-                </a:solidFill>
-                <a:latin typeface="Consolas"/>
-              </a:rPr>
-              <a:t>;</a:t>
+              <a:t>}</a:t>
             </a:r>
           </a:p>
           <a:p>
@@ -14883,133 +16304,7 @@
                 </a:solidFill>
                 <a:latin typeface="Consolas"/>
               </a:rPr>
-              <a:t>    </a:t>
-            </a:r>
-            <a:r>
-              <a:rPr sz="1400" b="0" i="0">
-                <a:solidFill>
-                  <a:srgbClr val="569CD6"/>
-                </a:solidFill>
-                <a:latin typeface="Consolas"/>
-              </a:rPr>
-              <a:t>if</a:t>
-            </a:r>
-            <a:r>
-              <a:rPr sz="1400" b="0" i="0">
-                <a:solidFill>
-                  <a:srgbClr val="D4D4D4"/>
-                </a:solidFill>
-                <a:latin typeface="Consolas"/>
-              </a:rPr>
-              <a:t> </a:t>
-            </a:r>
-            <a:r>
-              <a:rPr sz="1400" b="0" i="0">
-                <a:solidFill>
-                  <a:srgbClr val="D4D4D4"/>
-                </a:solidFill>
-                <a:latin typeface="Consolas"/>
-              </a:rPr>
-              <a:t>(</a:t>
-            </a:r>
-            <a:r>
-              <a:rPr sz="1400" b="0" i="0">
-                <a:solidFill>
-                  <a:srgbClr val="D4D4D4"/>
-                </a:solidFill>
-                <a:latin typeface="Consolas"/>
-              </a:rPr>
-              <a:t>adj</a:t>
-            </a:r>
-            <a:r>
-              <a:rPr sz="1400" b="0" i="0">
-                <a:solidFill>
-                  <a:srgbClr val="D4D4D4"/>
-                </a:solidFill>
-                <a:latin typeface="Consolas"/>
-              </a:rPr>
-              <a:t> </a:t>
-            </a:r>
-            <a:r>
-              <a:rPr sz="1400" b="0" i="0">
-                <a:solidFill>
-                  <a:srgbClr val="D4D4D4"/>
-                </a:solidFill>
-                <a:latin typeface="Consolas"/>
-              </a:rPr>
-              <a:t>&gt;=</a:t>
-            </a:r>
-            <a:r>
-              <a:rPr sz="1400" b="0" i="0">
-                <a:solidFill>
-                  <a:srgbClr val="D4D4D4"/>
-                </a:solidFill>
-                <a:latin typeface="Consolas"/>
-              </a:rPr>
-              <a:t> </a:t>
-            </a:r>
-            <a:r>
-              <a:rPr sz="1400" b="0" i="0">
-                <a:solidFill>
-                  <a:srgbClr val="B5CEA8"/>
-                </a:solidFill>
-                <a:latin typeface="Consolas"/>
-              </a:rPr>
-              <a:t>90</a:t>
-            </a:r>
-            <a:r>
-              <a:rPr sz="1400" b="0" i="0">
-                <a:solidFill>
-                  <a:srgbClr val="D4D4D4"/>
-                </a:solidFill>
-                <a:latin typeface="Consolas"/>
-              </a:rPr>
-              <a:t>)</a:t>
-            </a:r>
-            <a:r>
-              <a:rPr sz="1400" b="0" i="0">
-                <a:solidFill>
-                  <a:srgbClr val="D4D4D4"/>
-                </a:solidFill>
-                <a:latin typeface="Consolas"/>
-              </a:rPr>
-              <a:t> </a:t>
-            </a:r>
-            <a:r>
-              <a:rPr sz="1400" b="0" i="0">
-                <a:solidFill>
-                  <a:srgbClr val="569CD6"/>
-                </a:solidFill>
-                <a:latin typeface="Consolas"/>
-              </a:rPr>
-              <a:t>return</a:t>
-            </a:r>
-            <a:r>
-              <a:rPr sz="1400" b="0" i="0">
-                <a:solidFill>
-                  <a:srgbClr val="D4D4D4"/>
-                </a:solidFill>
-                <a:latin typeface="Consolas"/>
-              </a:rPr>
-              <a:t> </a:t>
-            </a:r>
-            <a:r>
-              <a:rPr sz="1400" b="0" i="0">
-                <a:solidFill>
-                  <a:srgbClr val="CE9178"/>
-                </a:solidFill>
-                <a:latin typeface="Consolas"/>
-              </a:rPr>
-              <a:t>'A'</a:t>
-            </a:r>
-            <a:r>
-              <a:rPr sz="1400" b="0" i="0">
-                <a:solidFill>
-                  <a:srgbClr val="D4D4D4"/>
-                </a:solidFill>
-                <a:latin typeface="Consolas"/>
-              </a:rPr>
-              <a:t>;</a:t>
+              <a:t> </a:t>
             </a:r>
           </a:p>
           <a:p>
@@ -15021,47 +16316,56 @@
             <a:r>
               <a:rPr sz="1400" b="0" i="0">
                 <a:solidFill>
-                  <a:srgbClr val="D4D4D4"/>
-                </a:solidFill>
-                <a:latin typeface="Consolas"/>
-              </a:rPr>
-              <a:t>    </a:t>
-            </a:r>
-            <a:r>
-              <a:rPr sz="1400" b="0" i="0">
-                <a:solidFill>
                   <a:srgbClr val="569CD6"/>
                 </a:solidFill>
                 <a:latin typeface="Consolas"/>
               </a:rPr>
-              <a:t>return</a:t>
-            </a:r>
-            <a:r>
-              <a:rPr sz="1400" b="0" i="0">
-                <a:solidFill>
-                  <a:srgbClr val="D4D4D4"/>
-                </a:solidFill>
-                <a:latin typeface="Consolas"/>
-              </a:rPr>
-              <a:t> </a:t>
-            </a:r>
-            <a:r>
-              <a:rPr sz="1400" b="0" i="0">
-                <a:solidFill>
-                  <a:srgbClr val="CE9178"/>
-                </a:solidFill>
-                <a:latin typeface="Consolas"/>
-              </a:rPr>
-              <a:t>'B'</a:t>
-            </a:r>
-            <a:r>
-              <a:rPr sz="1400" b="0" i="0">
-                <a:solidFill>
-                  <a:srgbClr val="D4D4D4"/>
-                </a:solidFill>
-                <a:latin typeface="Consolas"/>
-              </a:rPr>
-              <a:t>;</a:t>
+              <a:t>int</a:t>
+            </a:r>
+            <a:r>
+              <a:rPr sz="1400" b="0" i="0">
+                <a:solidFill>
+                  <a:srgbClr val="D4D4D4"/>
+                </a:solidFill>
+                <a:latin typeface="Consolas"/>
+              </a:rPr>
+              <a:t> </a:t>
+            </a:r>
+            <a:r>
+              <a:rPr sz="1400" b="0" i="0">
+                <a:solidFill>
+                  <a:srgbClr val="DCDCAA"/>
+                </a:solidFill>
+                <a:latin typeface="Consolas"/>
+              </a:rPr>
+              <a:t>main</a:t>
+            </a:r>
+            <a:r>
+              <a:rPr sz="1400" b="0" i="0">
+                <a:solidFill>
+                  <a:srgbClr val="D4D4D4"/>
+                </a:solidFill>
+                <a:latin typeface="Consolas"/>
+              </a:rPr>
+              <a:t>()</a:t>
+            </a:r>
+            <a:r>
+              <a:rPr sz="1400" b="0" i="0">
+                <a:solidFill>
+                  <a:srgbClr val="D4D4D4"/>
+                </a:solidFill>
+                <a:latin typeface="Consolas"/>
+              </a:rPr>
+              <a:t> </a:t>
+            </a:r>
+            <a:r>
+              <a:rPr sz="1400" b="0" i="0">
+                <a:solidFill>
+                  <a:srgbClr val="D4D4D4"/>
+                </a:solidFill>
+                <a:latin typeface="Consolas"/>
+              </a:rPr>
+              <a:t>{</a:t>
             </a:r>
           </a:p>
           <a:p>
@@ -15077,7 +16381,97 @@
                 </a:solidFill>
                 <a:latin typeface="Consolas"/>
               </a:rPr>
-              <a:t>}</a:t>
+              <a:t>    </a:t>
+            </a:r>
+            <a:r>
+              <a:rPr sz="1400" b="0" i="0">
+                <a:solidFill>
+                  <a:srgbClr val="569CD6"/>
+                </a:solidFill>
+                <a:latin typeface="Consolas"/>
+              </a:rPr>
+              <a:t>double</a:t>
+            </a:r>
+            <a:r>
+              <a:rPr sz="1400" b="0" i="0">
+                <a:solidFill>
+                  <a:srgbClr val="D4D4D4"/>
+                </a:solidFill>
+                <a:latin typeface="Consolas"/>
+              </a:rPr>
+              <a:t> </a:t>
+            </a:r>
+            <a:r>
+              <a:rPr sz="1400" b="0" i="0">
+                <a:solidFill>
+                  <a:srgbClr val="D4D4D4"/>
+                </a:solidFill>
+                <a:latin typeface="Consolas"/>
+              </a:rPr>
+              <a:t>a</a:t>
+            </a:r>
+            <a:r>
+              <a:rPr sz="1400" b="0" i="0">
+                <a:solidFill>
+                  <a:srgbClr val="D4D4D4"/>
+                </a:solidFill>
+                <a:latin typeface="Consolas"/>
+              </a:rPr>
+              <a:t> </a:t>
+            </a:r>
+            <a:r>
+              <a:rPr sz="1400" b="0" i="0">
+                <a:solidFill>
+                  <a:srgbClr val="D4D4D4"/>
+                </a:solidFill>
+                <a:latin typeface="Consolas"/>
+              </a:rPr>
+              <a:t>=</a:t>
+            </a:r>
+            <a:r>
+              <a:rPr sz="1400" b="0" i="0">
+                <a:solidFill>
+                  <a:srgbClr val="D4D4D4"/>
+                </a:solidFill>
+                <a:latin typeface="Consolas"/>
+              </a:rPr>
+              <a:t> </a:t>
+            </a:r>
+            <a:r>
+              <a:rPr sz="1400" b="0" i="0">
+                <a:solidFill>
+                  <a:srgbClr val="DCDCAA"/>
+                </a:solidFill>
+                <a:latin typeface="Consolas"/>
+              </a:rPr>
+              <a:t>square</a:t>
+            </a:r>
+            <a:r>
+              <a:rPr sz="1400" b="0" i="0">
+                <a:solidFill>
+                  <a:srgbClr val="D4D4D4"/>
+                </a:solidFill>
+                <a:latin typeface="Consolas"/>
+              </a:rPr>
+              <a:t>(</a:t>
+            </a:r>
+            <a:r>
+              <a:rPr sz="1400" b="0" i="0">
+                <a:solidFill>
+                  <a:srgbClr val="B5CEA8"/>
+                </a:solidFill>
+                <a:latin typeface="Consolas"/>
+              </a:rPr>
+              <a:t>4.0</a:t>
+            </a:r>
+            <a:r>
+              <a:rPr sz="1400" b="0" i="0">
+                <a:solidFill>
+                  <a:srgbClr val="D4D4D4"/>
+                </a:solidFill>
+                <a:latin typeface="Consolas"/>
+              </a:rPr>
+              <a:t>);</a:t>
             </a:r>
           </a:p>
           <a:p>
@@ -15093,7 +16487,97 @@
                 </a:solidFill>
                 <a:latin typeface="Consolas"/>
               </a:rPr>
-              <a:t> </a:t>
+              <a:t>    </a:t>
+            </a:r>
+            <a:r>
+              <a:rPr sz="1400" b="0" i="0">
+                <a:solidFill>
+                  <a:srgbClr val="569CD6"/>
+                </a:solidFill>
+                <a:latin typeface="Consolas"/>
+              </a:rPr>
+              <a:t>double</a:t>
+            </a:r>
+            <a:r>
+              <a:rPr sz="1400" b="0" i="0">
+                <a:solidFill>
+                  <a:srgbClr val="D4D4D4"/>
+                </a:solidFill>
+                <a:latin typeface="Consolas"/>
+              </a:rPr>
+              <a:t> </a:t>
+            </a:r>
+            <a:r>
+              <a:rPr sz="1400" b="0" i="0">
+                <a:solidFill>
+                  <a:srgbClr val="D4D4D4"/>
+                </a:solidFill>
+                <a:latin typeface="Consolas"/>
+              </a:rPr>
+              <a:t>b</a:t>
+            </a:r>
+            <a:r>
+              <a:rPr sz="1400" b="0" i="0">
+                <a:solidFill>
+                  <a:srgbClr val="D4D4D4"/>
+                </a:solidFill>
+                <a:latin typeface="Consolas"/>
+              </a:rPr>
+              <a:t> </a:t>
+            </a:r>
+            <a:r>
+              <a:rPr sz="1400" b="0" i="0">
+                <a:solidFill>
+                  <a:srgbClr val="D4D4D4"/>
+                </a:solidFill>
+                <a:latin typeface="Consolas"/>
+              </a:rPr>
+              <a:t>=</a:t>
+            </a:r>
+            <a:r>
+              <a:rPr sz="1400" b="0" i="0">
+                <a:solidFill>
+                  <a:srgbClr val="D4D4D4"/>
+                </a:solidFill>
+                <a:latin typeface="Consolas"/>
+              </a:rPr>
+              <a:t> </a:t>
+            </a:r>
+            <a:r>
+              <a:rPr sz="1400" b="0" i="0">
+                <a:solidFill>
+                  <a:srgbClr val="DCDCAA"/>
+                </a:solidFill>
+                <a:latin typeface="Consolas"/>
+              </a:rPr>
+              <a:t>square</a:t>
+            </a:r>
+            <a:r>
+              <a:rPr sz="1400" b="0" i="0">
+                <a:solidFill>
+                  <a:srgbClr val="D4D4D4"/>
+                </a:solidFill>
+                <a:latin typeface="Consolas"/>
+              </a:rPr>
+              <a:t>(</a:t>
+            </a:r>
+            <a:r>
+              <a:rPr sz="1400" b="0" i="0">
+                <a:solidFill>
+                  <a:srgbClr val="B5CEA8"/>
+                </a:solidFill>
+                <a:latin typeface="Consolas"/>
+              </a:rPr>
+              <a:t>9.0</a:t>
+            </a:r>
+            <a:r>
+              <a:rPr sz="1400" b="0" i="0">
+                <a:solidFill>
+                  <a:srgbClr val="D4D4D4"/>
+                </a:solidFill>
+                <a:latin typeface="Consolas"/>
+              </a:rPr>
+              <a:t>);</a:t>
             </a:r>
           </a:p>
           <a:p>
@@ -15105,67 +16589,6 @@
             <a:r>
               <a:rPr sz="1400" b="0" i="0">
                 <a:solidFill>
-                  <a:srgbClr val="569CD6"/>
-                </a:solidFill>
-                <a:latin typeface="Consolas"/>
-              </a:rPr>
-              <a:t>int</a:t>
-            </a:r>
-            <a:r>
-              <a:rPr sz="1400" b="0" i="0">
-                <a:solidFill>
-                  <a:srgbClr val="D4D4D4"/>
-                </a:solidFill>
-                <a:latin typeface="Consolas"/>
-              </a:rPr>
-              <a:t> </a:t>
-            </a:r>
-            <a:r>
-              <a:rPr sz="1400" b="0" i="0">
-                <a:solidFill>
-                  <a:srgbClr val="DCDCAA"/>
-                </a:solidFill>
-                <a:latin typeface="Consolas"/>
-              </a:rPr>
-              <a:t>main</a:t>
-            </a:r>
-            <a:r>
-              <a:rPr sz="1400" b="0" i="0">
-                <a:solidFill>
-                  <a:srgbClr val="D4D4D4"/>
-                </a:solidFill>
-                <a:latin typeface="Consolas"/>
-              </a:rPr>
-              <a:t>()</a:t>
-            </a:r>
-            <a:r>
-              <a:rPr sz="1400" b="0" i="0">
-                <a:solidFill>
-                  <a:srgbClr val="D4D4D4"/>
-                </a:solidFill>
-                <a:latin typeface="Consolas"/>
-              </a:rPr>
-              <a:t> </a:t>
-            </a:r>
-            <a:r>
-              <a:rPr sz="1400" b="0" i="0">
-                <a:solidFill>
-                  <a:srgbClr val="D4D4D4"/>
-                </a:solidFill>
-                <a:latin typeface="Consolas"/>
-              </a:rPr>
-              <a:t>{</a:t>
-            </a:r>
-          </a:p>
-          <a:p>
-            <a:pPr>
-              <a:lnSpc>
-                <a:spcPts val="1860"/>
-              </a:lnSpc>
-            </a:pPr>
-            <a:r>
-              <a:rPr sz="1400" b="0" i="0">
-                <a:solidFill>
                   <a:srgbClr val="D4D4D4"/>
                 </a:solidFill>
                 <a:latin typeface="Consolas"/>
@@ -15175,117 +16598,128 @@
             <a:r>
               <a:rPr sz="1400" b="0" i="0">
                 <a:solidFill>
-                  <a:srgbClr val="DCDCAA"/>
-                </a:solidFill>
-                <a:latin typeface="Consolas"/>
-              </a:rPr>
-              <a:t>getLetterGrade</a:t>
-            </a:r>
-            <a:r>
-              <a:rPr sz="1400" b="0" i="0">
-                <a:solidFill>
-                  <a:srgbClr val="D4D4D4"/>
-                </a:solidFill>
-                <a:latin typeface="Consolas"/>
-              </a:rPr>
-              <a:t>(</a:t>
-            </a:r>
-            <a:r>
-              <a:rPr sz="1400" b="0" i="0">
-                <a:solidFill>
-                  <a:srgbClr val="B5CEA8"/>
-                </a:solidFill>
-                <a:latin typeface="Consolas"/>
-              </a:rPr>
-              <a:t>75</a:t>
-            </a:r>
-            <a:r>
-              <a:rPr sz="1400" b="0" i="0">
-                <a:solidFill>
-                  <a:srgbClr val="D4D4D4"/>
-                </a:solidFill>
-                <a:latin typeface="Consolas"/>
-              </a:rPr>
-              <a:t>);</a:t>
-            </a:r>
-          </a:p>
-          <a:p>
-            <a:pPr>
-              <a:lnSpc>
-                <a:spcPts val="1860"/>
-              </a:lnSpc>
-            </a:pPr>
-            <a:r>
-              <a:rPr sz="1400" b="0" i="0">
-                <a:solidFill>
-                  <a:srgbClr val="D4D4D4"/>
-                </a:solidFill>
-                <a:latin typeface="Consolas"/>
-              </a:rPr>
-              <a:t>    </a:t>
-            </a:r>
-            <a:r>
-              <a:rPr sz="1400" b="0" i="0">
-                <a:solidFill>
-                  <a:srgbClr val="DCDCAA"/>
-                </a:solidFill>
-                <a:latin typeface="Consolas"/>
-              </a:rPr>
-              <a:t>getLetterGrade</a:t>
-            </a:r>
-            <a:r>
-              <a:rPr sz="1400" b="0" i="0">
-                <a:solidFill>
-                  <a:srgbClr val="D4D4D4"/>
-                </a:solidFill>
-                <a:latin typeface="Consolas"/>
-              </a:rPr>
-              <a:t>(</a:t>
-            </a:r>
-            <a:r>
-              <a:rPr sz="1400" b="0" i="0">
-                <a:solidFill>
-                  <a:srgbClr val="B5CEA8"/>
-                </a:solidFill>
-                <a:latin typeface="Consolas"/>
-              </a:rPr>
-              <a:t>75</a:t>
-            </a:r>
-            <a:r>
-              <a:rPr sz="1400" b="0" i="0">
-                <a:solidFill>
-                  <a:srgbClr val="D4D4D4"/>
-                </a:solidFill>
-                <a:latin typeface="Consolas"/>
-              </a:rPr>
-              <a:t>,</a:t>
-            </a:r>
-            <a:r>
-              <a:rPr sz="1400" b="0" i="0">
-                <a:solidFill>
-                  <a:srgbClr val="D4D4D4"/>
-                </a:solidFill>
-                <a:latin typeface="Consolas"/>
-              </a:rPr>
-              <a:t> </a:t>
-            </a:r>
-            <a:r>
-              <a:rPr sz="1400" b="0" i="0">
-                <a:solidFill>
-                  <a:srgbClr val="B5CEA8"/>
-                </a:solidFill>
-                <a:latin typeface="Consolas"/>
-              </a:rPr>
-              <a:t>5.0</a:t>
-            </a:r>
-            <a:r>
-              <a:rPr sz="1400" b="0" i="0">
-                <a:solidFill>
-                  <a:srgbClr val="D4D4D4"/>
-                </a:solidFill>
-                <a:latin typeface="Consolas"/>
-              </a:rPr>
-              <a:t>);</a:t>
+                  <a:srgbClr val="D4D4D4"/>
+                </a:solidFill>
+                <a:latin typeface="Consolas"/>
+              </a:rPr>
+              <a:t>cout</a:t>
+            </a:r>
+            <a:r>
+              <a:rPr sz="1400" b="0" i="0">
+                <a:solidFill>
+                  <a:srgbClr val="D4D4D4"/>
+                </a:solidFill>
+                <a:latin typeface="Consolas"/>
+              </a:rPr>
+              <a:t> </a:t>
+            </a:r>
+            <a:r>
+              <a:rPr sz="1400" b="0" i="0">
+                <a:solidFill>
+                  <a:srgbClr val="D4D4D4"/>
+                </a:solidFill>
+                <a:latin typeface="Consolas"/>
+              </a:rPr>
+              <a:t>&lt;&lt;</a:t>
+            </a:r>
+            <a:r>
+              <a:rPr sz="1400" b="0" i="0">
+                <a:solidFill>
+                  <a:srgbClr val="D4D4D4"/>
+                </a:solidFill>
+                <a:latin typeface="Consolas"/>
+              </a:rPr>
+              <a:t> </a:t>
+            </a:r>
+            <a:r>
+              <a:rPr sz="1400" b="0" i="0">
+                <a:solidFill>
+                  <a:srgbClr val="D4D4D4"/>
+                </a:solidFill>
+                <a:latin typeface="Consolas"/>
+              </a:rPr>
+              <a:t>a</a:t>
+            </a:r>
+            <a:r>
+              <a:rPr sz="1400" b="0" i="0">
+                <a:solidFill>
+                  <a:srgbClr val="D4D4D4"/>
+                </a:solidFill>
+                <a:latin typeface="Consolas"/>
+              </a:rPr>
+              <a:t> </a:t>
+            </a:r>
+            <a:r>
+              <a:rPr sz="1400" b="0" i="0">
+                <a:solidFill>
+                  <a:srgbClr val="D4D4D4"/>
+                </a:solidFill>
+                <a:latin typeface="Consolas"/>
+              </a:rPr>
+              <a:t>&lt;&lt;</a:t>
+            </a:r>
+            <a:r>
+              <a:rPr sz="1400" b="0" i="0">
+                <a:solidFill>
+                  <a:srgbClr val="D4D4D4"/>
+                </a:solidFill>
+                <a:latin typeface="Consolas"/>
+              </a:rPr>
+              <a:t> </a:t>
+            </a:r>
+            <a:r>
+              <a:rPr sz="1400" b="0" i="0">
+                <a:solidFill>
+                  <a:srgbClr val="CE9178"/>
+                </a:solidFill>
+                <a:latin typeface="Consolas"/>
+              </a:rPr>
+              <a:t>" "</a:t>
+            </a:r>
+            <a:r>
+              <a:rPr sz="1400" b="0" i="0">
+                <a:solidFill>
+                  <a:srgbClr val="D4D4D4"/>
+                </a:solidFill>
+                <a:latin typeface="Consolas"/>
+              </a:rPr>
+              <a:t> </a:t>
+            </a:r>
+            <a:r>
+              <a:rPr sz="1400" b="0" i="0">
+                <a:solidFill>
+                  <a:srgbClr val="D4D4D4"/>
+                </a:solidFill>
+                <a:latin typeface="Consolas"/>
+              </a:rPr>
+              <a:t>&lt;&lt;</a:t>
+            </a:r>
+            <a:r>
+              <a:rPr sz="1400" b="0" i="0">
+                <a:solidFill>
+                  <a:srgbClr val="D4D4D4"/>
+                </a:solidFill>
+                <a:latin typeface="Consolas"/>
+              </a:rPr>
+              <a:t> </a:t>
+            </a:r>
+            <a:r>
+              <a:rPr sz="1400" b="0" i="0">
+                <a:solidFill>
+                  <a:srgbClr val="D4D4D4"/>
+                </a:solidFill>
+                <a:latin typeface="Consolas"/>
+              </a:rPr>
+              <a:t>b</a:t>
+            </a:r>
+            <a:r>
+              <a:rPr sz="1400" b="0" i="0">
+                <a:solidFill>
+                  <a:srgbClr val="D4D4D4"/>
+                </a:solidFill>
+                <a:latin typeface="Consolas"/>
+              </a:rPr>
+              <a:t>;</a:t>
             </a:r>
           </a:p>
           <a:p>
@@ -15394,7 +16828,7 @@
                 </a:solidFill>
                 <a:latin typeface="Calibri"/>
               </a:rPr>
-              <a:t>curve = 0.0 is the DEFAULT — used only when the caller omits it.</a:t>
+              <a:t>Every function call has a little overhead — the CPU jumps there and back.</a:t>
             </a:r>
           </a:p>
           <a:p>
@@ -15412,7 +16846,7 @@
                 </a:solidFill>
                 <a:latin typeface="Calibri"/>
               </a:rPr>
-              <a:t>getLetterGrade(75) runs with curve automatically set to 0.0.</a:t>
+              <a:t>inline hints the compiler to paste square's code directly at each call site.</a:t>
             </a:r>
           </a:p>
           <a:p>
@@ -15430,7 +16864,7 @@
                 </a:solidFill>
                 <a:latin typeface="Calibri"/>
               </a:rPr>
-              <a:t>getLetterGrade(75, 5.0) overrides the default with a 5-point curve.</a:t>
+              <a:t>No jump for a tiny, frequently-called function — just inserted math instead.</a:t>
             </a:r>
           </a:p>
           <a:p>
@@ -15448,14 +16882,78 @@
                 </a:solidFill>
                 <a:latin typeface="Calibri"/>
               </a:rPr>
-              <a:t>Default parameters must come after any required parameters in the list.</a:t>
-            </a:r>
-          </a:p>
-        </p:txBody>
-      </p:sp>
-      <p:sp>
-        <p:nvSpPr>
-          <p:cNvPr id="13" name="TextBox 12"/>
+              <a:t>Modern compilers often inline small functions automatically, keyword or not.</a:t>
+            </a:r>
+          </a:p>
+        </p:txBody>
+      </p:sp>
+      <p:sp>
+        <p:nvSpPr>
+          <p:cNvPr id="13" name="Rectangle 12"/>
+          <p:cNvSpPr/>
+          <p:nvPr/>
+        </p:nvSpPr>
+        <p:spPr>
+          <a:xfrm>
+            <a:off x="548640" y="4608576"/>
+            <a:ext cx="6858000" cy="658368"/>
+          </a:xfrm>
+          <a:prstGeom prst="rect">
+            <a:avLst/>
+          </a:prstGeom>
+          <a:solidFill>
+            <a:srgbClr val="FFFFFF"/>
+          </a:solidFill>
+          <a:ln>
+            <a:noFill/>
+          </a:ln>
+          <a:effectLst/>
+        </p:spPr>
+        <p:style>
+          <a:lnRef idx="1">
+            <a:schemeClr val="accent1"/>
+          </a:lnRef>
+          <a:fillRef idx="3">
+            <a:schemeClr val="accent1"/>
+          </a:fillRef>
+          <a:effectRef idx="2">
+            <a:schemeClr val="accent1"/>
+          </a:effectRef>
+          <a:fontRef idx="minor">
+            <a:schemeClr val="lt1"/>
+          </a:fontRef>
+        </p:style>
+        <p:txBody>
+          <a:bodyPr rtlCol="0" anchor="ctr" lIns="137160" rIns="137160" tIns="73152" bIns="73152" wrap="square"/>
+          <a:lstStyle/>
+          <a:p>
+            <a:pPr algn="ctr"/>
+            <a:r>
+              <a:rPr sz="1000" b="1" i="0">
+                <a:solidFill>
+                  <a:srgbClr val="0E7C7B"/>
+                </a:solidFill>
+                <a:latin typeface="Calibri"/>
+              </a:rPr>
+              <a:t>OUTPUT</a:t>
+            </a:r>
+          </a:p>
+          <a:p>
+            <a:r>
+              <a:rPr sz="1200" b="0" i="0">
+                <a:solidFill>
+                  <a:srgbClr val="1E1E2E"/>
+                </a:solidFill>
+                <a:latin typeface="Consolas"/>
+              </a:rPr>
+              <a:t>16 81</a:t>
+            </a:r>
+          </a:p>
+        </p:txBody>
+      </p:sp>
+      <p:sp>
+        <p:nvSpPr>
+          <p:cNvPr id="14" name="TextBox 13"/>
           <p:cNvSpPr txBox="1"/>
           <p:nvPr/>
         </p:nvSpPr>
@@ -15490,7 +16988,7 @@
       </p:sp>
       <p:sp>
         <p:nvSpPr>
-          <p:cNvPr id="14" name="TextBox 13"/>
+          <p:cNvPr id="15" name="TextBox 14"/>
           <p:cNvSpPr txBox="1"/>
           <p:nvPr/>
         </p:nvSpPr>
